--- a/demo/StudAura-presentation.pptx
+++ b/demo/StudAura-presentation.pptx
@@ -2566,7 +2566,7 @@
                 <a:ea typeface="Calibri" pitchFamily="34" charset="-122"/>
                 <a:cs typeface="Calibri" pitchFamily="34" charset="-120"/>
               </a:rPr>
-              <a:t>371</a:t>
+              <a:t>656</a:t>
             </a:r>
             <a:endParaRPr lang="en-US" sz="5400" dirty="0"/>
           </a:p>
@@ -2605,7 +2605,7 @@
                 <a:ea typeface="Calibri" pitchFamily="34" charset="-122"/>
                 <a:cs typeface="Calibri" pitchFamily="34" charset="-120"/>
               </a:rPr>
-              <a:t>frontend unit tests</a:t>
+              <a:t>backend tests, real PostgreSQL</a:t>
             </a:r>
             <a:endParaRPr lang="en-US" sz="1400" dirty="0"/>
           </a:p>
@@ -2671,7 +2671,7 @@
                 <a:ea typeface="Calibri" pitchFamily="34" charset="-122"/>
                 <a:cs typeface="Calibri" pitchFamily="34" charset="-120"/>
               </a:rPr>
-              <a:t>35</a:t>
+              <a:t>371</a:t>
             </a:r>
             <a:endParaRPr lang="en-US" sz="5400" dirty="0"/>
           </a:p>
@@ -2710,7 +2710,7 @@
                 <a:ea typeface="Calibri" pitchFamily="34" charset="-122"/>
                 <a:cs typeface="Calibri" pitchFamily="34" charset="-120"/>
               </a:rPr>
-              <a:t>pull requests merged</a:t>
+              <a:t>frontend unit tests</a:t>
             </a:r>
             <a:endParaRPr lang="en-US" sz="1400" dirty="0"/>
           </a:p>
@@ -2776,7 +2776,7 @@
                 <a:ea typeface="Calibri" pitchFamily="34" charset="-122"/>
                 <a:cs typeface="Calibri" pitchFamily="34" charset="-120"/>
               </a:rPr>
-              <a:t>0</a:t>
+              <a:t>28</a:t>
             </a:r>
             <a:endParaRPr lang="en-US" sz="5400" dirty="0"/>
           </a:p>
@@ -2815,7 +2815,7 @@
                 <a:ea typeface="Calibri" pitchFamily="34" charset="-122"/>
                 <a:cs typeface="Calibri" pitchFamily="34" charset="-120"/>
               </a:rPr>
-              <a:t>fixable HIGH / CRITICAL findings</a:t>
+              <a:t>pull requests merged</a:t>
             </a:r>
             <a:endParaRPr lang="en-US" sz="1400" dirty="0"/>
           </a:p>
@@ -2841,6 +2841,27 @@
         <p:txBody>
           <a:bodyPr wrap="square" lIns="0" tIns="0" rIns="0" bIns="0" rtlCol="0" anchor="t"/>
           <a:lstStyle/>
+          <a:p>
+            <a:pPr marL="342900" indent="-342900">
+              <a:spcAft>
+                <a:spcPts val="600"/>
+              </a:spcAft>
+              <a:buSzPct val="100000"/>
+              <a:buChar char="•"/>
+            </a:pPr>
+            <a:r>
+              <a:rPr lang="en-US" sz="1600" dirty="0">
+                <a:solidFill>
+                  <a:srgbClr val="F5F5F5"/>
+                </a:solidFill>
+                <a:latin typeface="Calibri" pitchFamily="34" charset="0"/>
+                <a:ea typeface="Calibri" pitchFamily="34" charset="-122"/>
+                <a:cs typeface="Calibri" pitchFamily="34" charset="-120"/>
+              </a:rPr>
+              <a:t>Both images scan clean: zero fixable HIGH or CRITICAL findings</a:t>
+            </a:r>
+            <a:endParaRPr lang="en-US" sz="1600" dirty="0"/>
+          </a:p>
           <a:p>
             <a:pPr marL="342900" indent="-342900">
               <a:spcAft>

--- a/demo/StudAura-presentation.pptx
+++ b/demo/StudAura-presentation.pptx
@@ -17,9 +17,11 @@
     <p:sldId id="265" r:id="rId11"/>
     <p:sldId id="266" r:id="rId12"/>
     <p:sldId id="267" r:id="rId13"/>
+    <p:sldId id="268" r:id="rId14"/>
+    <p:sldId id="269" r:id="rId15"/>
   </p:sldIdLst>
   <p:notesMasterIdLst>
-    <p:notesMasterId r:id="rId14"/>
+    <p:notesMasterId r:id="rId16"/>
   </p:notesMasterIdLst>
   <p:sldSz cx="9144000" cy="5143500"/>
   <p:notesSz cx="5143500" cy="9144000"/>
@@ -601,7 +603,7 @@
           <a:p>
             <a:r>
               <a:rPr lang="en-US" dirty="0"/>
-              <a:t>Show /metrics, the Prometheus targets page, then the Grafana dashboard with traffic running.</a:t>
+              <a:t>Show kubectl get pods, svc, ingress and helm list; then the app through the load balancer.</a:t>
             </a:r>
             <a:endParaRPr lang="en-US" dirty="0"/>
           </a:p>
@@ -689,7 +691,7 @@
           <a:p>
             <a:r>
               <a:rPr lang="en-US" dirty="0"/>
-              <a:t>Numbers are from the real CI runs.</a:t>
+              <a:t>Merge to main, CI moves the deploy branch, ArgoCD applies it. Main is never pushed to by automation.</a:t>
             </a:r>
             <a:endParaRPr lang="en-US" dirty="0"/>
           </a:p>
@@ -777,7 +779,7 @@
           <a:p>
             <a:r>
               <a:rPr lang="en-US" dirty="0"/>
-              <a:t>Be honest about the limits; graders respect it.</a:t>
+              <a:t>Show /metrics, the Prometheus targets page, then the Grafana dashboard with traffic running.</a:t>
             </a:r>
             <a:endParaRPr lang="en-US" dirty="0"/>
           </a:p>
@@ -801,6 +803,182 @@
             <a:fld id="{F7021451-1387-4CA6-816F-3879F97B5CBC}" type="slidenum">
               <a:rPr lang="en-US"/>
               <a:t>12</a:t>
+            </a:fld>
+            <a:endParaRPr lang="en-US"/>
+          </a:p>
+        </p:txBody>
+      </p:sp>
+    </p:spTree>
+    <p:extLst>
+      <p:ext uri="{BB962C8B-B14F-4D97-AF65-F5344CB8AC3E}">
+        <p14:creationId xmlns:p14="http://schemas.microsoft.com/office/powerpoint/2010/main" val="1024086991"/>
+      </p:ext>
+    </p:extLst>
+  </p:cSld>
+  <p:clrMapOvr>
+    <a:masterClrMapping/>
+  </p:clrMapOvr>
+</p:notes>
+</file>
+
+<file path=ppt/notesSlides/notesSlide13.xml><?xml version="1.0" encoding="utf-8"?>
+<p:notes xmlns:a="http://schemas.openxmlformats.org/drawingml/2006/main" xmlns:r="http://schemas.openxmlformats.org/officeDocument/2006/relationships" xmlns:p="http://schemas.openxmlformats.org/presentationml/2006/main">
+  <p:cSld>
+    <p:spTree>
+      <p:nvGrpSpPr>
+        <p:cNvPr id="1" name=""/>
+        <p:cNvGrpSpPr/>
+        <p:nvPr/>
+      </p:nvGrpSpPr>
+      <p:grpSpPr>
+        <a:xfrm>
+          <a:off x="0" y="0"/>
+          <a:ext cx="0" cy="0"/>
+          <a:chOff x="0" y="0"/>
+          <a:chExt cx="0" cy="0"/>
+        </a:xfrm>
+      </p:grpSpPr>
+      <p:sp>
+        <p:nvSpPr>
+          <p:cNvPr id="2" name="Slide Image Placeholder 1"/>
+          <p:cNvSpPr>
+            <a:spLocks noGrp="1" noRot="1" noChangeAspect="1"/>
+          </p:cNvSpPr>
+          <p:nvPr>
+            <p:ph type="sldImg"/>
+          </p:nvPr>
+        </p:nvSpPr>
+        <p:spPr/>
+      </p:sp>
+      <p:sp>
+        <p:nvSpPr>
+          <p:cNvPr id="3" name="Notes Placeholder 2"/>
+          <p:cNvSpPr>
+            <a:spLocks noGrp="1"/>
+          </p:cNvSpPr>
+          <p:nvPr>
+            <p:ph type="body" idx="1"/>
+          </p:nvPr>
+        </p:nvSpPr>
+        <p:spPr/>
+        <p:txBody>
+          <a:bodyPr/>
+          <a:lstStyle/>
+          <a:p>
+            <a:r>
+              <a:rPr lang="en-US" dirty="0"/>
+              <a:t>Numbers are from the real CI runs and the local pytest run.</a:t>
+            </a:r>
+            <a:endParaRPr lang="en-US" dirty="0"/>
+          </a:p>
+        </p:txBody>
+      </p:sp>
+      <p:sp>
+        <p:nvSpPr>
+          <p:cNvPr id="4" name="Slide Number Placeholder 3"/>
+          <p:cNvSpPr>
+            <a:spLocks noGrp="1"/>
+          </p:cNvSpPr>
+          <p:nvPr>
+            <p:ph type="sldNum" sz="quarter" idx="10"/>
+          </p:nvPr>
+        </p:nvSpPr>
+        <p:spPr/>
+        <p:txBody>
+          <a:bodyPr/>
+          <a:lstStyle/>
+          <a:p>
+            <a:fld id="{F7021451-1387-4CA6-816F-3879F97B5CBC}" type="slidenum">
+              <a:rPr lang="en-US"/>
+              <a:t>13</a:t>
+            </a:fld>
+            <a:endParaRPr lang="en-US"/>
+          </a:p>
+        </p:txBody>
+      </p:sp>
+    </p:spTree>
+    <p:extLst>
+      <p:ext uri="{BB962C8B-B14F-4D97-AF65-F5344CB8AC3E}">
+        <p14:creationId xmlns:p14="http://schemas.microsoft.com/office/powerpoint/2010/main" val="1024086991"/>
+      </p:ext>
+    </p:extLst>
+  </p:cSld>
+  <p:clrMapOvr>
+    <a:masterClrMapping/>
+  </p:clrMapOvr>
+</p:notes>
+</file>
+
+<file path=ppt/notesSlides/notesSlide14.xml><?xml version="1.0" encoding="utf-8"?>
+<p:notes xmlns:a="http://schemas.openxmlformats.org/drawingml/2006/main" xmlns:r="http://schemas.openxmlformats.org/officeDocument/2006/relationships" xmlns:p="http://schemas.openxmlformats.org/presentationml/2006/main">
+  <p:cSld>
+    <p:spTree>
+      <p:nvGrpSpPr>
+        <p:cNvPr id="1" name=""/>
+        <p:cNvGrpSpPr/>
+        <p:nvPr/>
+      </p:nvGrpSpPr>
+      <p:grpSpPr>
+        <a:xfrm>
+          <a:off x="0" y="0"/>
+          <a:ext cx="0" cy="0"/>
+          <a:chOff x="0" y="0"/>
+          <a:chExt cx="0" cy="0"/>
+        </a:xfrm>
+      </p:grpSpPr>
+      <p:sp>
+        <p:nvSpPr>
+          <p:cNvPr id="2" name="Slide Image Placeholder 1"/>
+          <p:cNvSpPr>
+            <a:spLocks noGrp="1" noRot="1" noChangeAspect="1"/>
+          </p:cNvSpPr>
+          <p:nvPr>
+            <p:ph type="sldImg"/>
+          </p:nvPr>
+        </p:nvSpPr>
+        <p:spPr/>
+      </p:sp>
+      <p:sp>
+        <p:nvSpPr>
+          <p:cNvPr id="3" name="Notes Placeholder 2"/>
+          <p:cNvSpPr>
+            <a:spLocks noGrp="1"/>
+          </p:cNvSpPr>
+          <p:nvPr>
+            <p:ph type="body" idx="1"/>
+          </p:nvPr>
+        </p:nvSpPr>
+        <p:spPr/>
+        <p:txBody>
+          <a:bodyPr/>
+          <a:lstStyle/>
+          <a:p>
+            <a:r>
+              <a:rPr lang="en-US" dirty="0"/>
+              <a:t>Be honest about the limits; graders respect it.</a:t>
+            </a:r>
+            <a:endParaRPr lang="en-US" dirty="0"/>
+          </a:p>
+        </p:txBody>
+      </p:sp>
+      <p:sp>
+        <p:nvSpPr>
+          <p:cNvPr id="4" name="Slide Number Placeholder 3"/>
+          <p:cNvSpPr>
+            <a:spLocks noGrp="1"/>
+          </p:cNvSpPr>
+          <p:nvPr>
+            <p:ph type="sldNum" sz="quarter" idx="10"/>
+          </p:nvPr>
+        </p:nvSpPr>
+        <p:spPr/>
+        <p:txBody>
+          <a:bodyPr/>
+          <a:lstStyle/>
+          <a:p>
+            <a:fld id="{F7021451-1387-4CA6-816F-3879F97B5CBC}" type="slidenum">
+              <a:rPr lang="en-US"/>
+              <a:t>14</a:t>
             </a:fld>
             <a:endParaRPr lang="en-US"/>
           </a:p>
@@ -865,7 +1043,7 @@
           <a:p>
             <a:r>
               <a:rPr lang="en-US" dirty="0"/>
-              <a:t>Walk through the four areas quickly; the point is that the app is real, not a toy.</a:t>
+              <a:t>Show the sign-in page. Mention it is a real app: Supabase auth, FastAPI backend, React frontend, responsive on a phone.</a:t>
             </a:r>
             <a:endParaRPr lang="en-US" dirty="0"/>
           </a:p>
@@ -1129,7 +1307,7 @@
           <a:p>
             <a:r>
               <a:rPr lang="en-US" dirty="0"/>
-              <a:t>Every PR runs all gates. Only main publishes. Tags are always the commit SHA.</a:t>
+              <a:t>Show the green run. Every PR runs all gates. Only main publishes. Tags are always the commit SHA.</a:t>
             </a:r>
             <a:endParaRPr lang="en-US" dirty="0"/>
           </a:p>
@@ -1217,7 +1395,7 @@
           <a:p>
             <a:r>
               <a:rPr lang="en-US" dirty="0"/>
-              <a:t>Explain what Trivy scanned and what a clean result means.</a:t>
+              <a:t>Show docker compose up, then the GHCR page with SHA tags.</a:t>
             </a:r>
             <a:endParaRPr lang="en-US" dirty="0"/>
           </a:p>
@@ -1305,7 +1483,7 @@
           <a:p>
             <a:r>
               <a:rPr lang="en-US" dirty="0"/>
-              <a:t>Show terraform plan, then the AWS console with the VPC and the EKS cluster.</a:t>
+              <a:t>Explain what Trivy scanned and what a clean result means.</a:t>
             </a:r>
             <a:endParaRPr lang="en-US" dirty="0"/>
           </a:p>
@@ -1393,7 +1571,7 @@
           <a:p>
             <a:r>
               <a:rPr lang="en-US" dirty="0"/>
-              <a:t>Show kubectl get pods, svc, ingress and helm list.</a:t>
+              <a:t>Show terraform plan, then the AWS console VPC resource map.</a:t>
             </a:r>
             <a:endParaRPr lang="en-US" dirty="0"/>
           </a:p>
@@ -1481,7 +1659,7 @@
           <a:p>
             <a:r>
               <a:rPr lang="en-US" dirty="0"/>
-              <a:t>Merge to main, CI moves the deploy branch, ArgoCD applies it. Main is never pushed to by automation.</a:t>
+              <a:t>Show the cluster and node group in the console, then the destroy output.</a:t>
             </a:r>
             <a:endParaRPr lang="en-US" dirty="0"/>
           </a:p>
@@ -1862,7 +2040,7 @@
         </p:nvSpPr>
         <p:spPr>
           <a:xfrm>
-            <a:off x="640080" y="1234440"/>
+            <a:off x="640080" y="1097280"/>
             <a:ext cx="7863840" cy="1005840"/>
           </a:xfrm>
           <a:prstGeom prst="rect">
@@ -1901,7 +2079,7 @@
         </p:nvSpPr>
         <p:spPr>
           <a:xfrm>
-            <a:off x="640080" y="2286000"/>
+            <a:off x="640080" y="2148840"/>
             <a:ext cx="7863840" cy="457200"/>
           </a:xfrm>
           <a:prstGeom prst="rect">
@@ -1940,7 +2118,7 @@
         </p:nvSpPr>
         <p:spPr>
           <a:xfrm>
-            <a:off x="640080" y="2880360"/>
+            <a:off x="640080" y="2743200"/>
             <a:ext cx="7863840" cy="457200"/>
           </a:xfrm>
           <a:prstGeom prst="rect">
@@ -1979,7 +2157,7 @@
         </p:nvSpPr>
         <p:spPr>
           <a:xfrm>
-            <a:off x="640080" y="3931920"/>
+            <a:off x="640080" y="3886200"/>
             <a:ext cx="7863840" cy="365760"/>
           </a:xfrm>
           <a:prstGeom prst="rect">
@@ -2114,7 +2292,7 @@
                 <a:ea typeface="Calibri" pitchFamily="34" charset="-122"/>
                 <a:cs typeface="Calibri" pitchFamily="34" charset="-120"/>
               </a:rPr>
-              <a:t>Observability</a:t>
+              <a:t>Kubernetes and Helm</a:t>
             </a:r>
             <a:endParaRPr lang="en-US" sz="3400" dirty="0"/>
           </a:p>
@@ -2122,24 +2300,128 @@
       </p:sp>
       <p:sp>
         <p:nvSpPr>
-          <p:cNvPr id="4" name="Shape 1"/>
+          <p:cNvPr id="4" name="Text 1"/>
+          <p:cNvSpPr txBox="1"/>
+          <p:nvPr/>
+        </p:nvSpPr>
+        <p:spPr>
+          <a:xfrm>
+            <a:off x="457200" y="1188720"/>
+            <a:ext cx="3383280" cy="2011680"/>
+          </a:xfrm>
+          <a:prstGeom prst="rect">
+            <a:avLst/>
+          </a:prstGeom>
+          <a:noFill/>
+          <a:ln/>
+        </p:spPr>
+        <p:txBody>
+          <a:bodyPr wrap="square" lIns="0" tIns="0" rIns="0" bIns="0" rtlCol="0" anchor="t"/>
+          <a:lstStyle/>
+          <a:p>
+            <a:pPr marL="342900" indent="-342900">
+              <a:spcAft>
+                <a:spcPts val="600"/>
+              </a:spcAft>
+              <a:buSzPct val="100000"/>
+              <a:buChar char="•"/>
+            </a:pPr>
+            <a:r>
+              <a:rPr lang="en-US" sz="1400" dirty="0">
+                <a:solidFill>
+                  <a:srgbClr val="F5F5F5"/>
+                </a:solidFill>
+                <a:latin typeface="Calibri" pitchFamily="34" charset="0"/>
+                <a:ea typeface="Calibri" pitchFamily="34" charset="-122"/>
+                <a:cs typeface="Calibri" pitchFamily="34" charset="-120"/>
+              </a:rPr>
+              <a:t>2 backend + 2 frontend pods, autoscaling 2 to 4</a:t>
+            </a:r>
+            <a:endParaRPr lang="en-US" sz="1400" dirty="0"/>
+          </a:p>
+          <a:p>
+            <a:pPr marL="342900" indent="-342900">
+              <a:spcAft>
+                <a:spcPts val="600"/>
+              </a:spcAft>
+              <a:buSzPct val="100000"/>
+              <a:buChar char="•"/>
+            </a:pPr>
+            <a:r>
+              <a:rPr lang="en-US" sz="1400" dirty="0">
+                <a:solidFill>
+                  <a:srgbClr val="F5F5F5"/>
+                </a:solidFill>
+                <a:latin typeface="Calibri" pitchFamily="34" charset="0"/>
+                <a:ea typeface="Calibri" pitchFamily="34" charset="-122"/>
+                <a:cs typeface="Calibri" pitchFamily="34" charset="-120"/>
+              </a:rPr>
+              <a:t>ClusterIP Services; one Ingress</a:t>
+            </a:r>
+            <a:endParaRPr lang="en-US" sz="1400" dirty="0"/>
+          </a:p>
+          <a:p>
+            <a:pPr marL="342900" indent="-342900">
+              <a:spcAft>
+                <a:spcPts val="600"/>
+              </a:spcAft>
+              <a:buSzPct val="100000"/>
+              <a:buChar char="•"/>
+            </a:pPr>
+            <a:r>
+              <a:rPr lang="en-US" sz="1400" dirty="0">
+                <a:solidFill>
+                  <a:srgbClr val="F5F5F5"/>
+                </a:solidFill>
+                <a:latin typeface="Calibri" pitchFamily="34" charset="0"/>
+                <a:ea typeface="Calibri" pitchFamily="34" charset="-122"/>
+                <a:cs typeface="Calibri" pitchFamily="34" charset="-120"/>
+              </a:rPr>
+              <a:t>/ goes to the frontend, /api to the backend</a:t>
+            </a:r>
+            <a:endParaRPr lang="en-US" sz="1400" dirty="0"/>
+          </a:p>
+          <a:p>
+            <a:pPr marL="342900" indent="-342900">
+              <a:spcAft>
+                <a:spcPts val="600"/>
+              </a:spcAft>
+              <a:buSzPct val="100000"/>
+              <a:buChar char="•"/>
+            </a:pPr>
+            <a:r>
+              <a:rPr lang="en-US" sz="1400" dirty="0">
+                <a:solidFill>
+                  <a:srgbClr val="F5F5F5"/>
+                </a:solidFill>
+                <a:latin typeface="Calibri" pitchFamily="34" charset="0"/>
+                <a:ea typeface="Calibri" pitchFamily="34" charset="-122"/>
+                <a:cs typeface="Calibri" pitchFamily="34" charset="-120"/>
+              </a:rPr>
+              <a:t>Migration runs as a hook Job</a:t>
+            </a:r>
+            <a:endParaRPr lang="en-US" sz="1400" dirty="0"/>
+          </a:p>
+        </p:txBody>
+      </p:sp>
+      <p:sp>
+        <p:nvSpPr>
+          <p:cNvPr id="5" name="Shape 2"/>
           <p:cNvSpPr/>
           <p:nvPr/>
         </p:nvSpPr>
         <p:spPr>
           <a:xfrm>
-            <a:off x="457200" y="1188720"/>
-            <a:ext cx="2606040" cy="3383280"/>
-          </a:xfrm>
-          <a:prstGeom prst="roundRect">
-            <a:avLst>
-              <a:gd name="adj" fmla="val 2807"/>
-            </a:avLst>
+            <a:off x="630936" y="3127248"/>
+            <a:ext cx="2395728" cy="1517904"/>
+          </a:xfrm>
+          <a:prstGeom prst="rect">
+            <a:avLst/>
           </a:prstGeom>
           <a:solidFill>
             <a:srgbClr val="17191C"/>
           </a:solidFill>
-          <a:ln w="9525">
+          <a:ln w="12700">
             <a:solidFill>
               <a:srgbClr val="292D32"/>
             </a:solidFill>
@@ -2147,16 +2429,40 @@
           </a:ln>
         </p:spPr>
       </p:sp>
-      <p:sp>
-        <p:nvSpPr>
-          <p:cNvPr id="5" name="Text 2"/>
+      <p:pic>
+        <p:nvPicPr>
+          <p:cNvPr id="6" name="Image 0" descr="D:/Resume projects/StudAura/docs/screenshots/app-login-via-ingress.png">    </p:cNvPr>
+          <p:cNvPicPr>
+            <a:picLocks noChangeAspect="1"/>
+          </p:cNvPicPr>
+          <p:nvPr/>
+        </p:nvPicPr>
+        <p:blipFill>
+          <a:blip r:embed="rId1"/>
+          <a:stretch>
+            <a:fillRect/>
+          </a:stretch>
+        </p:blipFill>
+        <p:spPr>
+          <a:xfrm>
+            <a:off x="658368" y="3154680"/>
+            <a:ext cx="2340864" cy="1463040"/>
+          </a:xfrm>
+          <a:prstGeom prst="rect">
+            <a:avLst/>
+          </a:prstGeom>
+        </p:spPr>
+      </p:pic>
+      <p:sp>
+        <p:nvSpPr>
+          <p:cNvPr id="7" name="Text 3"/>
           <p:cNvSpPr txBox="1"/>
           <p:nvPr/>
         </p:nvSpPr>
         <p:spPr>
           <a:xfrm>
-            <a:off x="640080" y="1298448"/>
-            <a:ext cx="2240280" cy="365760"/>
+            <a:off x="457200" y="4672584"/>
+            <a:ext cx="2743200" cy="219456"/>
           </a:xfrm>
           <a:prstGeom prst="rect">
             <a:avLst/>
@@ -2165,53 +2471,14 @@
           <a:ln/>
         </p:spPr>
         <p:txBody>
-          <a:bodyPr wrap="square" lIns="0" tIns="0" rIns="0" bIns="0" rtlCol="0" anchor="ctr"/>
-          <a:lstStyle/>
-          <a:p>
-            <a:pPr indent="0" marL="0">
-              <a:buNone/>
-            </a:pPr>
-            <a:r>
-              <a:rPr lang="en-US" sz="1800" b="1" dirty="0">
-                <a:solidFill>
-                  <a:srgbClr val="FB923C"/>
-                </a:solidFill>
-                <a:latin typeface="Calibri" pitchFamily="34" charset="0"/>
-                <a:ea typeface="Calibri" pitchFamily="34" charset="-122"/>
-                <a:cs typeface="Calibri" pitchFamily="34" charset="-120"/>
-              </a:rPr>
-              <a:t>Metrics</a:t>
-            </a:r>
-            <a:endParaRPr lang="en-US" sz="1800" dirty="0"/>
-          </a:p>
-        </p:txBody>
-      </p:sp>
-      <p:sp>
-        <p:nvSpPr>
-          <p:cNvPr id="6" name="Text 3"/>
-          <p:cNvSpPr txBox="1"/>
-          <p:nvPr/>
-        </p:nvSpPr>
-        <p:spPr>
-          <a:xfrm>
-            <a:off x="640080" y="1691640"/>
-            <a:ext cx="2240280" cy="2743200"/>
-          </a:xfrm>
-          <a:prstGeom prst="rect">
-            <a:avLst/>
-          </a:prstGeom>
-          <a:noFill/>
-          <a:ln/>
-        </p:spPr>
-        <p:txBody>
           <a:bodyPr wrap="square" lIns="0" tIns="0" rIns="0" bIns="0" rtlCol="0" anchor="t"/>
           <a:lstStyle/>
           <a:p>
-            <a:pPr indent="0" marL="0">
-              <a:buNone/>
-            </a:pPr>
-            <a:r>
-              <a:rPr lang="en-US" sz="1400" dirty="0">
+            <a:pPr algn="ctr" indent="0" marL="0">
+              <a:buNone/>
+            </a:pPr>
+            <a:r>
+              <a:rPr lang="en-US" sz="1100" dirty="0">
                 <a:solidFill>
                   <a:srgbClr val="B8BEC7"/>
                 </a:solidFill>
@@ -2219,32 +2486,30 @@
                 <a:ea typeface="Calibri" pitchFamily="34" charset="-122"/>
                 <a:cs typeface="Calibri" pitchFamily="34" charset="-120"/>
               </a:rPr>
-              <a:t>Request rate, latency by route, status classes, plus business counters for imports, progress and note-save failures. No user or video IDs as labels.</a:t>
-            </a:r>
-            <a:endParaRPr lang="en-US" sz="1400" dirty="0"/>
-          </a:p>
-        </p:txBody>
-      </p:sp>
-      <p:sp>
-        <p:nvSpPr>
-          <p:cNvPr id="7" name="Shape 4"/>
+              <a:t>The app through the Ingress</a:t>
+            </a:r>
+            <a:endParaRPr lang="en-US" sz="1100" dirty="0"/>
+          </a:p>
+        </p:txBody>
+      </p:sp>
+      <p:sp>
+        <p:nvSpPr>
+          <p:cNvPr id="8" name="Shape 4"/>
           <p:cNvSpPr/>
           <p:nvPr/>
         </p:nvSpPr>
         <p:spPr>
           <a:xfrm>
-            <a:off x="3246120" y="1188720"/>
-            <a:ext cx="2606040" cy="3383280"/>
-          </a:xfrm>
-          <a:prstGeom prst="roundRect">
-            <a:avLst>
-              <a:gd name="adj" fmla="val 2807"/>
-            </a:avLst>
+            <a:off x="3950208" y="1115568"/>
+            <a:ext cx="4764024" cy="2052215"/>
+          </a:xfrm>
+          <a:prstGeom prst="rect">
+            <a:avLst/>
           </a:prstGeom>
           <a:solidFill>
             <a:srgbClr val="17191C"/>
           </a:solidFill>
-          <a:ln w="9525">
+          <a:ln w="12700">
             <a:solidFill>
               <a:srgbClr val="292D32"/>
             </a:solidFill>
@@ -2252,16 +2517,40 @@
           </a:ln>
         </p:spPr>
       </p:sp>
-      <p:sp>
-        <p:nvSpPr>
-          <p:cNvPr id="8" name="Text 5"/>
+      <p:pic>
+        <p:nvPicPr>
+          <p:cNvPr id="9" name="Image 1" descr="D:/Resume projects/StudAura/docs/screenshots/terminal-kubectl.png">    </p:cNvPr>
+          <p:cNvPicPr>
+            <a:picLocks noChangeAspect="1"/>
+          </p:cNvPicPr>
+          <p:nvPr/>
+        </p:nvPicPr>
+        <p:blipFill>
+          <a:blip r:embed="rId2"/>
+          <a:stretch>
+            <a:fillRect/>
+          </a:stretch>
+        </p:blipFill>
+        <p:spPr>
+          <a:xfrm>
+            <a:off x="3977640" y="1143000"/>
+            <a:ext cx="4709160" cy="1997351"/>
+          </a:xfrm>
+          <a:prstGeom prst="rect">
+            <a:avLst/>
+          </a:prstGeom>
+        </p:spPr>
+      </p:pic>
+      <p:sp>
+        <p:nvSpPr>
+          <p:cNvPr id="10" name="Text 5"/>
           <p:cNvSpPr txBox="1"/>
           <p:nvPr/>
         </p:nvSpPr>
         <p:spPr>
           <a:xfrm>
-            <a:off x="3429000" y="1298448"/>
-            <a:ext cx="2240280" cy="365760"/>
+            <a:off x="3977640" y="3195215"/>
+            <a:ext cx="4709160" cy="219456"/>
           </a:xfrm>
           <a:prstGeom prst="rect">
             <a:avLst/>
@@ -2270,53 +2559,14 @@
           <a:ln/>
         </p:spPr>
         <p:txBody>
-          <a:bodyPr wrap="square" lIns="0" tIns="0" rIns="0" bIns="0" rtlCol="0" anchor="ctr"/>
-          <a:lstStyle/>
-          <a:p>
-            <a:pPr indent="0" marL="0">
-              <a:buNone/>
-            </a:pPr>
-            <a:r>
-              <a:rPr lang="en-US" sz="1800" b="1" dirty="0">
-                <a:solidFill>
-                  <a:srgbClr val="FB923C"/>
-                </a:solidFill>
-                <a:latin typeface="Calibri" pitchFamily="34" charset="0"/>
-                <a:ea typeface="Calibri" pitchFamily="34" charset="-122"/>
-                <a:cs typeface="Calibri" pitchFamily="34" charset="-120"/>
-              </a:rPr>
-              <a:t>Prometheus</a:t>
-            </a:r>
-            <a:endParaRPr lang="en-US" sz="1800" dirty="0"/>
-          </a:p>
-        </p:txBody>
-      </p:sp>
-      <p:sp>
-        <p:nvSpPr>
-          <p:cNvPr id="9" name="Text 6"/>
-          <p:cNvSpPr txBox="1"/>
-          <p:nvPr/>
-        </p:nvSpPr>
-        <p:spPr>
-          <a:xfrm>
-            <a:off x="3429000" y="1691640"/>
-            <a:ext cx="2240280" cy="2743200"/>
-          </a:xfrm>
-          <a:prstGeom prst="rect">
-            <a:avLst/>
-          </a:prstGeom>
-          <a:noFill/>
-          <a:ln/>
-        </p:spPr>
-        <p:txBody>
           <a:bodyPr wrap="square" lIns="0" tIns="0" rIns="0" bIns="0" rtlCol="0" anchor="t"/>
           <a:lstStyle/>
           <a:p>
-            <a:pPr indent="0" marL="0">
-              <a:buNone/>
-            </a:pPr>
-            <a:r>
-              <a:rPr lang="en-US" sz="1400" dirty="0">
+            <a:pPr algn="ctr" indent="0" marL="0">
+              <a:buNone/>
+            </a:pPr>
+            <a:r>
+              <a:rPr lang="en-US" sz="1100" dirty="0">
                 <a:solidFill>
                   <a:srgbClr val="B8BEC7"/>
                 </a:solidFill>
@@ -2324,32 +2574,30 @@
                 <a:ea typeface="Calibri" pitchFamily="34" charset="-122"/>
                 <a:cs typeface="Calibri" pitchFamily="34" charset="-120"/>
               </a:rPr>
-              <a:t>kube-prometheus-stack. A ServiceMonitor scrapes both backend pods; both show UP on the targets page.</a:t>
-            </a:r>
-            <a:endParaRPr lang="en-US" sz="1400" dirty="0"/>
-          </a:p>
-        </p:txBody>
-      </p:sp>
-      <p:sp>
-        <p:nvSpPr>
-          <p:cNvPr id="10" name="Shape 7"/>
+              <a:t>kubectl get pods,svc,ingress -n studaura</a:t>
+            </a:r>
+            <a:endParaRPr lang="en-US" sz="1100" dirty="0"/>
+          </a:p>
+        </p:txBody>
+      </p:sp>
+      <p:sp>
+        <p:nvSpPr>
+          <p:cNvPr id="11" name="Shape 6"/>
           <p:cNvSpPr/>
           <p:nvPr/>
         </p:nvSpPr>
         <p:spPr>
           <a:xfrm>
-            <a:off x="6035040" y="1188720"/>
-            <a:ext cx="2651760" cy="3383280"/>
-          </a:xfrm>
-          <a:prstGeom prst="roundRect">
-            <a:avLst>
-              <a:gd name="adj" fmla="val 2759"/>
-            </a:avLst>
+            <a:off x="4020010" y="3721608"/>
+            <a:ext cx="4624419" cy="694944"/>
+          </a:xfrm>
+          <a:prstGeom prst="rect">
+            <a:avLst/>
           </a:prstGeom>
           <a:solidFill>
             <a:srgbClr val="17191C"/>
           </a:solidFill>
-          <a:ln w="9525">
+          <a:ln w="12700">
             <a:solidFill>
               <a:srgbClr val="292D32"/>
             </a:solidFill>
@@ -2357,16 +2605,40 @@
           </a:ln>
         </p:spPr>
       </p:sp>
-      <p:sp>
-        <p:nvSpPr>
-          <p:cNvPr id="11" name="Text 8"/>
+      <p:pic>
+        <p:nvPicPr>
+          <p:cNvPr id="12" name="Image 2" descr="D:/Resume projects/StudAura/docs/screenshots/terminal-helm.png">    </p:cNvPr>
+          <p:cNvPicPr>
+            <a:picLocks noChangeAspect="1"/>
+          </p:cNvPicPr>
+          <p:nvPr/>
+        </p:nvPicPr>
+        <p:blipFill>
+          <a:blip r:embed="rId3"/>
+          <a:stretch>
+            <a:fillRect/>
+          </a:stretch>
+        </p:blipFill>
+        <p:spPr>
+          <a:xfrm>
+            <a:off x="4047442" y="3749040"/>
+            <a:ext cx="4569555" cy="640080"/>
+          </a:xfrm>
+          <a:prstGeom prst="rect">
+            <a:avLst/>
+          </a:prstGeom>
+        </p:spPr>
+      </p:pic>
+      <p:sp>
+        <p:nvSpPr>
+          <p:cNvPr id="13" name="Text 7"/>
           <p:cNvSpPr txBox="1"/>
           <p:nvPr/>
         </p:nvSpPr>
         <p:spPr>
           <a:xfrm>
-            <a:off x="6217920" y="1298448"/>
-            <a:ext cx="2286000" cy="365760"/>
+            <a:off x="3977640" y="4443984"/>
+            <a:ext cx="4709160" cy="219456"/>
           </a:xfrm>
           <a:prstGeom prst="rect">
             <a:avLst/>
@@ -2375,53 +2647,14 @@
           <a:ln/>
         </p:spPr>
         <p:txBody>
-          <a:bodyPr wrap="square" lIns="0" tIns="0" rIns="0" bIns="0" rtlCol="0" anchor="ctr"/>
-          <a:lstStyle/>
-          <a:p>
-            <a:pPr indent="0" marL="0">
-              <a:buNone/>
-            </a:pPr>
-            <a:r>
-              <a:rPr lang="en-US" sz="1800" b="1" dirty="0">
-                <a:solidFill>
-                  <a:srgbClr val="FB923C"/>
-                </a:solidFill>
-                <a:latin typeface="Calibri" pitchFamily="34" charset="0"/>
-                <a:ea typeface="Calibri" pitchFamily="34" charset="-122"/>
-                <a:cs typeface="Calibri" pitchFamily="34" charset="-120"/>
-              </a:rPr>
-              <a:t>Grafana + alerts</a:t>
-            </a:r>
-            <a:endParaRPr lang="en-US" sz="1800" dirty="0"/>
-          </a:p>
-        </p:txBody>
-      </p:sp>
-      <p:sp>
-        <p:nvSpPr>
-          <p:cNvPr id="12" name="Text 9"/>
-          <p:cNvSpPr txBox="1"/>
-          <p:nvPr/>
-        </p:nvSpPr>
-        <p:spPr>
-          <a:xfrm>
-            <a:off x="6217920" y="1691640"/>
-            <a:ext cx="2286000" cy="2743200"/>
-          </a:xfrm>
-          <a:prstGeom prst="rect">
-            <a:avLst/>
-          </a:prstGeom>
-          <a:noFill/>
-          <a:ln/>
-        </p:spPr>
-        <p:txBody>
           <a:bodyPr wrap="square" lIns="0" tIns="0" rIns="0" bIns="0" rtlCol="0" anchor="t"/>
           <a:lstStyle/>
           <a:p>
-            <a:pPr indent="0" marL="0">
-              <a:buNone/>
-            </a:pPr>
-            <a:r>
-              <a:rPr lang="en-US" sz="1400" dirty="0">
+            <a:pPr algn="ctr" indent="0" marL="0">
+              <a:buNone/>
+            </a:pPr>
+            <a:r>
+              <a:rPr lang="en-US" sz="1100" dirty="0">
                 <a:solidFill>
                   <a:srgbClr val="B8BEC7"/>
                 </a:solidFill>
@@ -2429,9 +2662,9 @@
                 <a:ea typeface="Calibri" pitchFamily="34" charset="-122"/>
                 <a:cs typeface="Calibri" pitchFamily="34" charset="-120"/>
               </a:rPr>
-              <a:t>Provisioned StudAura dashboard: 8 panels. Alerts for a backend down, 5xx above 5%, database unreachable.</a:t>
-            </a:r>
-            <a:endParaRPr lang="en-US" sz="1400" dirty="0"/>
+              <a:t>helm list -A</a:t>
+            </a:r>
+            <a:endParaRPr lang="en-US" sz="1100" dirty="0"/>
           </a:p>
         </p:txBody>
       </p:sp>
@@ -2500,7 +2733,7 @@
                 <a:ea typeface="Calibri" pitchFamily="34" charset="-122"/>
                 <a:cs typeface="Calibri" pitchFamily="34" charset="-120"/>
               </a:rPr>
-              <a:t>Quality gates</a:t>
+              <a:t>GitOps with ArgoCD</a:t>
             </a:r>
             <a:endParaRPr lang="en-US" sz="3400" dirty="0"/>
           </a:p>
@@ -2514,18 +2747,420 @@
         </p:nvSpPr>
         <p:spPr>
           <a:xfrm>
-            <a:off x="457200" y="1280160"/>
-            <a:ext cx="2651760" cy="1828800"/>
+            <a:off x="365760" y="1097280"/>
+            <a:ext cx="1737360" cy="777240"/>
           </a:xfrm>
           <a:prstGeom prst="roundRect">
             <a:avLst>
-              <a:gd name="adj" fmla="val 4000"/>
+              <a:gd name="adj" fmla="val 9412"/>
             </a:avLst>
+          </a:prstGeom>
+          <a:solidFill>
+            <a:srgbClr val="202327"/>
+          </a:solidFill>
+          <a:ln w="15875">
+            <a:solidFill>
+              <a:srgbClr val="60A5FA"/>
+            </a:solidFill>
+            <a:prstDash val="solid"/>
+          </a:ln>
+        </p:spPr>
+      </p:sp>
+      <p:sp>
+        <p:nvSpPr>
+          <p:cNvPr id="5" name="Text 2"/>
+          <p:cNvSpPr txBox="1"/>
+          <p:nvPr/>
+        </p:nvSpPr>
+        <p:spPr>
+          <a:xfrm>
+            <a:off x="365760" y="1097280"/>
+            <a:ext cx="1737360" cy="777240"/>
+          </a:xfrm>
+          <a:prstGeom prst="rect">
+            <a:avLst/>
+          </a:prstGeom>
+          <a:noFill/>
+          <a:ln/>
+        </p:spPr>
+        <p:txBody>
+          <a:bodyPr wrap="square" lIns="508" tIns="508" rIns="508" bIns="508" rtlCol="0" anchor="ctr"/>
+          <a:lstStyle/>
+          <a:p>
+            <a:pPr algn="ctr" indent="0" marL="0">
+              <a:buNone/>
+            </a:pPr>
+            <a:r>
+              <a:rPr lang="en-US" sz="1400" b="1" dirty="0">
+                <a:solidFill>
+                  <a:srgbClr val="F5F5F5"/>
+                </a:solidFill>
+                <a:latin typeface="Calibri" pitchFamily="34" charset="0"/>
+                <a:ea typeface="Calibri" pitchFamily="34" charset="-122"/>
+                <a:cs typeface="Calibri" pitchFamily="34" charset="-120"/>
+              </a:rPr>
+              <a:t>main</a:t>
+            </a:r>
+            <a:endParaRPr lang="en-US" sz="1400" dirty="0"/>
+          </a:p>
+          <a:p>
+            <a:pPr algn="ctr" indent="0" marL="0">
+              <a:buNone/>
+            </a:pPr>
+            <a:r>
+              <a:rPr lang="en-US" sz="1200" dirty="0">
+                <a:solidFill>
+                  <a:srgbClr val="B8BEC7"/>
+                </a:solidFill>
+                <a:latin typeface="Calibri" pitchFamily="34" charset="0"/>
+                <a:ea typeface="Calibri" pitchFamily="34" charset="-122"/>
+                <a:cs typeface="Calibri" pitchFamily="34" charset="-120"/>
+              </a:rPr>
+              <a:t>merge</a:t>
+            </a:r>
+            <a:endParaRPr lang="en-US" sz="1400" dirty="0"/>
+          </a:p>
+        </p:txBody>
+      </p:sp>
+      <p:sp>
+        <p:nvSpPr>
+          <p:cNvPr id="6" name="Shape 3"/>
+          <p:cNvSpPr/>
+          <p:nvPr/>
+        </p:nvSpPr>
+        <p:spPr>
+          <a:xfrm>
+            <a:off x="2514600" y="1097280"/>
+            <a:ext cx="1737360" cy="777240"/>
+          </a:xfrm>
+          <a:prstGeom prst="roundRect">
+            <a:avLst>
+              <a:gd name="adj" fmla="val 9412"/>
+            </a:avLst>
+          </a:prstGeom>
+          <a:solidFill>
+            <a:srgbClr val="202327"/>
+          </a:solidFill>
+          <a:ln w="15875">
+            <a:solidFill>
+              <a:srgbClr val="F21D3D"/>
+            </a:solidFill>
+            <a:prstDash val="solid"/>
+          </a:ln>
+        </p:spPr>
+      </p:sp>
+      <p:sp>
+        <p:nvSpPr>
+          <p:cNvPr id="7" name="Text 4"/>
+          <p:cNvSpPr txBox="1"/>
+          <p:nvPr/>
+        </p:nvSpPr>
+        <p:spPr>
+          <a:xfrm>
+            <a:off x="2514600" y="1097280"/>
+            <a:ext cx="1737360" cy="777240"/>
+          </a:xfrm>
+          <a:prstGeom prst="rect">
+            <a:avLst/>
+          </a:prstGeom>
+          <a:noFill/>
+          <a:ln/>
+        </p:spPr>
+        <p:txBody>
+          <a:bodyPr wrap="square" lIns="508" tIns="508" rIns="508" bIns="508" rtlCol="0" anchor="ctr"/>
+          <a:lstStyle/>
+          <a:p>
+            <a:pPr algn="ctr" indent="0" marL="0">
+              <a:buNone/>
+            </a:pPr>
+            <a:r>
+              <a:rPr lang="en-US" sz="1400" b="1" dirty="0">
+                <a:solidFill>
+                  <a:srgbClr val="F5F5F5"/>
+                </a:solidFill>
+                <a:latin typeface="Calibri" pitchFamily="34" charset="0"/>
+                <a:ea typeface="Calibri" pitchFamily="34" charset="-122"/>
+                <a:cs typeface="Calibri" pitchFamily="34" charset="-120"/>
+              </a:rPr>
+              <a:t>CI publish</a:t>
+            </a:r>
+            <a:endParaRPr lang="en-US" sz="1400" dirty="0"/>
+          </a:p>
+          <a:p>
+            <a:pPr algn="ctr" indent="0" marL="0">
+              <a:buNone/>
+            </a:pPr>
+            <a:r>
+              <a:rPr lang="en-US" sz="1200" dirty="0">
+                <a:solidFill>
+                  <a:srgbClr val="B8BEC7"/>
+                </a:solidFill>
+                <a:latin typeface="Calibri" pitchFamily="34" charset="0"/>
+                <a:ea typeface="Calibri" pitchFamily="34" charset="-122"/>
+                <a:cs typeface="Calibri" pitchFamily="34" charset="-120"/>
+              </a:rPr>
+              <a:t>images in GHCR</a:t>
+            </a:r>
+            <a:endParaRPr lang="en-US" sz="1400" dirty="0"/>
+          </a:p>
+        </p:txBody>
+      </p:sp>
+      <p:sp>
+        <p:nvSpPr>
+          <p:cNvPr id="8" name="Shape 5"/>
+          <p:cNvSpPr/>
+          <p:nvPr/>
+        </p:nvSpPr>
+        <p:spPr>
+          <a:xfrm>
+            <a:off x="4663440" y="1097280"/>
+            <a:ext cx="1737360" cy="777240"/>
+          </a:xfrm>
+          <a:prstGeom prst="roundRect">
+            <a:avLst>
+              <a:gd name="adj" fmla="val 9412"/>
+            </a:avLst>
+          </a:prstGeom>
+          <a:solidFill>
+            <a:srgbClr val="202327"/>
+          </a:solidFill>
+          <a:ln w="15875">
+            <a:solidFill>
+              <a:srgbClr val="34D399"/>
+            </a:solidFill>
+            <a:prstDash val="solid"/>
+          </a:ln>
+        </p:spPr>
+      </p:sp>
+      <p:sp>
+        <p:nvSpPr>
+          <p:cNvPr id="9" name="Text 6"/>
+          <p:cNvSpPr txBox="1"/>
+          <p:nvPr/>
+        </p:nvSpPr>
+        <p:spPr>
+          <a:xfrm>
+            <a:off x="4663440" y="1097280"/>
+            <a:ext cx="1737360" cy="777240"/>
+          </a:xfrm>
+          <a:prstGeom prst="rect">
+            <a:avLst/>
+          </a:prstGeom>
+          <a:noFill/>
+          <a:ln/>
+        </p:spPr>
+        <p:txBody>
+          <a:bodyPr wrap="square" lIns="508" tIns="508" rIns="508" bIns="508" rtlCol="0" anchor="ctr"/>
+          <a:lstStyle/>
+          <a:p>
+            <a:pPr algn="ctr" indent="0" marL="0">
+              <a:buNone/>
+            </a:pPr>
+            <a:r>
+              <a:rPr lang="en-US" sz="1400" b="1" dirty="0">
+                <a:solidFill>
+                  <a:srgbClr val="F5F5F5"/>
+                </a:solidFill>
+                <a:latin typeface="Calibri" pitchFamily="34" charset="0"/>
+                <a:ea typeface="Calibri" pitchFamily="34" charset="-122"/>
+                <a:cs typeface="Calibri" pitchFamily="34" charset="-120"/>
+              </a:rPr>
+              <a:t>deploy branch</a:t>
+            </a:r>
+            <a:endParaRPr lang="en-US" sz="1400" dirty="0"/>
+          </a:p>
+          <a:p>
+            <a:pPr algn="ctr" indent="0" marL="0">
+              <a:buNone/>
+            </a:pPr>
+            <a:r>
+              <a:rPr lang="en-US" sz="1200" dirty="0">
+                <a:solidFill>
+                  <a:srgbClr val="B8BEC7"/>
+                </a:solidFill>
+                <a:latin typeface="Calibri" pitchFamily="34" charset="0"/>
+                <a:ea typeface="Calibri" pitchFamily="34" charset="-122"/>
+                <a:cs typeface="Calibri" pitchFamily="34" charset="-120"/>
+              </a:rPr>
+              <a:t>image.yaml: SHA</a:t>
+            </a:r>
+            <a:endParaRPr lang="en-US" sz="1400" dirty="0"/>
+          </a:p>
+        </p:txBody>
+      </p:sp>
+      <p:sp>
+        <p:nvSpPr>
+          <p:cNvPr id="10" name="Shape 7"/>
+          <p:cNvSpPr/>
+          <p:nvPr/>
+        </p:nvSpPr>
+        <p:spPr>
+          <a:xfrm>
+            <a:off x="6812280" y="1097280"/>
+            <a:ext cx="1965960" cy="777240"/>
+          </a:xfrm>
+          <a:prstGeom prst="roundRect">
+            <a:avLst>
+              <a:gd name="adj" fmla="val 9412"/>
+            </a:avLst>
+          </a:prstGeom>
+          <a:solidFill>
+            <a:srgbClr val="202327"/>
+          </a:solidFill>
+          <a:ln w="15875">
+            <a:solidFill>
+              <a:srgbClr val="34D399"/>
+            </a:solidFill>
+            <a:prstDash val="solid"/>
+          </a:ln>
+        </p:spPr>
+      </p:sp>
+      <p:sp>
+        <p:nvSpPr>
+          <p:cNvPr id="11" name="Text 8"/>
+          <p:cNvSpPr txBox="1"/>
+          <p:nvPr/>
+        </p:nvSpPr>
+        <p:spPr>
+          <a:xfrm>
+            <a:off x="6812280" y="1097280"/>
+            <a:ext cx="1965960" cy="777240"/>
+          </a:xfrm>
+          <a:prstGeom prst="rect">
+            <a:avLst/>
+          </a:prstGeom>
+          <a:noFill/>
+          <a:ln/>
+        </p:spPr>
+        <p:txBody>
+          <a:bodyPr wrap="square" lIns="508" tIns="508" rIns="508" bIns="508" rtlCol="0" anchor="ctr"/>
+          <a:lstStyle/>
+          <a:p>
+            <a:pPr algn="ctr" indent="0" marL="0">
+              <a:buNone/>
+            </a:pPr>
+            <a:r>
+              <a:rPr lang="en-US" sz="1400" b="1" dirty="0">
+                <a:solidFill>
+                  <a:srgbClr val="F5F5F5"/>
+                </a:solidFill>
+                <a:latin typeface="Calibri" pitchFamily="34" charset="0"/>
+                <a:ea typeface="Calibri" pitchFamily="34" charset="-122"/>
+                <a:cs typeface="Calibri" pitchFamily="34" charset="-120"/>
+              </a:rPr>
+              <a:t>ArgoCD</a:t>
+            </a:r>
+            <a:endParaRPr lang="en-US" sz="1400" dirty="0"/>
+          </a:p>
+          <a:p>
+            <a:pPr algn="ctr" indent="0" marL="0">
+              <a:buNone/>
+            </a:pPr>
+            <a:r>
+              <a:rPr lang="en-US" sz="1200" dirty="0">
+                <a:solidFill>
+                  <a:srgbClr val="B8BEC7"/>
+                </a:solidFill>
+                <a:latin typeface="Calibri" pitchFamily="34" charset="0"/>
+                <a:ea typeface="Calibri" pitchFamily="34" charset="-122"/>
+                <a:cs typeface="Calibri" pitchFamily="34" charset="-120"/>
+              </a:rPr>
+              <a:t>sync + self-heal</a:t>
+            </a:r>
+            <a:endParaRPr lang="en-US" sz="1400" dirty="0"/>
+          </a:p>
+        </p:txBody>
+      </p:sp>
+      <p:sp>
+        <p:nvSpPr>
+          <p:cNvPr id="12" name="Shape 9"/>
+          <p:cNvSpPr/>
+          <p:nvPr/>
+        </p:nvSpPr>
+        <p:spPr>
+          <a:xfrm>
+            <a:off x="2103120" y="1481328"/>
+            <a:ext cx="411480" cy="0"/>
+          </a:xfrm>
+          <a:prstGeom prst="line">
+            <a:avLst/>
+          </a:prstGeom>
+          <a:noFill/>
+          <a:ln w="19050">
+            <a:solidFill>
+              <a:srgbClr val="B8BEC7"/>
+            </a:solidFill>
+            <a:prstDash val="solid"/>
+            <a:tailEnd type="triangle"/>
+          </a:ln>
+        </p:spPr>
+      </p:sp>
+      <p:sp>
+        <p:nvSpPr>
+          <p:cNvPr id="13" name="Shape 10"/>
+          <p:cNvSpPr/>
+          <p:nvPr/>
+        </p:nvSpPr>
+        <p:spPr>
+          <a:xfrm>
+            <a:off x="4251960" y="1481328"/>
+            <a:ext cx="411480" cy="0"/>
+          </a:xfrm>
+          <a:prstGeom prst="line">
+            <a:avLst/>
+          </a:prstGeom>
+          <a:noFill/>
+          <a:ln w="19050">
+            <a:solidFill>
+              <a:srgbClr val="B8BEC7"/>
+            </a:solidFill>
+            <a:prstDash val="solid"/>
+            <a:tailEnd type="triangle"/>
+          </a:ln>
+        </p:spPr>
+      </p:sp>
+      <p:sp>
+        <p:nvSpPr>
+          <p:cNvPr id="14" name="Shape 11"/>
+          <p:cNvSpPr/>
+          <p:nvPr/>
+        </p:nvSpPr>
+        <p:spPr>
+          <a:xfrm>
+            <a:off x="6400800" y="1481328"/>
+            <a:ext cx="411480" cy="0"/>
+          </a:xfrm>
+          <a:prstGeom prst="line">
+            <a:avLst/>
+          </a:prstGeom>
+          <a:noFill/>
+          <a:ln w="19050">
+            <a:solidFill>
+              <a:srgbClr val="B8BEC7"/>
+            </a:solidFill>
+            <a:prstDash val="solid"/>
+            <a:tailEnd type="triangle"/>
+          </a:ln>
+        </p:spPr>
+      </p:sp>
+      <p:sp>
+        <p:nvSpPr>
+          <p:cNvPr id="15" name="Shape 12"/>
+          <p:cNvSpPr/>
+          <p:nvPr/>
+        </p:nvSpPr>
+        <p:spPr>
+          <a:xfrm>
+            <a:off x="707232" y="2075688"/>
+            <a:ext cx="4437696" cy="2569464"/>
+          </a:xfrm>
+          <a:prstGeom prst="rect">
+            <a:avLst/>
           </a:prstGeom>
           <a:solidFill>
             <a:srgbClr val="17191C"/>
           </a:solidFill>
-          <a:ln w="9525">
+          <a:ln w="12700">
             <a:solidFill>
               <a:srgbClr val="292D32"/>
             </a:solidFill>
@@ -2533,16 +3168,40 @@
           </a:ln>
         </p:spPr>
       </p:sp>
-      <p:sp>
-        <p:nvSpPr>
-          <p:cNvPr id="5" name="Text 2"/>
+      <p:pic>
+        <p:nvPicPr>
+          <p:cNvPr id="16" name="Image 0" descr="D:/Resume projects/StudAura/docs/screenshots/argocd-application.png">    </p:cNvPr>
+          <p:cNvPicPr>
+            <a:picLocks noChangeAspect="1"/>
+          </p:cNvPicPr>
+          <p:nvPr/>
+        </p:nvPicPr>
+        <p:blipFill>
+          <a:blip r:embed="rId1"/>
+          <a:stretch>
+            <a:fillRect/>
+          </a:stretch>
+        </p:blipFill>
+        <p:spPr>
+          <a:xfrm>
+            <a:off x="734664" y="2103120"/>
+            <a:ext cx="4382832" cy="2514600"/>
+          </a:xfrm>
+          <a:prstGeom prst="rect">
+            <a:avLst/>
+          </a:prstGeom>
+        </p:spPr>
+      </p:pic>
+      <p:sp>
+        <p:nvSpPr>
+          <p:cNvPr id="17" name="Text 13"/>
           <p:cNvSpPr txBox="1"/>
           <p:nvPr/>
         </p:nvSpPr>
         <p:spPr>
           <a:xfrm>
-            <a:off x="457200" y="1417320"/>
-            <a:ext cx="2651760" cy="914400"/>
+            <a:off x="457200" y="4672584"/>
+            <a:ext cx="4937760" cy="219456"/>
           </a:xfrm>
           <a:prstGeom prst="rect">
             <a:avLst/>
@@ -2551,286 +3210,37 @@
           <a:ln/>
         </p:spPr>
         <p:txBody>
-          <a:bodyPr wrap="square" lIns="0" tIns="0" rIns="0" bIns="0" rtlCol="0" anchor="ctr"/>
+          <a:bodyPr wrap="square" lIns="0" tIns="0" rIns="0" bIns="0" rtlCol="0" anchor="t"/>
           <a:lstStyle/>
           <a:p>
             <a:pPr algn="ctr" indent="0" marL="0">
               <a:buNone/>
             </a:pPr>
             <a:r>
-              <a:rPr lang="en-US" sz="5400" b="1" dirty="0">
-                <a:solidFill>
-                  <a:srgbClr val="F21D3D"/>
-                </a:solidFill>
-                <a:latin typeface="Calibri" pitchFamily="34" charset="0"/>
-                <a:ea typeface="Calibri" pitchFamily="34" charset="-122"/>
-                <a:cs typeface="Calibri" pitchFamily="34" charset="-120"/>
-              </a:rPr>
-              <a:t>656</a:t>
-            </a:r>
-            <a:endParaRPr lang="en-US" sz="5400" dirty="0"/>
-          </a:p>
-        </p:txBody>
-      </p:sp>
-      <p:sp>
-        <p:nvSpPr>
-          <p:cNvPr id="6" name="Text 3"/>
+              <a:rPr lang="en-US" sz="1100" dirty="0">
+                <a:solidFill>
+                  <a:srgbClr val="B8BEC7"/>
+                </a:solidFill>
+                <a:latin typeface="Calibri" pitchFamily="34" charset="0"/>
+                <a:ea typeface="Calibri" pitchFamily="34" charset="-122"/>
+                <a:cs typeface="Calibri" pitchFamily="34" charset="-120"/>
+              </a:rPr>
+              <a:t>ArgoCD: Healthy, Synced to the deploy branch</a:t>
+            </a:r>
+            <a:endParaRPr lang="en-US" sz="1100" dirty="0"/>
+          </a:p>
+        </p:txBody>
+      </p:sp>
+      <p:sp>
+        <p:nvSpPr>
+          <p:cNvPr id="18" name="Text 14"/>
           <p:cNvSpPr txBox="1"/>
           <p:nvPr/>
         </p:nvSpPr>
         <p:spPr>
           <a:xfrm>
-            <a:off x="640080" y="2423160"/>
-            <a:ext cx="2286000" cy="548640"/>
-          </a:xfrm>
-          <a:prstGeom prst="rect">
-            <a:avLst/>
-          </a:prstGeom>
-          <a:noFill/>
-          <a:ln/>
-        </p:spPr>
-        <p:txBody>
-          <a:bodyPr wrap="square" lIns="0" tIns="0" rIns="0" bIns="0" rtlCol="0" anchor="ctr"/>
-          <a:lstStyle/>
-          <a:p>
-            <a:pPr algn="ctr" indent="0" marL="0">
-              <a:buNone/>
-            </a:pPr>
-            <a:r>
-              <a:rPr lang="en-US" sz="1400" dirty="0">
-                <a:solidFill>
-                  <a:srgbClr val="B8BEC7"/>
-                </a:solidFill>
-                <a:latin typeface="Calibri" pitchFamily="34" charset="0"/>
-                <a:ea typeface="Calibri" pitchFamily="34" charset="-122"/>
-                <a:cs typeface="Calibri" pitchFamily="34" charset="-120"/>
-              </a:rPr>
-              <a:t>backend tests, real PostgreSQL</a:t>
-            </a:r>
-            <a:endParaRPr lang="en-US" sz="1400" dirty="0"/>
-          </a:p>
-        </p:txBody>
-      </p:sp>
-      <p:sp>
-        <p:nvSpPr>
-          <p:cNvPr id="7" name="Shape 4"/>
-          <p:cNvSpPr/>
-          <p:nvPr/>
-        </p:nvSpPr>
-        <p:spPr>
-          <a:xfrm>
-            <a:off x="3291840" y="1280160"/>
-            <a:ext cx="2651760" cy="1828800"/>
-          </a:xfrm>
-          <a:prstGeom prst="roundRect">
-            <a:avLst>
-              <a:gd name="adj" fmla="val 4000"/>
-            </a:avLst>
-          </a:prstGeom>
-          <a:solidFill>
-            <a:srgbClr val="17191C"/>
-          </a:solidFill>
-          <a:ln w="9525">
-            <a:solidFill>
-              <a:srgbClr val="292D32"/>
-            </a:solidFill>
-            <a:prstDash val="solid"/>
-          </a:ln>
-        </p:spPr>
-      </p:sp>
-      <p:sp>
-        <p:nvSpPr>
-          <p:cNvPr id="8" name="Text 5"/>
-          <p:cNvSpPr txBox="1"/>
-          <p:nvPr/>
-        </p:nvSpPr>
-        <p:spPr>
-          <a:xfrm>
-            <a:off x="3291840" y="1417320"/>
-            <a:ext cx="2651760" cy="914400"/>
-          </a:xfrm>
-          <a:prstGeom prst="rect">
-            <a:avLst/>
-          </a:prstGeom>
-          <a:noFill/>
-          <a:ln/>
-        </p:spPr>
-        <p:txBody>
-          <a:bodyPr wrap="square" lIns="0" tIns="0" rIns="0" bIns="0" rtlCol="0" anchor="ctr"/>
-          <a:lstStyle/>
-          <a:p>
-            <a:pPr algn="ctr" indent="0" marL="0">
-              <a:buNone/>
-            </a:pPr>
-            <a:r>
-              <a:rPr lang="en-US" sz="5400" b="1" dirty="0">
-                <a:solidFill>
-                  <a:srgbClr val="F21D3D"/>
-                </a:solidFill>
-                <a:latin typeface="Calibri" pitchFamily="34" charset="0"/>
-                <a:ea typeface="Calibri" pitchFamily="34" charset="-122"/>
-                <a:cs typeface="Calibri" pitchFamily="34" charset="-120"/>
-              </a:rPr>
-              <a:t>371</a:t>
-            </a:r>
-            <a:endParaRPr lang="en-US" sz="5400" dirty="0"/>
-          </a:p>
-        </p:txBody>
-      </p:sp>
-      <p:sp>
-        <p:nvSpPr>
-          <p:cNvPr id="9" name="Text 6"/>
-          <p:cNvSpPr txBox="1"/>
-          <p:nvPr/>
-        </p:nvSpPr>
-        <p:spPr>
-          <a:xfrm>
-            <a:off x="3474720" y="2423160"/>
-            <a:ext cx="2286000" cy="548640"/>
-          </a:xfrm>
-          <a:prstGeom prst="rect">
-            <a:avLst/>
-          </a:prstGeom>
-          <a:noFill/>
-          <a:ln/>
-        </p:spPr>
-        <p:txBody>
-          <a:bodyPr wrap="square" lIns="0" tIns="0" rIns="0" bIns="0" rtlCol="0" anchor="ctr"/>
-          <a:lstStyle/>
-          <a:p>
-            <a:pPr algn="ctr" indent="0" marL="0">
-              <a:buNone/>
-            </a:pPr>
-            <a:r>
-              <a:rPr lang="en-US" sz="1400" dirty="0">
-                <a:solidFill>
-                  <a:srgbClr val="B8BEC7"/>
-                </a:solidFill>
-                <a:latin typeface="Calibri" pitchFamily="34" charset="0"/>
-                <a:ea typeface="Calibri" pitchFamily="34" charset="-122"/>
-                <a:cs typeface="Calibri" pitchFamily="34" charset="-120"/>
-              </a:rPr>
-              <a:t>frontend unit tests</a:t>
-            </a:r>
-            <a:endParaRPr lang="en-US" sz="1400" dirty="0"/>
-          </a:p>
-        </p:txBody>
-      </p:sp>
-      <p:sp>
-        <p:nvSpPr>
-          <p:cNvPr id="10" name="Shape 7"/>
-          <p:cNvSpPr/>
-          <p:nvPr/>
-        </p:nvSpPr>
-        <p:spPr>
-          <a:xfrm>
-            <a:off x="6126480" y="1280160"/>
-            <a:ext cx="2651760" cy="1828800"/>
-          </a:xfrm>
-          <a:prstGeom prst="roundRect">
-            <a:avLst>
-              <a:gd name="adj" fmla="val 4000"/>
-            </a:avLst>
-          </a:prstGeom>
-          <a:solidFill>
-            <a:srgbClr val="17191C"/>
-          </a:solidFill>
-          <a:ln w="9525">
-            <a:solidFill>
-              <a:srgbClr val="292D32"/>
-            </a:solidFill>
-            <a:prstDash val="solid"/>
-          </a:ln>
-        </p:spPr>
-      </p:sp>
-      <p:sp>
-        <p:nvSpPr>
-          <p:cNvPr id="11" name="Text 8"/>
-          <p:cNvSpPr txBox="1"/>
-          <p:nvPr/>
-        </p:nvSpPr>
-        <p:spPr>
-          <a:xfrm>
-            <a:off x="6126480" y="1417320"/>
-            <a:ext cx="2651760" cy="914400"/>
-          </a:xfrm>
-          <a:prstGeom prst="rect">
-            <a:avLst/>
-          </a:prstGeom>
-          <a:noFill/>
-          <a:ln/>
-        </p:spPr>
-        <p:txBody>
-          <a:bodyPr wrap="square" lIns="0" tIns="0" rIns="0" bIns="0" rtlCol="0" anchor="ctr"/>
-          <a:lstStyle/>
-          <a:p>
-            <a:pPr algn="ctr" indent="0" marL="0">
-              <a:buNone/>
-            </a:pPr>
-            <a:r>
-              <a:rPr lang="en-US" sz="5400" b="1" dirty="0">
-                <a:solidFill>
-                  <a:srgbClr val="F21D3D"/>
-                </a:solidFill>
-                <a:latin typeface="Calibri" pitchFamily="34" charset="0"/>
-                <a:ea typeface="Calibri" pitchFamily="34" charset="-122"/>
-                <a:cs typeface="Calibri" pitchFamily="34" charset="-120"/>
-              </a:rPr>
-              <a:t>28</a:t>
-            </a:r>
-            <a:endParaRPr lang="en-US" sz="5400" dirty="0"/>
-          </a:p>
-        </p:txBody>
-      </p:sp>
-      <p:sp>
-        <p:nvSpPr>
-          <p:cNvPr id="12" name="Text 9"/>
-          <p:cNvSpPr txBox="1"/>
-          <p:nvPr/>
-        </p:nvSpPr>
-        <p:spPr>
-          <a:xfrm>
-            <a:off x="6309360" y="2423160"/>
-            <a:ext cx="2286000" cy="548640"/>
-          </a:xfrm>
-          <a:prstGeom prst="rect">
-            <a:avLst/>
-          </a:prstGeom>
-          <a:noFill/>
-          <a:ln/>
-        </p:spPr>
-        <p:txBody>
-          <a:bodyPr wrap="square" lIns="0" tIns="0" rIns="0" bIns="0" rtlCol="0" anchor="ctr"/>
-          <a:lstStyle/>
-          <a:p>
-            <a:pPr algn="ctr" indent="0" marL="0">
-              <a:buNone/>
-            </a:pPr>
-            <a:r>
-              <a:rPr lang="en-US" sz="1400" dirty="0">
-                <a:solidFill>
-                  <a:srgbClr val="B8BEC7"/>
-                </a:solidFill>
-                <a:latin typeface="Calibri" pitchFamily="34" charset="0"/>
-                <a:ea typeface="Calibri" pitchFamily="34" charset="-122"/>
-                <a:cs typeface="Calibri" pitchFamily="34" charset="-120"/>
-              </a:rPr>
-              <a:t>pull requests merged</a:t>
-            </a:r>
-            <a:endParaRPr lang="en-US" sz="1400" dirty="0"/>
-          </a:p>
-        </p:txBody>
-      </p:sp>
-      <p:sp>
-        <p:nvSpPr>
-          <p:cNvPr id="13" name="Text 10"/>
-          <p:cNvSpPr txBox="1"/>
-          <p:nvPr/>
-        </p:nvSpPr>
-        <p:spPr>
-          <a:xfrm>
-            <a:off x="457200" y="3474720"/>
-            <a:ext cx="8229600" cy="1280160"/>
+            <a:off x="5623560" y="2194560"/>
+            <a:ext cx="3063240" cy="1463040"/>
           </a:xfrm>
           <a:prstGeom prst="rect">
             <a:avLst/>
@@ -2850,7 +3260,7 @@
               <a:buChar char="•"/>
             </a:pPr>
             <a:r>
-              <a:rPr lang="en-US" sz="1600" dirty="0">
+              <a:rPr lang="en-US" sz="1400" dirty="0">
                 <a:solidFill>
                   <a:srgbClr val="F5F5F5"/>
                 </a:solidFill>
@@ -2858,9 +3268,9 @@
                 <a:ea typeface="Calibri" pitchFamily="34" charset="-122"/>
                 <a:cs typeface="Calibri" pitchFamily="34" charset="-120"/>
               </a:rPr>
-              <a:t>Both images scan clean: zero fixable HIGH or CRITICAL findings</a:t>
-            </a:r>
-            <a:endParaRPr lang="en-US" sz="1600" dirty="0"/>
+              <a:t>The cluster pulls its state from Git</a:t>
+            </a:r>
+            <a:endParaRPr lang="en-US" sz="1400" dirty="0"/>
           </a:p>
           <a:p>
             <a:pPr marL="342900" indent="-342900">
@@ -2871,7 +3281,7 @@
               <a:buChar char="•"/>
             </a:pPr>
             <a:r>
-              <a:rPr lang="en-US" sz="1600" dirty="0">
+              <a:rPr lang="en-US" sz="1400" dirty="0">
                 <a:solidFill>
                   <a:srgbClr val="F5F5F5"/>
                 </a:solidFill>
@@ -2879,9 +3289,9 @@
                 <a:ea typeface="Calibri" pitchFamily="34" charset="-122"/>
                 <a:cs typeface="Calibri" pitchFamily="34" charset="-120"/>
               </a:rPr>
-              <a:t>Backend tests use a throwaway database and a fake YouTube adapter</a:t>
-            </a:r>
-            <a:endParaRPr lang="en-US" sz="1600" dirty="0"/>
+              <a:t>CI holds no cluster credentials</a:t>
+            </a:r>
+            <a:endParaRPr lang="en-US" sz="1400" dirty="0"/>
           </a:p>
           <a:p>
             <a:pPr marL="342900" indent="-342900">
@@ -2892,7 +3302,7 @@
               <a:buChar char="•"/>
             </a:pPr>
             <a:r>
-              <a:rPr lang="en-US" sz="1600" dirty="0">
+              <a:rPr lang="en-US" sz="1400" dirty="0">
                 <a:solidFill>
                   <a:srgbClr val="F5F5F5"/>
                 </a:solidFill>
@@ -2900,9 +3310,97 @@
                 <a:ea typeface="Calibri" pitchFamily="34" charset="-122"/>
                 <a:cs typeface="Calibri" pitchFamily="34" charset="-120"/>
               </a:rPr>
-              <a:t>Playwright runs on desktop and phone sizes, with axe WCAG 2 A/AA scans</a:t>
-            </a:r>
-            <a:endParaRPr lang="en-US" sz="1600" dirty="0"/>
+              <a:t>Self-heal reverts manual drift</a:t>
+            </a:r>
+            <a:endParaRPr lang="en-US" sz="1400" dirty="0"/>
+          </a:p>
+        </p:txBody>
+      </p:sp>
+      <p:sp>
+        <p:nvSpPr>
+          <p:cNvPr id="19" name="Shape 15"/>
+          <p:cNvSpPr/>
+          <p:nvPr/>
+        </p:nvSpPr>
+        <p:spPr>
+          <a:xfrm>
+            <a:off x="6035710" y="3904488"/>
+            <a:ext cx="2238940" cy="512064"/>
+          </a:xfrm>
+          <a:prstGeom prst="rect">
+            <a:avLst/>
+          </a:prstGeom>
+          <a:solidFill>
+            <a:srgbClr val="17191C"/>
+          </a:solidFill>
+          <a:ln w="12700">
+            <a:solidFill>
+              <a:srgbClr val="292D32"/>
+            </a:solidFill>
+            <a:prstDash val="solid"/>
+          </a:ln>
+        </p:spPr>
+      </p:sp>
+      <p:pic>
+        <p:nvPicPr>
+          <p:cNvPr id="20" name="Image 1" descr="D:/Resume projects/StudAura/docs/screenshots/terminal-argocd-app.png">    </p:cNvPr>
+          <p:cNvPicPr>
+            <a:picLocks noChangeAspect="1"/>
+          </p:cNvPicPr>
+          <p:nvPr/>
+        </p:nvPicPr>
+        <p:blipFill>
+          <a:blip r:embed="rId2"/>
+          <a:stretch>
+            <a:fillRect/>
+          </a:stretch>
+        </p:blipFill>
+        <p:spPr>
+          <a:xfrm>
+            <a:off x="6063142" y="3931920"/>
+            <a:ext cx="2184076" cy="457200"/>
+          </a:xfrm>
+          <a:prstGeom prst="rect">
+            <a:avLst/>
+          </a:prstGeom>
+        </p:spPr>
+      </p:pic>
+      <p:sp>
+        <p:nvSpPr>
+          <p:cNvPr id="21" name="Text 16"/>
+          <p:cNvSpPr txBox="1"/>
+          <p:nvPr/>
+        </p:nvSpPr>
+        <p:spPr>
+          <a:xfrm>
+            <a:off x="5623560" y="4443984"/>
+            <a:ext cx="3063240" cy="219456"/>
+          </a:xfrm>
+          <a:prstGeom prst="rect">
+            <a:avLst/>
+          </a:prstGeom>
+          <a:noFill/>
+          <a:ln/>
+        </p:spPr>
+        <p:txBody>
+          <a:bodyPr wrap="square" lIns="0" tIns="0" rIns="0" bIns="0" rtlCol="0" anchor="t"/>
+          <a:lstStyle/>
+          <a:p>
+            <a:pPr algn="ctr" indent="0" marL="0">
+              <a:buNone/>
+            </a:pPr>
+            <a:r>
+              <a:rPr lang="en-US" sz="1100" dirty="0">
+                <a:solidFill>
+                  <a:srgbClr val="B8BEC7"/>
+                </a:solidFill>
+                <a:latin typeface="Calibri" pitchFamily="34" charset="0"/>
+                <a:ea typeface="Calibri" pitchFamily="34" charset="-122"/>
+                <a:cs typeface="Calibri" pitchFamily="34" charset="-120"/>
+              </a:rPr>
+              <a:t>kubectl get application</a:t>
+            </a:r>
+            <a:endParaRPr lang="en-US" sz="1100" dirty="0"/>
           </a:p>
         </p:txBody>
       </p:sp>
@@ -2971,7 +3469,7 @@
                 <a:ea typeface="Calibri" pitchFamily="34" charset="-122"/>
                 <a:cs typeface="Calibri" pitchFamily="34" charset="-120"/>
               </a:rPr>
-              <a:t>Key learnings and limits</a:t>
+              <a:t>Observability</a:t>
             </a:r>
             <a:endParaRPr lang="en-US" sz="3400" dirty="0"/>
           </a:p>
@@ -2985,12 +3483,432 @@
         </p:nvSpPr>
         <p:spPr>
           <a:xfrm>
+            <a:off x="480713" y="1115568"/>
+            <a:ext cx="4067774" cy="2249424"/>
+          </a:xfrm>
+          <a:prstGeom prst="rect">
+            <a:avLst/>
+          </a:prstGeom>
+          <a:solidFill>
+            <a:srgbClr val="17191C"/>
+          </a:solidFill>
+          <a:ln w="12700">
+            <a:solidFill>
+              <a:srgbClr val="292D32"/>
+            </a:solidFill>
+            <a:prstDash val="solid"/>
+          </a:ln>
+        </p:spPr>
+      </p:sp>
+      <p:pic>
+        <p:nvPicPr>
+          <p:cNvPr id="5" name="Image 0" descr="D:/Resume projects/StudAura/docs/screenshots/prometheus-targets.png">    </p:cNvPr>
+          <p:cNvPicPr>
+            <a:picLocks noChangeAspect="1"/>
+          </p:cNvPicPr>
+          <p:nvPr/>
+        </p:nvPicPr>
+        <p:blipFill>
+          <a:blip r:embed="rId1"/>
+          <a:stretch>
+            <a:fillRect/>
+          </a:stretch>
+        </p:blipFill>
+        <p:spPr>
+          <a:xfrm>
+            <a:off x="508145" y="1143000"/>
+            <a:ext cx="4012910" cy="2194560"/>
+          </a:xfrm>
+          <a:prstGeom prst="rect">
+            <a:avLst/>
+          </a:prstGeom>
+        </p:spPr>
+      </p:pic>
+      <p:sp>
+        <p:nvSpPr>
+          <p:cNvPr id="6" name="Text 2"/>
+          <p:cNvSpPr txBox="1"/>
+          <p:nvPr/>
+        </p:nvSpPr>
+        <p:spPr>
+          <a:xfrm>
+            <a:off x="457200" y="3392424"/>
+            <a:ext cx="4114800" cy="219456"/>
+          </a:xfrm>
+          <a:prstGeom prst="rect">
+            <a:avLst/>
+          </a:prstGeom>
+          <a:noFill/>
+          <a:ln/>
+        </p:spPr>
+        <p:txBody>
+          <a:bodyPr wrap="square" lIns="0" tIns="0" rIns="0" bIns="0" rtlCol="0" anchor="t"/>
+          <a:lstStyle/>
+          <a:p>
+            <a:pPr algn="ctr" indent="0" marL="0">
+              <a:buNone/>
+            </a:pPr>
+            <a:r>
+              <a:rPr lang="en-US" sz="1100" dirty="0">
+                <a:solidFill>
+                  <a:srgbClr val="B8BEC7"/>
+                </a:solidFill>
+                <a:latin typeface="Calibri" pitchFamily="34" charset="0"/>
+                <a:ea typeface="Calibri" pitchFamily="34" charset="-122"/>
+                <a:cs typeface="Calibri" pitchFamily="34" charset="-120"/>
+              </a:rPr>
+              <a:t>Prometheus: both backend pods UP</a:t>
+            </a:r>
+            <a:endParaRPr lang="en-US" sz="1100" dirty="0"/>
+          </a:p>
+        </p:txBody>
+      </p:sp>
+      <p:sp>
+        <p:nvSpPr>
+          <p:cNvPr id="7" name="Shape 3"/>
+          <p:cNvSpPr/>
+          <p:nvPr/>
+        </p:nvSpPr>
+        <p:spPr>
+          <a:xfrm>
+            <a:off x="4636008" y="1115568"/>
+            <a:ext cx="4078224" cy="1958457"/>
+          </a:xfrm>
+          <a:prstGeom prst="rect">
+            <a:avLst/>
+          </a:prstGeom>
+          <a:solidFill>
+            <a:srgbClr val="17191C"/>
+          </a:solidFill>
+          <a:ln w="12700">
+            <a:solidFill>
+              <a:srgbClr val="292D32"/>
+            </a:solidFill>
+            <a:prstDash val="solid"/>
+          </a:ln>
+        </p:spPr>
+      </p:sp>
+      <p:pic>
+        <p:nvPicPr>
+          <p:cNvPr id="8" name="Image 1" descr="D:/Resume projects/StudAura/docs/screenshots/grafana-dashboard.png">    </p:cNvPr>
+          <p:cNvPicPr>
+            <a:picLocks noChangeAspect="1"/>
+          </p:cNvPicPr>
+          <p:nvPr/>
+        </p:nvPicPr>
+        <p:blipFill>
+          <a:blip r:embed="rId2"/>
+          <a:stretch>
+            <a:fillRect/>
+          </a:stretch>
+        </p:blipFill>
+        <p:spPr>
+          <a:xfrm>
+            <a:off x="4663440" y="1143000"/>
+            <a:ext cx="4023360" cy="1903593"/>
+          </a:xfrm>
+          <a:prstGeom prst="rect">
+            <a:avLst/>
+          </a:prstGeom>
+        </p:spPr>
+      </p:pic>
+      <p:sp>
+        <p:nvSpPr>
+          <p:cNvPr id="9" name="Text 4"/>
+          <p:cNvSpPr txBox="1"/>
+          <p:nvPr/>
+        </p:nvSpPr>
+        <p:spPr>
+          <a:xfrm>
+            <a:off x="4663440" y="3101457"/>
+            <a:ext cx="4023360" cy="219456"/>
+          </a:xfrm>
+          <a:prstGeom prst="rect">
+            <a:avLst/>
+          </a:prstGeom>
+          <a:noFill/>
+          <a:ln/>
+        </p:spPr>
+        <p:txBody>
+          <a:bodyPr wrap="square" lIns="0" tIns="0" rIns="0" bIns="0" rtlCol="0" anchor="t"/>
+          <a:lstStyle/>
+          <a:p>
+            <a:pPr algn="ctr" indent="0" marL="0">
+              <a:buNone/>
+            </a:pPr>
+            <a:r>
+              <a:rPr lang="en-US" sz="1100" dirty="0">
+                <a:solidFill>
+                  <a:srgbClr val="B8BEC7"/>
+                </a:solidFill>
+                <a:latin typeface="Calibri" pitchFamily="34" charset="0"/>
+                <a:ea typeface="Calibri" pitchFamily="34" charset="-122"/>
+                <a:cs typeface="Calibri" pitchFamily="34" charset="-120"/>
+              </a:rPr>
+              <a:t>Grafana dashboard StudAura</a:t>
+            </a:r>
+            <a:endParaRPr lang="en-US" sz="1100" dirty="0"/>
+          </a:p>
+        </p:txBody>
+      </p:sp>
+      <p:sp>
+        <p:nvSpPr>
+          <p:cNvPr id="10" name="Shape 5"/>
+          <p:cNvSpPr/>
+          <p:nvPr/>
+        </p:nvSpPr>
+        <p:spPr>
+          <a:xfrm>
+            <a:off x="4711773" y="3447288"/>
+            <a:ext cx="2646535" cy="1472184"/>
+          </a:xfrm>
+          <a:prstGeom prst="rect">
+            <a:avLst/>
+          </a:prstGeom>
+          <a:solidFill>
+            <a:srgbClr val="17191C"/>
+          </a:solidFill>
+          <a:ln w="12700">
+            <a:solidFill>
+              <a:srgbClr val="292D32"/>
+            </a:solidFill>
+            <a:prstDash val="solid"/>
+          </a:ln>
+        </p:spPr>
+      </p:sp>
+      <p:pic>
+        <p:nvPicPr>
+          <p:cNvPr id="11" name="Image 2" descr="D:/Resume projects/StudAura/docs/screenshots/prometheus-http-requests.png">    </p:cNvPr>
+          <p:cNvPicPr>
+            <a:picLocks noChangeAspect="1"/>
+          </p:cNvPicPr>
+          <p:nvPr/>
+        </p:nvPicPr>
+        <p:blipFill>
+          <a:blip r:embed="rId3"/>
+          <a:stretch>
+            <a:fillRect/>
+          </a:stretch>
+        </p:blipFill>
+        <p:spPr>
+          <a:xfrm>
+            <a:off x="4739205" y="3474720"/>
+            <a:ext cx="2591671" cy="1417320"/>
+          </a:xfrm>
+          <a:prstGeom prst="rect">
+            <a:avLst/>
+          </a:prstGeom>
+        </p:spPr>
+      </p:pic>
+      <p:sp>
+        <p:nvSpPr>
+          <p:cNvPr id="12" name="Text 6"/>
+          <p:cNvSpPr txBox="1"/>
+          <p:nvPr/>
+        </p:nvSpPr>
+        <p:spPr>
+          <a:xfrm>
+            <a:off x="457200" y="3794760"/>
+            <a:ext cx="4114800" cy="1097280"/>
+          </a:xfrm>
+          <a:prstGeom prst="rect">
+            <a:avLst/>
+          </a:prstGeom>
+          <a:noFill/>
+          <a:ln/>
+        </p:spPr>
+        <p:txBody>
+          <a:bodyPr wrap="square" lIns="0" tIns="0" rIns="0" bIns="0" rtlCol="0" anchor="t"/>
+          <a:lstStyle/>
+          <a:p>
+            <a:pPr marL="342900" indent="-342900">
+              <a:spcAft>
+                <a:spcPts val="600"/>
+              </a:spcAft>
+              <a:buSzPct val="100000"/>
+              <a:buChar char="•"/>
+            </a:pPr>
+            <a:r>
+              <a:rPr lang="en-US" sz="1400" dirty="0">
+                <a:solidFill>
+                  <a:srgbClr val="F5F5F5"/>
+                </a:solidFill>
+                <a:latin typeface="Calibri" pitchFamily="34" charset="0"/>
+                <a:ea typeface="Calibri" pitchFamily="34" charset="-122"/>
+                <a:cs typeface="Calibri" pitchFamily="34" charset="-120"/>
+              </a:rPr>
+              <a:t>ServiceMonitor scrapes /metrics</a:t>
+            </a:r>
+            <a:endParaRPr lang="en-US" sz="1400" dirty="0"/>
+          </a:p>
+          <a:p>
+            <a:pPr marL="342900" indent="-342900">
+              <a:spcAft>
+                <a:spcPts val="600"/>
+              </a:spcAft>
+              <a:buSzPct val="100000"/>
+              <a:buChar char="•"/>
+            </a:pPr>
+            <a:r>
+              <a:rPr lang="en-US" sz="1400" dirty="0">
+                <a:solidFill>
+                  <a:srgbClr val="F5F5F5"/>
+                </a:solidFill>
+                <a:latin typeface="Calibri" pitchFamily="34" charset="0"/>
+                <a:ea typeface="Calibri" pitchFamily="34" charset="-122"/>
+                <a:cs typeface="Calibri" pitchFamily="34" charset="-120"/>
+              </a:rPr>
+              <a:t>Alerts: backend down, 5xx, database</a:t>
+            </a:r>
+            <a:endParaRPr lang="en-US" sz="1400" dirty="0"/>
+          </a:p>
+          <a:p>
+            <a:pPr marL="342900" indent="-342900">
+              <a:spcAft>
+                <a:spcPts val="600"/>
+              </a:spcAft>
+              <a:buSzPct val="100000"/>
+              <a:buChar char="•"/>
+            </a:pPr>
+            <a:r>
+              <a:rPr lang="en-US" sz="1400" dirty="0">
+                <a:solidFill>
+                  <a:srgbClr val="F5F5F5"/>
+                </a:solidFill>
+                <a:latin typeface="Calibri" pitchFamily="34" charset="0"/>
+                <a:ea typeface="Calibri" pitchFamily="34" charset="-122"/>
+                <a:cs typeface="Calibri" pitchFamily="34" charset="-120"/>
+              </a:rPr>
+              <a:t>Dashboard provisioned from Git</a:t>
+            </a:r>
+            <a:endParaRPr lang="en-US" sz="1400" dirty="0"/>
+          </a:p>
+        </p:txBody>
+      </p:sp>
+      <p:sp>
+        <p:nvSpPr>
+          <p:cNvPr id="13" name="Text 7"/>
+          <p:cNvSpPr txBox="1"/>
+          <p:nvPr/>
+        </p:nvSpPr>
+        <p:spPr>
+          <a:xfrm>
+            <a:off x="7498080" y="3520440"/>
+            <a:ext cx="1188720" cy="1280160"/>
+          </a:xfrm>
+          <a:prstGeom prst="rect">
+            <a:avLst/>
+          </a:prstGeom>
+          <a:noFill/>
+          <a:ln/>
+        </p:spPr>
+        <p:txBody>
+          <a:bodyPr wrap="square" lIns="0" tIns="0" rIns="0" bIns="0" rtlCol="0" anchor="t"/>
+          <a:lstStyle/>
+          <a:p>
+            <a:pPr indent="0" marL="0">
+              <a:buNone/>
+            </a:pPr>
+            <a:r>
+              <a:rPr lang="en-US" sz="1200" dirty="0">
+                <a:solidFill>
+                  <a:srgbClr val="B8BEC7"/>
+                </a:solidFill>
+                <a:latin typeface="Calibri" pitchFamily="34" charset="0"/>
+                <a:ea typeface="Calibri" pitchFamily="34" charset="-122"/>
+                <a:cs typeface="Calibri" pitchFamily="34" charset="-120"/>
+              </a:rPr>
+              <a:t>Live request rate by status class</a:t>
+            </a:r>
+            <a:endParaRPr lang="en-US" sz="1200" dirty="0"/>
+          </a:p>
+        </p:txBody>
+      </p:sp>
+    </p:spTree>
+  </p:cSld>
+  <p:clrMapOvr>
+    <a:masterClrMapping/>
+  </p:clrMapOvr>
+</p:sld>
+</file>
+
+<file path=ppt/slides/slide13.xml><?xml version="1.0" encoding="utf-8"?>
+<p:sld xmlns:a="http://schemas.openxmlformats.org/drawingml/2006/main" xmlns:r="http://schemas.openxmlformats.org/officeDocument/2006/relationships" xmlns:p="http://schemas.openxmlformats.org/presentationml/2006/main">
+  <p:cSld name="Slide 13">
+    <p:bg>
+      <p:bgPr>
+        <a:solidFill>
+          <a:srgbClr val="0F1113"/>
+        </a:solidFill>
+      </p:bgPr>
+    </p:bg>
+    <p:spTree>
+      <p:nvGrpSpPr>
+        <p:cNvPr id="1" name=""/>
+        <p:cNvGrpSpPr/>
+        <p:nvPr/>
+      </p:nvGrpSpPr>
+      <p:grpSpPr>
+        <a:xfrm>
+          <a:off x="0" y="0"/>
+          <a:ext cx="0" cy="0"/>
+          <a:chOff x="0" y="0"/>
+          <a:chExt cx="0" cy="0"/>
+        </a:xfrm>
+      </p:grpSpPr>
+      <p:sp>
+        <p:nvSpPr>
+          <p:cNvPr id="2" name="Text 0"/>
+          <p:cNvSpPr txBox="1"/>
+          <p:nvPr/>
+        </p:nvSpPr>
+        <p:spPr>
+          <a:xfrm>
+            <a:off x="457200" y="274320"/>
+            <a:ext cx="8229600" cy="685800"/>
+          </a:xfrm>
+          <a:prstGeom prst="rect">
+            <a:avLst/>
+          </a:prstGeom>
+          <a:noFill/>
+          <a:ln/>
+        </p:spPr>
+        <p:txBody>
+          <a:bodyPr wrap="square" lIns="0" tIns="0" rIns="0" bIns="0" rtlCol="0" anchor="ctr"/>
+          <a:lstStyle/>
+          <a:p>
+            <a:pPr indent="0" marL="0">
+              <a:buNone/>
+            </a:pPr>
+            <a:r>
+              <a:rPr lang="en-US" sz="3400" b="1" dirty="0">
+                <a:solidFill>
+                  <a:srgbClr val="F5F5F5"/>
+                </a:solidFill>
+                <a:latin typeface="Calibri" pitchFamily="34" charset="0"/>
+                <a:ea typeface="Calibri" pitchFamily="34" charset="-122"/>
+                <a:cs typeface="Calibri" pitchFamily="34" charset="-120"/>
+              </a:rPr>
+              <a:t>Quality gates</a:t>
+            </a:r>
+            <a:endParaRPr lang="en-US" sz="3400" dirty="0"/>
+          </a:p>
+        </p:txBody>
+      </p:sp>
+      <p:sp>
+        <p:nvSpPr>
+          <p:cNvPr id="4" name="Shape 1"/>
+          <p:cNvSpPr/>
+          <p:nvPr/>
+        </p:nvSpPr>
+        <p:spPr>
+          <a:xfrm>
             <a:off x="457200" y="1188720"/>
-            <a:ext cx="3931920" cy="3383280"/>
+            <a:ext cx="2651760" cy="1371600"/>
           </a:xfrm>
           <a:prstGeom prst="roundRect">
             <a:avLst>
-              <a:gd name="adj" fmla="val 2162"/>
+              <a:gd name="adj" fmla="val 5333"/>
             </a:avLst>
           </a:prstGeom>
           <a:solidFill>
@@ -3012,8 +3930,8 @@
         </p:nvSpPr>
         <p:spPr>
           <a:xfrm>
-            <a:off x="640080" y="1298448"/>
-            <a:ext cx="3566160" cy="365760"/>
+            <a:off x="457200" y="1261872"/>
+            <a:ext cx="2651760" cy="754380"/>
           </a:xfrm>
           <a:prstGeom prst="rect">
             <a:avLst/>
@@ -3025,21 +3943,21 @@
           <a:bodyPr wrap="square" lIns="0" tIns="0" rIns="0" bIns="0" rtlCol="0" anchor="ctr"/>
           <a:lstStyle/>
           <a:p>
-            <a:pPr indent="0" marL="0">
-              <a:buNone/>
-            </a:pPr>
-            <a:r>
-              <a:rPr lang="en-US" sz="1800" b="1" dirty="0">
-                <a:solidFill>
-                  <a:srgbClr val="34D399"/>
-                </a:solidFill>
-                <a:latin typeface="Calibri" pitchFamily="34" charset="0"/>
-                <a:ea typeface="Calibri" pitchFamily="34" charset="-122"/>
-                <a:cs typeface="Calibri" pitchFamily="34" charset="-120"/>
-              </a:rPr>
-              <a:t>What I learned</a:t>
-            </a:r>
-            <a:endParaRPr lang="en-US" sz="1800" dirty="0"/>
+            <a:pPr algn="ctr" indent="0" marL="0">
+              <a:buNone/>
+            </a:pPr>
+            <a:r>
+              <a:rPr lang="en-US" sz="4000" b="1" dirty="0">
+                <a:solidFill>
+                  <a:srgbClr val="F21D3D"/>
+                </a:solidFill>
+                <a:latin typeface="Calibri" pitchFamily="34" charset="0"/>
+                <a:ea typeface="Calibri" pitchFamily="34" charset="-122"/>
+                <a:cs typeface="Calibri" pitchFamily="34" charset="-120"/>
+              </a:rPr>
+              <a:t>656</a:t>
+            </a:r>
+            <a:endParaRPr lang="en-US" sz="4000" dirty="0"/>
           </a:p>
         </p:txBody>
       </p:sp>
@@ -3051,8 +3969,8 @@
         </p:nvSpPr>
         <p:spPr>
           <a:xfrm>
-            <a:off x="640080" y="1691640"/>
-            <a:ext cx="3566160" cy="2743200"/>
+            <a:off x="548640" y="2039112"/>
+            <a:ext cx="2468880" cy="452628"/>
           </a:xfrm>
           <a:prstGeom prst="rect">
             <a:avLst/>
@@ -3064,11 +3982,11 @@
           <a:bodyPr wrap="square" lIns="0" tIns="0" rIns="0" bIns="0" rtlCol="0" anchor="t"/>
           <a:lstStyle/>
           <a:p>
-            <a:pPr indent="0" marL="0">
-              <a:buNone/>
-            </a:pPr>
-            <a:r>
-              <a:rPr lang="en-US" sz="1400" dirty="0">
+            <a:pPr algn="ctr" indent="0" marL="0">
+              <a:buNone/>
+            </a:pPr>
+            <a:r>
+              <a:rPr lang="en-US" sz="1200" dirty="0">
                 <a:solidFill>
                   <a:srgbClr val="B8BEC7"/>
                 </a:solidFill>
@@ -3076,60 +3994,9 @@
                 <a:ea typeface="Calibri" pitchFamily="34" charset="-122"/>
                 <a:cs typeface="Calibri" pitchFamily="34" charset="-120"/>
               </a:rPr>
-              <a:t>Small, reviewed pull requests keep CI green.</a:t>
-            </a:r>
-            <a:endParaRPr lang="en-US" sz="1400" dirty="0"/>
-          </a:p>
-          <a:p>
-            <a:pPr indent="0" marL="0">
-              <a:buNone/>
-            </a:pPr>
-            <a:r>
-              <a:rPr lang="en-US" sz="1400" dirty="0">
-                <a:solidFill>
-                  <a:srgbClr val="B8BEC7"/>
-                </a:solidFill>
-                <a:latin typeface="Calibri" pitchFamily="34" charset="0"/>
-                <a:ea typeface="Calibri" pitchFamily="34" charset="-122"/>
-                <a:cs typeface="Calibri" pitchFamily="34" charset="-120"/>
-              </a:rPr>
-              <a:t>A pipeline is only trustworthy if every gate can fail.</a:t>
-            </a:r>
-            <a:endParaRPr lang="en-US" sz="1400" dirty="0"/>
-          </a:p>
-          <a:p>
-            <a:pPr indent="0" marL="0">
-              <a:buNone/>
-            </a:pPr>
-            <a:r>
-              <a:rPr lang="en-US" sz="1400" dirty="0">
-                <a:solidFill>
-                  <a:srgbClr val="B8BEC7"/>
-                </a:solidFill>
-                <a:latin typeface="Calibri" pitchFamily="34" charset="0"/>
-                <a:ea typeface="Calibri" pitchFamily="34" charset="-122"/>
-                <a:cs typeface="Calibri" pitchFamily="34" charset="-120"/>
-              </a:rPr>
-              <a:t>GitOps removes cluster credentials from CI.</a:t>
-            </a:r>
-            <a:endParaRPr lang="en-US" sz="1400" dirty="0"/>
-          </a:p>
-          <a:p>
-            <a:pPr indent="0" marL="0">
-              <a:buNone/>
-            </a:pPr>
-            <a:r>
-              <a:rPr lang="en-US" sz="1400" dirty="0">
-                <a:solidFill>
-                  <a:srgbClr val="B8BEC7"/>
-                </a:solidFill>
-                <a:latin typeface="Calibri" pitchFamily="34" charset="0"/>
-                <a:ea typeface="Calibri" pitchFamily="34" charset="-122"/>
-                <a:cs typeface="Calibri" pitchFamily="34" charset="-120"/>
-              </a:rPr>
-              <a:t>Cloud account policies shape the architecture as much as the code.</a:t>
-            </a:r>
-            <a:endParaRPr lang="en-US" sz="1400" dirty="0"/>
+              <a:t>backend tests, real PostgreSQL</a:t>
+            </a:r>
+            <a:endParaRPr lang="en-US" sz="1200" dirty="0"/>
           </a:p>
         </p:txBody>
       </p:sp>
@@ -3141,12 +4008,12 @@
         </p:nvSpPr>
         <p:spPr>
           <a:xfrm>
-            <a:off x="4754880" y="1188720"/>
-            <a:ext cx="3931920" cy="3383280"/>
+            <a:off x="3246120" y="1188720"/>
+            <a:ext cx="2651760" cy="1371600"/>
           </a:xfrm>
           <a:prstGeom prst="roundRect">
             <a:avLst>
-              <a:gd name="adj" fmla="val 2162"/>
+              <a:gd name="adj" fmla="val 5333"/>
             </a:avLst>
           </a:prstGeom>
           <a:solidFill>
@@ -3168,6 +4035,598 @@
         </p:nvSpPr>
         <p:spPr>
           <a:xfrm>
+            <a:off x="3246120" y="1261872"/>
+            <a:ext cx="2651760" cy="754380"/>
+          </a:xfrm>
+          <a:prstGeom prst="rect">
+            <a:avLst/>
+          </a:prstGeom>
+          <a:noFill/>
+          <a:ln/>
+        </p:spPr>
+        <p:txBody>
+          <a:bodyPr wrap="square" lIns="0" tIns="0" rIns="0" bIns="0" rtlCol="0" anchor="ctr"/>
+          <a:lstStyle/>
+          <a:p>
+            <a:pPr algn="ctr" indent="0" marL="0">
+              <a:buNone/>
+            </a:pPr>
+            <a:r>
+              <a:rPr lang="en-US" sz="4000" b="1" dirty="0">
+                <a:solidFill>
+                  <a:srgbClr val="F21D3D"/>
+                </a:solidFill>
+                <a:latin typeface="Calibri" pitchFamily="34" charset="0"/>
+                <a:ea typeface="Calibri" pitchFamily="34" charset="-122"/>
+                <a:cs typeface="Calibri" pitchFamily="34" charset="-120"/>
+              </a:rPr>
+              <a:t>371</a:t>
+            </a:r>
+            <a:endParaRPr lang="en-US" sz="4000" dirty="0"/>
+          </a:p>
+        </p:txBody>
+      </p:sp>
+      <p:sp>
+        <p:nvSpPr>
+          <p:cNvPr id="9" name="Text 6"/>
+          <p:cNvSpPr txBox="1"/>
+          <p:nvPr/>
+        </p:nvSpPr>
+        <p:spPr>
+          <a:xfrm>
+            <a:off x="3337560" y="2039112"/>
+            <a:ext cx="2468880" cy="452628"/>
+          </a:xfrm>
+          <a:prstGeom prst="rect">
+            <a:avLst/>
+          </a:prstGeom>
+          <a:noFill/>
+          <a:ln/>
+        </p:spPr>
+        <p:txBody>
+          <a:bodyPr wrap="square" lIns="0" tIns="0" rIns="0" bIns="0" rtlCol="0" anchor="t"/>
+          <a:lstStyle/>
+          <a:p>
+            <a:pPr algn="ctr" indent="0" marL="0">
+              <a:buNone/>
+            </a:pPr>
+            <a:r>
+              <a:rPr lang="en-US" sz="1200" dirty="0">
+                <a:solidFill>
+                  <a:srgbClr val="B8BEC7"/>
+                </a:solidFill>
+                <a:latin typeface="Calibri" pitchFamily="34" charset="0"/>
+                <a:ea typeface="Calibri" pitchFamily="34" charset="-122"/>
+                <a:cs typeface="Calibri" pitchFamily="34" charset="-120"/>
+              </a:rPr>
+              <a:t>frontend unit tests</a:t>
+            </a:r>
+            <a:endParaRPr lang="en-US" sz="1200" dirty="0"/>
+          </a:p>
+        </p:txBody>
+      </p:sp>
+      <p:sp>
+        <p:nvSpPr>
+          <p:cNvPr id="10" name="Shape 7"/>
+          <p:cNvSpPr/>
+          <p:nvPr/>
+        </p:nvSpPr>
+        <p:spPr>
+          <a:xfrm>
+            <a:off x="6035040" y="1188720"/>
+            <a:ext cx="2651760" cy="1371600"/>
+          </a:xfrm>
+          <a:prstGeom prst="roundRect">
+            <a:avLst>
+              <a:gd name="adj" fmla="val 5333"/>
+            </a:avLst>
+          </a:prstGeom>
+          <a:solidFill>
+            <a:srgbClr val="17191C"/>
+          </a:solidFill>
+          <a:ln w="9525">
+            <a:solidFill>
+              <a:srgbClr val="292D32"/>
+            </a:solidFill>
+            <a:prstDash val="solid"/>
+          </a:ln>
+        </p:spPr>
+      </p:sp>
+      <p:sp>
+        <p:nvSpPr>
+          <p:cNvPr id="11" name="Text 8"/>
+          <p:cNvSpPr txBox="1"/>
+          <p:nvPr/>
+        </p:nvSpPr>
+        <p:spPr>
+          <a:xfrm>
+            <a:off x="6035040" y="1261872"/>
+            <a:ext cx="2651760" cy="754380"/>
+          </a:xfrm>
+          <a:prstGeom prst="rect">
+            <a:avLst/>
+          </a:prstGeom>
+          <a:noFill/>
+          <a:ln/>
+        </p:spPr>
+        <p:txBody>
+          <a:bodyPr wrap="square" lIns="0" tIns="0" rIns="0" bIns="0" rtlCol="0" anchor="ctr"/>
+          <a:lstStyle/>
+          <a:p>
+            <a:pPr algn="ctr" indent="0" marL="0">
+              <a:buNone/>
+            </a:pPr>
+            <a:r>
+              <a:rPr lang="en-US" sz="4000" b="1" dirty="0">
+                <a:solidFill>
+                  <a:srgbClr val="F21D3D"/>
+                </a:solidFill>
+                <a:latin typeface="Calibri" pitchFamily="34" charset="0"/>
+                <a:ea typeface="Calibri" pitchFamily="34" charset="-122"/>
+                <a:cs typeface="Calibri" pitchFamily="34" charset="-120"/>
+              </a:rPr>
+              <a:t>28</a:t>
+            </a:r>
+            <a:endParaRPr lang="en-US" sz="4000" dirty="0"/>
+          </a:p>
+        </p:txBody>
+      </p:sp>
+      <p:sp>
+        <p:nvSpPr>
+          <p:cNvPr id="12" name="Text 9"/>
+          <p:cNvSpPr txBox="1"/>
+          <p:nvPr/>
+        </p:nvSpPr>
+        <p:spPr>
+          <a:xfrm>
+            <a:off x="6126480" y="2039112"/>
+            <a:ext cx="2468880" cy="452628"/>
+          </a:xfrm>
+          <a:prstGeom prst="rect">
+            <a:avLst/>
+          </a:prstGeom>
+          <a:noFill/>
+          <a:ln/>
+        </p:spPr>
+        <p:txBody>
+          <a:bodyPr wrap="square" lIns="0" tIns="0" rIns="0" bIns="0" rtlCol="0" anchor="t"/>
+          <a:lstStyle/>
+          <a:p>
+            <a:pPr algn="ctr" indent="0" marL="0">
+              <a:buNone/>
+            </a:pPr>
+            <a:r>
+              <a:rPr lang="en-US" sz="1200" dirty="0">
+                <a:solidFill>
+                  <a:srgbClr val="B8BEC7"/>
+                </a:solidFill>
+                <a:latin typeface="Calibri" pitchFamily="34" charset="0"/>
+                <a:ea typeface="Calibri" pitchFamily="34" charset="-122"/>
+                <a:cs typeface="Calibri" pitchFamily="34" charset="-120"/>
+              </a:rPr>
+              <a:t>pull requests merged</a:t>
+            </a:r>
+            <a:endParaRPr lang="en-US" sz="1200" dirty="0"/>
+          </a:p>
+        </p:txBody>
+      </p:sp>
+      <p:sp>
+        <p:nvSpPr>
+          <p:cNvPr id="13" name="Shape 10"/>
+          <p:cNvSpPr/>
+          <p:nvPr/>
+        </p:nvSpPr>
+        <p:spPr>
+          <a:xfrm>
+            <a:off x="429768" y="2715768"/>
+            <a:ext cx="2249424" cy="2242229"/>
+          </a:xfrm>
+          <a:prstGeom prst="rect">
+            <a:avLst/>
+          </a:prstGeom>
+          <a:solidFill>
+            <a:srgbClr val="17191C"/>
+          </a:solidFill>
+          <a:ln w="12700">
+            <a:solidFill>
+              <a:srgbClr val="292D32"/>
+            </a:solidFill>
+            <a:prstDash val="solid"/>
+          </a:ln>
+        </p:spPr>
+      </p:sp>
+      <p:pic>
+        <p:nvPicPr>
+          <p:cNvPr id="14" name="Image 0" descr="D:/Resume projects/StudAura/docs/screenshots/terminal-pytest.png">    </p:cNvPr>
+          <p:cNvPicPr>
+            <a:picLocks noChangeAspect="1"/>
+          </p:cNvPicPr>
+          <p:nvPr/>
+        </p:nvPicPr>
+        <p:blipFill>
+          <a:blip r:embed="rId1"/>
+          <a:stretch>
+            <a:fillRect/>
+          </a:stretch>
+        </p:blipFill>
+        <p:spPr>
+          <a:xfrm>
+            <a:off x="457200" y="2743200"/>
+            <a:ext cx="2194560" cy="2187365"/>
+          </a:xfrm>
+          <a:prstGeom prst="rect">
+            <a:avLst/>
+          </a:prstGeom>
+        </p:spPr>
+      </p:pic>
+      <p:sp>
+        <p:nvSpPr>
+          <p:cNvPr id="15" name="Text 11"/>
+          <p:cNvSpPr txBox="1"/>
+          <p:nvPr/>
+        </p:nvSpPr>
+        <p:spPr>
+          <a:xfrm>
+            <a:off x="2926080" y="2788920"/>
+            <a:ext cx="5760720" cy="2103120"/>
+          </a:xfrm>
+          <a:prstGeom prst="rect">
+            <a:avLst/>
+          </a:prstGeom>
+          <a:noFill/>
+          <a:ln/>
+        </p:spPr>
+        <p:txBody>
+          <a:bodyPr wrap="square" lIns="0" tIns="0" rIns="0" bIns="0" rtlCol="0" anchor="t"/>
+          <a:lstStyle/>
+          <a:p>
+            <a:pPr marL="342900" indent="-342900">
+              <a:spcAft>
+                <a:spcPts val="600"/>
+              </a:spcAft>
+              <a:buSzPct val="100000"/>
+              <a:buChar char="•"/>
+            </a:pPr>
+            <a:r>
+              <a:rPr lang="en-US" sz="1400" dirty="0">
+                <a:solidFill>
+                  <a:srgbClr val="F5F5F5"/>
+                </a:solidFill>
+                <a:latin typeface="Calibri" pitchFamily="34" charset="0"/>
+                <a:ea typeface="Calibri" pitchFamily="34" charset="-122"/>
+                <a:cs typeface="Calibri" pitchFamily="34" charset="-120"/>
+              </a:rPr>
+              <a:t>pytest -v: 656 passed</a:t>
+            </a:r>
+            <a:endParaRPr lang="en-US" sz="1400" dirty="0"/>
+          </a:p>
+          <a:p>
+            <a:pPr marL="342900" indent="-342900">
+              <a:spcAft>
+                <a:spcPts val="600"/>
+              </a:spcAft>
+              <a:buSzPct val="100000"/>
+              <a:buChar char="•"/>
+            </a:pPr>
+            <a:r>
+              <a:rPr lang="en-US" sz="1400" dirty="0">
+                <a:solidFill>
+                  <a:srgbClr val="F5F5F5"/>
+                </a:solidFill>
+                <a:latin typeface="Calibri" pitchFamily="34" charset="0"/>
+                <a:ea typeface="Calibri" pitchFamily="34" charset="-122"/>
+                <a:cs typeface="Calibri" pitchFamily="34" charset="-120"/>
+              </a:rPr>
+              <a:t>Backend tests use a throwaway database and a fake YouTube adapter</a:t>
+            </a:r>
+            <a:endParaRPr lang="en-US" sz="1400" dirty="0"/>
+          </a:p>
+          <a:p>
+            <a:pPr marL="342900" indent="-342900">
+              <a:spcAft>
+                <a:spcPts val="600"/>
+              </a:spcAft>
+              <a:buSzPct val="100000"/>
+              <a:buChar char="•"/>
+            </a:pPr>
+            <a:r>
+              <a:rPr lang="en-US" sz="1400" dirty="0">
+                <a:solidFill>
+                  <a:srgbClr val="F5F5F5"/>
+                </a:solidFill>
+                <a:latin typeface="Calibri" pitchFamily="34" charset="0"/>
+                <a:ea typeface="Calibri" pitchFamily="34" charset="-122"/>
+                <a:cs typeface="Calibri" pitchFamily="34" charset="-120"/>
+              </a:rPr>
+              <a:t>Playwright runs on desktop and phone sizes, with axe WCAG 2 A/AA scans</a:t>
+            </a:r>
+            <a:endParaRPr lang="en-US" sz="1400" dirty="0"/>
+          </a:p>
+          <a:p>
+            <a:pPr marL="342900" indent="-342900">
+              <a:spcAft>
+                <a:spcPts val="600"/>
+              </a:spcAft>
+              <a:buSzPct val="100000"/>
+              <a:buChar char="•"/>
+            </a:pPr>
+            <a:r>
+              <a:rPr lang="en-US" sz="1400" dirty="0">
+                <a:solidFill>
+                  <a:srgbClr val="F5F5F5"/>
+                </a:solidFill>
+                <a:latin typeface="Calibri" pitchFamily="34" charset="0"/>
+                <a:ea typeface="Calibri" pitchFamily="34" charset="-122"/>
+                <a:cs typeface="Calibri" pitchFamily="34" charset="-120"/>
+              </a:rPr>
+              <a:t>Both images scan clean: zero fixable HIGH or CRITICAL findings</a:t>
+            </a:r>
+            <a:endParaRPr lang="en-US" sz="1400" dirty="0"/>
+          </a:p>
+        </p:txBody>
+      </p:sp>
+    </p:spTree>
+  </p:cSld>
+  <p:clrMapOvr>
+    <a:masterClrMapping/>
+  </p:clrMapOvr>
+</p:sld>
+</file>
+
+<file path=ppt/slides/slide14.xml><?xml version="1.0" encoding="utf-8"?>
+<p:sld xmlns:a="http://schemas.openxmlformats.org/drawingml/2006/main" xmlns:r="http://schemas.openxmlformats.org/officeDocument/2006/relationships" xmlns:p="http://schemas.openxmlformats.org/presentationml/2006/main">
+  <p:cSld name="Slide 14">
+    <p:bg>
+      <p:bgPr>
+        <a:solidFill>
+          <a:srgbClr val="0F1113"/>
+        </a:solidFill>
+      </p:bgPr>
+    </p:bg>
+    <p:spTree>
+      <p:nvGrpSpPr>
+        <p:cNvPr id="1" name=""/>
+        <p:cNvGrpSpPr/>
+        <p:nvPr/>
+      </p:nvGrpSpPr>
+      <p:grpSpPr>
+        <a:xfrm>
+          <a:off x="0" y="0"/>
+          <a:ext cx="0" cy="0"/>
+          <a:chOff x="0" y="0"/>
+          <a:chExt cx="0" cy="0"/>
+        </a:xfrm>
+      </p:grpSpPr>
+      <p:sp>
+        <p:nvSpPr>
+          <p:cNvPr id="2" name="Text 0"/>
+          <p:cNvSpPr txBox="1"/>
+          <p:nvPr/>
+        </p:nvSpPr>
+        <p:spPr>
+          <a:xfrm>
+            <a:off x="457200" y="274320"/>
+            <a:ext cx="8229600" cy="685800"/>
+          </a:xfrm>
+          <a:prstGeom prst="rect">
+            <a:avLst/>
+          </a:prstGeom>
+          <a:noFill/>
+          <a:ln/>
+        </p:spPr>
+        <p:txBody>
+          <a:bodyPr wrap="square" lIns="0" tIns="0" rIns="0" bIns="0" rtlCol="0" anchor="ctr"/>
+          <a:lstStyle/>
+          <a:p>
+            <a:pPr indent="0" marL="0">
+              <a:buNone/>
+            </a:pPr>
+            <a:r>
+              <a:rPr lang="en-US" sz="3400" b="1" dirty="0">
+                <a:solidFill>
+                  <a:srgbClr val="F5F5F5"/>
+                </a:solidFill>
+                <a:latin typeface="Calibri" pitchFamily="34" charset="0"/>
+                <a:ea typeface="Calibri" pitchFamily="34" charset="-122"/>
+                <a:cs typeface="Calibri" pitchFamily="34" charset="-120"/>
+              </a:rPr>
+              <a:t>Key learnings and limits</a:t>
+            </a:r>
+            <a:endParaRPr lang="en-US" sz="3400" dirty="0"/>
+          </a:p>
+        </p:txBody>
+      </p:sp>
+      <p:sp>
+        <p:nvSpPr>
+          <p:cNvPr id="4" name="Shape 1"/>
+          <p:cNvSpPr/>
+          <p:nvPr/>
+        </p:nvSpPr>
+        <p:spPr>
+          <a:xfrm>
+            <a:off x="457200" y="1188720"/>
+            <a:ext cx="3931920" cy="3383280"/>
+          </a:xfrm>
+          <a:prstGeom prst="roundRect">
+            <a:avLst>
+              <a:gd name="adj" fmla="val 2162"/>
+            </a:avLst>
+          </a:prstGeom>
+          <a:solidFill>
+            <a:srgbClr val="17191C"/>
+          </a:solidFill>
+          <a:ln w="9525">
+            <a:solidFill>
+              <a:srgbClr val="292D32"/>
+            </a:solidFill>
+            <a:prstDash val="solid"/>
+          </a:ln>
+        </p:spPr>
+      </p:sp>
+      <p:sp>
+        <p:nvSpPr>
+          <p:cNvPr id="5" name="Text 2"/>
+          <p:cNvSpPr txBox="1"/>
+          <p:nvPr/>
+        </p:nvSpPr>
+        <p:spPr>
+          <a:xfrm>
+            <a:off x="640080" y="1298448"/>
+            <a:ext cx="3566160" cy="365760"/>
+          </a:xfrm>
+          <a:prstGeom prst="rect">
+            <a:avLst/>
+          </a:prstGeom>
+          <a:noFill/>
+          <a:ln/>
+        </p:spPr>
+        <p:txBody>
+          <a:bodyPr wrap="square" lIns="0" tIns="0" rIns="0" bIns="0" rtlCol="0" anchor="ctr"/>
+          <a:lstStyle/>
+          <a:p>
+            <a:pPr indent="0" marL="0">
+              <a:buNone/>
+            </a:pPr>
+            <a:r>
+              <a:rPr lang="en-US" sz="1800" b="1" dirty="0">
+                <a:solidFill>
+                  <a:srgbClr val="34D399"/>
+                </a:solidFill>
+                <a:latin typeface="Calibri" pitchFamily="34" charset="0"/>
+                <a:ea typeface="Calibri" pitchFamily="34" charset="-122"/>
+                <a:cs typeface="Calibri" pitchFamily="34" charset="-120"/>
+              </a:rPr>
+              <a:t>What I learned</a:t>
+            </a:r>
+            <a:endParaRPr lang="en-US" sz="1800" dirty="0"/>
+          </a:p>
+        </p:txBody>
+      </p:sp>
+      <p:sp>
+        <p:nvSpPr>
+          <p:cNvPr id="6" name="Text 3"/>
+          <p:cNvSpPr txBox="1"/>
+          <p:nvPr/>
+        </p:nvSpPr>
+        <p:spPr>
+          <a:xfrm>
+            <a:off x="640080" y="1691640"/>
+            <a:ext cx="3566160" cy="2743200"/>
+          </a:xfrm>
+          <a:prstGeom prst="rect">
+            <a:avLst/>
+          </a:prstGeom>
+          <a:noFill/>
+          <a:ln/>
+        </p:spPr>
+        <p:txBody>
+          <a:bodyPr wrap="square" lIns="0" tIns="0" rIns="0" bIns="0" rtlCol="0" anchor="t"/>
+          <a:lstStyle/>
+          <a:p>
+            <a:pPr indent="0" marL="0">
+              <a:buNone/>
+            </a:pPr>
+            <a:r>
+              <a:rPr lang="en-US" sz="1400" dirty="0">
+                <a:solidFill>
+                  <a:srgbClr val="B8BEC7"/>
+                </a:solidFill>
+                <a:latin typeface="Calibri" pitchFamily="34" charset="0"/>
+                <a:ea typeface="Calibri" pitchFamily="34" charset="-122"/>
+                <a:cs typeface="Calibri" pitchFamily="34" charset="-120"/>
+              </a:rPr>
+              <a:t>Small, reviewed pull requests keep CI green.</a:t>
+            </a:r>
+            <a:endParaRPr lang="en-US" sz="1400" dirty="0"/>
+          </a:p>
+          <a:p>
+            <a:pPr indent="0" marL="0">
+              <a:buNone/>
+            </a:pPr>
+            <a:r>
+              <a:rPr lang="en-US" sz="1400" dirty="0">
+                <a:solidFill>
+                  <a:srgbClr val="B8BEC7"/>
+                </a:solidFill>
+                <a:latin typeface="Calibri" pitchFamily="34" charset="0"/>
+                <a:ea typeface="Calibri" pitchFamily="34" charset="-122"/>
+                <a:cs typeface="Calibri" pitchFamily="34" charset="-120"/>
+              </a:rPr>
+              <a:t>A pipeline is only trustworthy if every gate can fail.</a:t>
+            </a:r>
+            <a:endParaRPr lang="en-US" sz="1400" dirty="0"/>
+          </a:p>
+          <a:p>
+            <a:pPr indent="0" marL="0">
+              <a:buNone/>
+            </a:pPr>
+            <a:r>
+              <a:rPr lang="en-US" sz="1400" dirty="0">
+                <a:solidFill>
+                  <a:srgbClr val="B8BEC7"/>
+                </a:solidFill>
+                <a:latin typeface="Calibri" pitchFamily="34" charset="0"/>
+                <a:ea typeface="Calibri" pitchFamily="34" charset="-122"/>
+                <a:cs typeface="Calibri" pitchFamily="34" charset="-120"/>
+              </a:rPr>
+              <a:t>GitOps removes cluster credentials from CI.</a:t>
+            </a:r>
+            <a:endParaRPr lang="en-US" sz="1400" dirty="0"/>
+          </a:p>
+          <a:p>
+            <a:pPr indent="0" marL="0">
+              <a:buNone/>
+            </a:pPr>
+            <a:r>
+              <a:rPr lang="en-US" sz="1400" dirty="0">
+                <a:solidFill>
+                  <a:srgbClr val="B8BEC7"/>
+                </a:solidFill>
+                <a:latin typeface="Calibri" pitchFamily="34" charset="0"/>
+                <a:ea typeface="Calibri" pitchFamily="34" charset="-122"/>
+                <a:cs typeface="Calibri" pitchFamily="34" charset="-120"/>
+              </a:rPr>
+              <a:t>Cloud account policies shape the architecture as much as the code.</a:t>
+            </a:r>
+            <a:endParaRPr lang="en-US" sz="1400" dirty="0"/>
+          </a:p>
+        </p:txBody>
+      </p:sp>
+      <p:sp>
+        <p:nvSpPr>
+          <p:cNvPr id="7" name="Shape 4"/>
+          <p:cNvSpPr/>
+          <p:nvPr/>
+        </p:nvSpPr>
+        <p:spPr>
+          <a:xfrm>
+            <a:off x="4754880" y="1188720"/>
+            <a:ext cx="3931920" cy="3383280"/>
+          </a:xfrm>
+          <a:prstGeom prst="roundRect">
+            <a:avLst>
+              <a:gd name="adj" fmla="val 2162"/>
+            </a:avLst>
+          </a:prstGeom>
+          <a:solidFill>
+            <a:srgbClr val="17191C"/>
+          </a:solidFill>
+          <a:ln w="9525">
+            <a:solidFill>
+              <a:srgbClr val="292D32"/>
+            </a:solidFill>
+            <a:prstDash val="solid"/>
+          </a:ln>
+        </p:spPr>
+      </p:sp>
+      <p:sp>
+        <p:nvSpPr>
+          <p:cNvPr id="8" name="Text 5"/>
+          <p:cNvSpPr txBox="1"/>
+          <p:nvPr/>
+        </p:nvSpPr>
+        <p:spPr>
+          <a:xfrm>
             <a:off x="4937760" y="1298448"/>
             <a:ext cx="3566160" cy="365760"/>
           </a:xfrm>
@@ -3283,7 +4742,7 @@
                 <a:ea typeface="Calibri" pitchFamily="34" charset="-122"/>
                 <a:cs typeface="Calibri" pitchFamily="34" charset="-120"/>
               </a:rPr>
-              <a:t>The cluster bills hourly, so it is destroyed after the demo.</a:t>
+              <a:t>The cluster is destroyed after the demo to avoid cost.</a:t>
             </a:r>
             <a:endParaRPr lang="en-US" sz="1400" dirty="0"/>
           </a:p>
@@ -3369,11 +4828,11 @@
         <p:spPr>
           <a:xfrm>
             <a:off x="457200" y="1188720"/>
-            <a:ext cx="3931920" cy="1600200"/>
+            <a:ext cx="2286000" cy="1783080"/>
           </a:xfrm>
           <a:prstGeom prst="roundRect">
             <a:avLst>
-              <a:gd name="adj" fmla="val 4571"/>
+              <a:gd name="adj" fmla="val 4103"/>
             </a:avLst>
           </a:prstGeom>
           <a:solidFill>
@@ -3396,7 +4855,7 @@
         <p:spPr>
           <a:xfrm>
             <a:off x="640080" y="1298448"/>
-            <a:ext cx="3566160" cy="365760"/>
+            <a:ext cx="1920240" cy="365760"/>
           </a:xfrm>
           <a:prstGeom prst="rect">
             <a:avLst/>
@@ -3435,7 +4894,7 @@
         <p:spPr>
           <a:xfrm>
             <a:off x="640080" y="1691640"/>
-            <a:ext cx="3566160" cy="960120"/>
+            <a:ext cx="1920240" cy="1143000"/>
           </a:xfrm>
           <a:prstGeom prst="rect">
             <a:avLst/>
@@ -3459,7 +4918,7 @@
                 <a:ea typeface="Calibri" pitchFamily="34" charset="-122"/>
                 <a:cs typeface="Calibri" pitchFamily="34" charset="-120"/>
               </a:rPr>
-              <a:t>Import single videos or whole playlists; partial failures are reported per item.</a:t>
+              <a:t>Import videos or whole playlists; failures are reported per item.</a:t>
             </a:r>
             <a:endParaRPr lang="en-US" sz="1400" dirty="0"/>
           </a:p>
@@ -3473,12 +4932,12 @@
         </p:nvSpPr>
         <p:spPr>
           <a:xfrm>
-            <a:off x="4754880" y="1188720"/>
-            <a:ext cx="3931920" cy="1600200"/>
+            <a:off x="2880360" y="1188720"/>
+            <a:ext cx="2286000" cy="1783080"/>
           </a:xfrm>
           <a:prstGeom prst="roundRect">
             <a:avLst>
-              <a:gd name="adj" fmla="val 4571"/>
+              <a:gd name="adj" fmla="val 4103"/>
             </a:avLst>
           </a:prstGeom>
           <a:solidFill>
@@ -3500,8 +4959,8 @@
         </p:nvSpPr>
         <p:spPr>
           <a:xfrm>
-            <a:off x="4937760" y="1298448"/>
-            <a:ext cx="3566160" cy="365760"/>
+            <a:off x="3063240" y="1298448"/>
+            <a:ext cx="1920240" cy="365760"/>
           </a:xfrm>
           <a:prstGeom prst="rect">
             <a:avLst/>
@@ -3525,7 +4984,7 @@
                 <a:ea typeface="Calibri" pitchFamily="34" charset="-122"/>
                 <a:cs typeface="Calibri" pitchFamily="34" charset="-120"/>
               </a:rPr>
-              <a:t>Player and progress</a:t>
+              <a:t>Player</a:t>
             </a:r>
             <a:endParaRPr lang="en-US" sz="1800" dirty="0"/>
           </a:p>
@@ -3539,8 +4998,8 @@
         </p:nvSpPr>
         <p:spPr>
           <a:xfrm>
-            <a:off x="4937760" y="1691640"/>
-            <a:ext cx="3566160" cy="960120"/>
+            <a:off x="3063240" y="1691640"/>
+            <a:ext cx="1920240" cy="1143000"/>
           </a:xfrm>
           <a:prstGeom prst="rect">
             <a:avLst/>
@@ -3564,7 +5023,7 @@
                 <a:ea typeface="Calibri" pitchFamily="34" charset="-122"/>
                 <a:cs typeface="Calibri" pitchFamily="34" charset="-120"/>
               </a:rPr>
-              <a:t>Embedded YouTube player that resumes where you stopped. Position and status are separate fields.</a:t>
+              <a:t>Embedded YouTube player that resumes where you stopped.</a:t>
             </a:r>
             <a:endParaRPr lang="en-US" sz="1400" dirty="0"/>
           </a:p>
@@ -3578,12 +5037,12 @@
         </p:nvSpPr>
         <p:spPr>
           <a:xfrm>
-            <a:off x="457200" y="3017520"/>
-            <a:ext cx="3931920" cy="1600200"/>
+            <a:off x="457200" y="3108960"/>
+            <a:ext cx="2286000" cy="1783080"/>
           </a:xfrm>
           <a:prstGeom prst="roundRect">
             <a:avLst>
-              <a:gd name="adj" fmla="val 4571"/>
+              <a:gd name="adj" fmla="val 4103"/>
             </a:avLst>
           </a:prstGeom>
           <a:solidFill>
@@ -3605,8 +5064,8 @@
         </p:nvSpPr>
         <p:spPr>
           <a:xfrm>
-            <a:off x="640080" y="3127248"/>
-            <a:ext cx="3566160" cy="365760"/>
+            <a:off x="640080" y="3218688"/>
+            <a:ext cx="1920240" cy="365760"/>
           </a:xfrm>
           <a:prstGeom prst="rect">
             <a:avLst/>
@@ -3630,7 +5089,7 @@
                 <a:ea typeface="Calibri" pitchFamily="34" charset="-122"/>
                 <a:cs typeface="Calibri" pitchFamily="34" charset="-120"/>
               </a:rPr>
-              <a:t>Notes that never get lost</a:t>
+              <a:t>Notes</a:t>
             </a:r>
             <a:endParaRPr lang="en-US" sz="1800" dirty="0"/>
           </a:p>
@@ -3644,8 +5103,8 @@
         </p:nvSpPr>
         <p:spPr>
           <a:xfrm>
-            <a:off x="640080" y="3520440"/>
-            <a:ext cx="3566160" cy="960120"/>
+            <a:off x="640080" y="3611880"/>
+            <a:ext cx="1920240" cy="1143000"/>
           </a:xfrm>
           <a:prstGeom prst="rect">
             <a:avLst/>
@@ -3669,7 +5128,7 @@
                 <a:ea typeface="Calibri" pitchFamily="34" charset="-122"/>
                 <a:cs typeface="Calibri" pitchFamily="34" charset="-120"/>
               </a:rPr>
-              <a:t>Rich text, 1.5 s autosave, Saving / Saved / error with retry, and conflict detection.</a:t>
+              <a:t>Rich text with autosave, retry and conflict detection.</a:t>
             </a:r>
             <a:endParaRPr lang="en-US" sz="1400" dirty="0"/>
           </a:p>
@@ -3683,12 +5142,12 @@
         </p:nvSpPr>
         <p:spPr>
           <a:xfrm>
-            <a:off x="4754880" y="3017520"/>
-            <a:ext cx="3931920" cy="1600200"/>
+            <a:off x="2880360" y="3108960"/>
+            <a:ext cx="2286000" cy="1783080"/>
           </a:xfrm>
           <a:prstGeom prst="roundRect">
             <a:avLst>
-              <a:gd name="adj" fmla="val 4571"/>
+              <a:gd name="adj" fmla="val 4103"/>
             </a:avLst>
           </a:prstGeom>
           <a:solidFill>
@@ -3710,8 +5169,8 @@
         </p:nvSpPr>
         <p:spPr>
           <a:xfrm>
-            <a:off x="4937760" y="3127248"/>
-            <a:ext cx="3566160" cy="365760"/>
+            <a:off x="3063240" y="3218688"/>
+            <a:ext cx="1920240" cy="365760"/>
           </a:xfrm>
           <a:prstGeom prst="rect">
             <a:avLst/>
@@ -3735,7 +5194,7 @@
                 <a:ea typeface="Calibri" pitchFamily="34" charset="-122"/>
                 <a:cs typeface="Calibri" pitchFamily="34" charset="-120"/>
               </a:rPr>
-              <a:t>Goals and revision</a:t>
+              <a:t>Goals + revision</a:t>
             </a:r>
             <a:endParaRPr lang="en-US" sz="1800" dirty="0"/>
           </a:p>
@@ -3749,8 +5208,8 @@
         </p:nvSpPr>
         <p:spPr>
           <a:xfrm>
-            <a:off x="4937760" y="3520440"/>
-            <a:ext cx="3566160" cy="960120"/>
+            <a:off x="3063240" y="3611880"/>
+            <a:ext cx="1920240" cy="1143000"/>
           </a:xfrm>
           <a:prstGeom prst="rect">
             <a:avLst/>
@@ -3774,7 +5233,183 @@
                 <a:ea typeface="Calibri" pitchFamily="34" charset="-122"/>
                 <a:cs typeface="Calibri" pitchFamily="34" charset="-120"/>
               </a:rPr>
-              <a:t>Daily watch-time goal from observed playback only; a revision queue with reschedule.</a:t>
+              <a:t>Daily goal from real playback; a revision queue.</a:t>
+            </a:r>
+            <a:endParaRPr lang="en-US" sz="1400" dirty="0"/>
+          </a:p>
+        </p:txBody>
+      </p:sp>
+      <p:sp>
+        <p:nvSpPr>
+          <p:cNvPr id="16" name="Shape 13"/>
+          <p:cNvSpPr/>
+          <p:nvPr/>
+        </p:nvSpPr>
+        <p:spPr>
+          <a:xfrm>
+            <a:off x="5440680" y="1161288"/>
+            <a:ext cx="3200400" cy="2020824"/>
+          </a:xfrm>
+          <a:prstGeom prst="rect">
+            <a:avLst/>
+          </a:prstGeom>
+          <a:solidFill>
+            <a:srgbClr val="17191C"/>
+          </a:solidFill>
+          <a:ln w="12700">
+            <a:solidFill>
+              <a:srgbClr val="292D32"/>
+            </a:solidFill>
+            <a:prstDash val="solid"/>
+          </a:ln>
+        </p:spPr>
+      </p:sp>
+      <p:pic>
+        <p:nvPicPr>
+          <p:cNvPr id="17" name="Image 0" descr="D:/Resume projects/StudAura/docs/screenshots/app-localhost-3000.png">    </p:cNvPr>
+          <p:cNvPicPr>
+            <a:picLocks noChangeAspect="1"/>
+          </p:cNvPicPr>
+          <p:nvPr/>
+        </p:nvPicPr>
+        <p:blipFill>
+          <a:blip r:embed="rId1"/>
+          <a:stretch>
+            <a:fillRect/>
+          </a:stretch>
+        </p:blipFill>
+        <p:spPr>
+          <a:xfrm>
+            <a:off x="5468112" y="1188720"/>
+            <a:ext cx="3145536" cy="1965960"/>
+          </a:xfrm>
+          <a:prstGeom prst="rect">
+            <a:avLst/>
+          </a:prstGeom>
+        </p:spPr>
+      </p:pic>
+      <p:sp>
+        <p:nvSpPr>
+          <p:cNvPr id="18" name="Text 14"/>
+          <p:cNvSpPr txBox="1"/>
+          <p:nvPr/>
+        </p:nvSpPr>
+        <p:spPr>
+          <a:xfrm>
+            <a:off x="5394960" y="3209544"/>
+            <a:ext cx="3291840" cy="219456"/>
+          </a:xfrm>
+          <a:prstGeom prst="rect">
+            <a:avLst/>
+          </a:prstGeom>
+          <a:noFill/>
+          <a:ln/>
+        </p:spPr>
+        <p:txBody>
+          <a:bodyPr wrap="square" lIns="0" tIns="0" rIns="0" bIns="0" rtlCol="0" anchor="t"/>
+          <a:lstStyle/>
+          <a:p>
+            <a:pPr algn="ctr" indent="0" marL="0">
+              <a:buNone/>
+            </a:pPr>
+            <a:r>
+              <a:rPr lang="en-US" sz="1100" dirty="0">
+                <a:solidFill>
+                  <a:srgbClr val="B8BEC7"/>
+                </a:solidFill>
+                <a:latin typeface="Calibri" pitchFamily="34" charset="0"/>
+                <a:ea typeface="Calibri" pitchFamily="34" charset="-122"/>
+                <a:cs typeface="Calibri" pitchFamily="34" charset="-120"/>
+              </a:rPr>
+              <a:t>Docker Compose, localhost:3000</a:t>
+            </a:r>
+            <a:endParaRPr lang="en-US" sz="1100" dirty="0"/>
+          </a:p>
+        </p:txBody>
+      </p:sp>
+      <p:sp>
+        <p:nvSpPr>
+          <p:cNvPr id="19" name="Shape 15"/>
+          <p:cNvSpPr/>
+          <p:nvPr/>
+        </p:nvSpPr>
+        <p:spPr>
+          <a:xfrm>
+            <a:off x="5507830" y="3493008"/>
+            <a:ext cx="688660" cy="1426464"/>
+          </a:xfrm>
+          <a:prstGeom prst="rect">
+            <a:avLst/>
+          </a:prstGeom>
+          <a:solidFill>
+            <a:srgbClr val="17191C"/>
+          </a:solidFill>
+          <a:ln w="12700">
+            <a:solidFill>
+              <a:srgbClr val="292D32"/>
+            </a:solidFill>
+            <a:prstDash val="solid"/>
+          </a:ln>
+        </p:spPr>
+      </p:sp>
+      <p:pic>
+        <p:nvPicPr>
+          <p:cNvPr id="20" name="Image 1" descr="D:/Resume projects/StudAura/docs/screenshots/app-signup-mobile.png">    </p:cNvPr>
+          <p:cNvPicPr>
+            <a:picLocks noChangeAspect="1"/>
+          </p:cNvPicPr>
+          <p:nvPr/>
+        </p:nvPicPr>
+        <p:blipFill>
+          <a:blip r:embed="rId2"/>
+          <a:stretch>
+            <a:fillRect/>
+          </a:stretch>
+        </p:blipFill>
+        <p:spPr>
+          <a:xfrm>
+            <a:off x="5535262" y="3520440"/>
+            <a:ext cx="633796" cy="1371600"/>
+          </a:xfrm>
+          <a:prstGeom prst="rect">
+            <a:avLst/>
+          </a:prstGeom>
+        </p:spPr>
+      </p:pic>
+      <p:sp>
+        <p:nvSpPr>
+          <p:cNvPr id="21" name="Text 16"/>
+          <p:cNvSpPr txBox="1"/>
+          <p:nvPr/>
+        </p:nvSpPr>
+        <p:spPr>
+          <a:xfrm>
+            <a:off x="6446520" y="3566160"/>
+            <a:ext cx="2240280" cy="1188720"/>
+          </a:xfrm>
+          <a:prstGeom prst="rect">
+            <a:avLst/>
+          </a:prstGeom>
+          <a:noFill/>
+          <a:ln/>
+        </p:spPr>
+        <p:txBody>
+          <a:bodyPr wrap="square" lIns="0" tIns="0" rIns="0" bIns="0" rtlCol="0" anchor="t"/>
+          <a:lstStyle/>
+          <a:p>
+            <a:pPr indent="0" marL="0">
+              <a:buNone/>
+            </a:pPr>
+            <a:r>
+              <a:rPr lang="en-US" sz="1400" dirty="0">
+                <a:solidFill>
+                  <a:srgbClr val="B8BEC7"/>
+                </a:solidFill>
+                <a:latin typeface="Calibri" pitchFamily="34" charset="0"/>
+                <a:ea typeface="Calibri" pitchFamily="34" charset="-122"/>
+                <a:cs typeface="Calibri" pitchFamily="34" charset="-120"/>
+              </a:rPr>
+              <a:t>The same app through the EKS load balancer, on a phone-sized screen</a:t>
             </a:r>
             <a:endParaRPr lang="en-US" sz="1400" dirty="0"/>
           </a:p>
@@ -5335,12 +6970,12 @@
         </p:nvSpPr>
         <p:spPr>
           <a:xfrm>
-            <a:off x="365760" y="1371600"/>
-            <a:ext cx="1463040" cy="1097280"/>
+            <a:off x="365760" y="1097280"/>
+            <a:ext cx="1463040" cy="868680"/>
           </a:xfrm>
           <a:prstGeom prst="roundRect">
             <a:avLst>
-              <a:gd name="adj" fmla="val 6667"/>
+              <a:gd name="adj" fmla="val 8421"/>
             </a:avLst>
           </a:prstGeom>
           <a:solidFill>
@@ -5362,8 +6997,8 @@
         </p:nvSpPr>
         <p:spPr>
           <a:xfrm>
-            <a:off x="365760" y="1371600"/>
-            <a:ext cx="1463040" cy="1097280"/>
+            <a:off x="365760" y="1097280"/>
+            <a:ext cx="1463040" cy="868680"/>
           </a:xfrm>
           <a:prstGeom prst="rect">
             <a:avLst/>
@@ -5404,41 +7039,7 @@
                 <a:ea typeface="Calibri" pitchFamily="34" charset="-122"/>
                 <a:cs typeface="Calibri" pitchFamily="34" charset="-120"/>
               </a:rPr>
-              <a:t>ruff, mypy, pytest</a:t>
-            </a:r>
-            <a:endParaRPr lang="en-US" sz="1400" dirty="0"/>
-          </a:p>
-          <a:p>
-            <a:pPr algn="ctr" indent="0" marL="0">
-              <a:buNone/>
-            </a:pPr>
-            <a:r>
-              <a:rPr lang="en-US" sz="1200" dirty="0">
-                <a:solidFill>
-                  <a:srgbClr val="B8BEC7"/>
-                </a:solidFill>
-                <a:latin typeface="Calibri" pitchFamily="34" charset="0"/>
-                <a:ea typeface="Calibri" pitchFamily="34" charset="-122"/>
-                <a:cs typeface="Calibri" pitchFamily="34" charset="-120"/>
-              </a:rPr>
-              <a:t>ESLint, tsc, vitest</a:t>
-            </a:r>
-            <a:endParaRPr lang="en-US" sz="1400" dirty="0"/>
-          </a:p>
-          <a:p>
-            <a:pPr algn="ctr" indent="0" marL="0">
-              <a:buNone/>
-            </a:pPr>
-            <a:r>
-              <a:rPr lang="en-US" sz="1200" dirty="0">
-                <a:solidFill>
-                  <a:srgbClr val="B8BEC7"/>
-                </a:solidFill>
-                <a:latin typeface="Calibri" pitchFamily="34" charset="0"/>
-                <a:ea typeface="Calibri" pitchFamily="34" charset="-122"/>
-                <a:cs typeface="Calibri" pitchFamily="34" charset="-120"/>
-              </a:rPr>
-              <a:t>terraform, helm</a:t>
+              <a:t>lint, tests, build</a:t>
             </a:r>
             <a:endParaRPr lang="en-US" sz="1400" dirty="0"/>
           </a:p>
@@ -5452,12 +7053,12 @@
         </p:nvSpPr>
         <p:spPr>
           <a:xfrm>
-            <a:off x="2103120" y="1371600"/>
-            <a:ext cx="1463040" cy="1097280"/>
+            <a:off x="2103120" y="1097280"/>
+            <a:ext cx="1463040" cy="868680"/>
           </a:xfrm>
           <a:prstGeom prst="roundRect">
             <a:avLst>
-              <a:gd name="adj" fmla="val 6667"/>
+              <a:gd name="adj" fmla="val 8421"/>
             </a:avLst>
           </a:prstGeom>
           <a:solidFill>
@@ -5479,8 +7080,8 @@
         </p:nvSpPr>
         <p:spPr>
           <a:xfrm>
-            <a:off x="2103120" y="1371600"/>
-            <a:ext cx="1463040" cy="1097280"/>
+            <a:off x="2103120" y="1097280"/>
+            <a:ext cx="1463040" cy="868680"/>
           </a:xfrm>
           <a:prstGeom prst="rect">
             <a:avLst/>
@@ -5521,24 +7122,7 @@
                 <a:ea typeface="Calibri" pitchFamily="34" charset="-122"/>
                 <a:cs typeface="Calibri" pitchFamily="34" charset="-120"/>
               </a:rPr>
-              <a:t>build both, non-root</a:t>
-            </a:r>
-            <a:endParaRPr lang="en-US" sz="1400" dirty="0"/>
-          </a:p>
-          <a:p>
-            <a:pPr algn="ctr" indent="0" marL="0">
-              <a:buNone/>
-            </a:pPr>
-            <a:r>
-              <a:rPr lang="en-US" sz="1200" dirty="0">
-                <a:solidFill>
-                  <a:srgbClr val="B8BEC7"/>
-                </a:solidFill>
-                <a:latin typeface="Calibri" pitchFamily="34" charset="0"/>
-                <a:ea typeface="Calibri" pitchFamily="34" charset="-122"/>
-                <a:cs typeface="Calibri" pitchFamily="34" charset="-120"/>
-              </a:rPr>
-              <a:t>smoke test</a:t>
+              <a:t>build, non-root</a:t>
             </a:r>
             <a:endParaRPr lang="en-US" sz="1400" dirty="0"/>
           </a:p>
@@ -5552,12 +7136,12 @@
         </p:nvSpPr>
         <p:spPr>
           <a:xfrm>
-            <a:off x="3840480" y="1371600"/>
-            <a:ext cx="1463040" cy="1097280"/>
+            <a:off x="3840480" y="1097280"/>
+            <a:ext cx="1463040" cy="868680"/>
           </a:xfrm>
           <a:prstGeom prst="roundRect">
             <a:avLst>
-              <a:gd name="adj" fmla="val 6667"/>
+              <a:gd name="adj" fmla="val 8421"/>
             </a:avLst>
           </a:prstGeom>
           <a:solidFill>
@@ -5579,8 +7163,8 @@
         </p:nvSpPr>
         <p:spPr>
           <a:xfrm>
-            <a:off x="3840480" y="1371600"/>
-            <a:ext cx="1463040" cy="1097280"/>
+            <a:off x="3840480" y="1097280"/>
+            <a:ext cx="1463040" cy="868680"/>
           </a:xfrm>
           <a:prstGeom prst="rect">
             <a:avLst/>
@@ -5621,24 +7205,7 @@
                 <a:ea typeface="Calibri" pitchFamily="34" charset="-122"/>
                 <a:cs typeface="Calibri" pitchFamily="34" charset="-120"/>
               </a:rPr>
-              <a:t>Trivy gate</a:t>
-            </a:r>
-            <a:endParaRPr lang="en-US" sz="1400" dirty="0"/>
-          </a:p>
-          <a:p>
-            <a:pPr algn="ctr" indent="0" marL="0">
-              <a:buNone/>
-            </a:pPr>
-            <a:r>
-              <a:rPr lang="en-US" sz="1200" dirty="0">
-                <a:solidFill>
-                  <a:srgbClr val="B8BEC7"/>
-                </a:solidFill>
-                <a:latin typeface="Calibri" pitchFamily="34" charset="0"/>
-                <a:ea typeface="Calibri" pitchFamily="34" charset="-122"/>
-                <a:cs typeface="Calibri" pitchFamily="34" charset="-120"/>
-              </a:rPr>
-              <a:t>then push to GHCR</a:t>
+              <a:t>Trivy, then GHCR</a:t>
             </a:r>
             <a:endParaRPr lang="en-US" sz="1400" dirty="0"/>
           </a:p>
@@ -5652,12 +7219,12 @@
         </p:nvSpPr>
         <p:spPr>
           <a:xfrm>
-            <a:off x="5577840" y="1371600"/>
-            <a:ext cx="1463040" cy="1097280"/>
+            <a:off x="5577840" y="1097280"/>
+            <a:ext cx="1463040" cy="868680"/>
           </a:xfrm>
           <a:prstGeom prst="roundRect">
             <a:avLst>
-              <a:gd name="adj" fmla="val 6667"/>
+              <a:gd name="adj" fmla="val 8421"/>
             </a:avLst>
           </a:prstGeom>
           <a:solidFill>
@@ -5679,8 +7246,8 @@
         </p:nvSpPr>
         <p:spPr>
           <a:xfrm>
-            <a:off x="5577840" y="1371600"/>
-            <a:ext cx="1463040" cy="1097280"/>
+            <a:off x="5577840" y="1097280"/>
+            <a:ext cx="1463040" cy="868680"/>
           </a:xfrm>
           <a:prstGeom prst="rect">
             <a:avLst/>
@@ -5705,23 +7272,6 @@
                 <a:cs typeface="Calibri" pitchFamily="34" charset="-120"/>
               </a:rPr>
               <a:t>GitOps</a:t>
-            </a:r>
-            <a:endParaRPr lang="en-US" sz="1400" dirty="0"/>
-          </a:p>
-          <a:p>
-            <a:pPr algn="ctr" indent="0" marL="0">
-              <a:buNone/>
-            </a:pPr>
-            <a:r>
-              <a:rPr lang="en-US" sz="1200" dirty="0">
-                <a:solidFill>
-                  <a:srgbClr val="B8BEC7"/>
-                </a:solidFill>
-                <a:latin typeface="Calibri" pitchFamily="34" charset="0"/>
-                <a:ea typeface="Calibri" pitchFamily="34" charset="-122"/>
-                <a:cs typeface="Calibri" pitchFamily="34" charset="-120"/>
-              </a:rPr>
-              <a:t>writes tag to</a:t>
             </a:r>
             <a:endParaRPr lang="en-US" sz="1400" dirty="0"/>
           </a:p>
@@ -5752,12 +7302,12 @@
         </p:nvSpPr>
         <p:spPr>
           <a:xfrm>
-            <a:off x="7315200" y="1371600"/>
-            <a:ext cx="1463040" cy="1097280"/>
+            <a:off x="7315200" y="1097280"/>
+            <a:ext cx="1463040" cy="868680"/>
           </a:xfrm>
           <a:prstGeom prst="roundRect">
             <a:avLst>
-              <a:gd name="adj" fmla="val 6667"/>
+              <a:gd name="adj" fmla="val 8421"/>
             </a:avLst>
           </a:prstGeom>
           <a:solidFill>
@@ -5779,8 +7329,8 @@
         </p:nvSpPr>
         <p:spPr>
           <a:xfrm>
-            <a:off x="7315200" y="1371600"/>
-            <a:ext cx="1463040" cy="1097280"/>
+            <a:off x="7315200" y="1097280"/>
+            <a:ext cx="1463040" cy="868680"/>
           </a:xfrm>
           <a:prstGeom prst="rect">
             <a:avLst/>
@@ -5821,7 +7371,7 @@
                 <a:ea typeface="Calibri" pitchFamily="34" charset="-122"/>
                 <a:cs typeface="Calibri" pitchFamily="34" charset="-120"/>
               </a:rPr>
-              <a:t>syncs the cluster</a:t>
+              <a:t>syncs cluster</a:t>
             </a:r>
             <a:endParaRPr lang="en-US" sz="1400" dirty="0"/>
           </a:p>
@@ -5835,7 +7385,7 @@
         </p:nvSpPr>
         <p:spPr>
           <a:xfrm>
-            <a:off x="1828800" y="1920240"/>
+            <a:off x="1828800" y="1531620"/>
             <a:ext cx="274320" cy="0"/>
           </a:xfrm>
           <a:prstGeom prst="line">
@@ -5859,7 +7409,7 @@
         </p:nvSpPr>
         <p:spPr>
           <a:xfrm>
-            <a:off x="3566160" y="1920240"/>
+            <a:off x="3566160" y="1531620"/>
             <a:ext cx="274320" cy="0"/>
           </a:xfrm>
           <a:prstGeom prst="line">
@@ -5883,7 +7433,7 @@
         </p:nvSpPr>
         <p:spPr>
           <a:xfrm>
-            <a:off x="5303520" y="1920240"/>
+            <a:off x="5303520" y="1531620"/>
             <a:ext cx="274320" cy="0"/>
           </a:xfrm>
           <a:prstGeom prst="line">
@@ -5907,7 +7457,7 @@
         </p:nvSpPr>
         <p:spPr>
           <a:xfrm>
-            <a:off x="7040880" y="1920240"/>
+            <a:off x="7040880" y="1531620"/>
             <a:ext cx="274320" cy="0"/>
           </a:xfrm>
           <a:prstGeom prst="line">
@@ -5931,8 +7481,8 @@
         </p:nvSpPr>
         <p:spPr>
           <a:xfrm>
-            <a:off x="457200" y="2926080"/>
-            <a:ext cx="8229600" cy="1920240"/>
+            <a:off x="457200" y="2240280"/>
+            <a:ext cx="3566160" cy="2560320"/>
           </a:xfrm>
           <a:prstGeom prst="rect">
             <a:avLst/>
@@ -5952,7 +7502,7 @@
               <a:buChar char="•"/>
             </a:pPr>
             <a:r>
-              <a:rPr lang="en-US" sz="1600" dirty="0">
+              <a:rPr lang="en-US" sz="1400" dirty="0">
                 <a:solidFill>
                   <a:srgbClr val="F5F5F5"/>
                 </a:solidFill>
@@ -5960,9 +7510,9 @@
                 <a:ea typeface="Calibri" pitchFamily="34" charset="-122"/>
                 <a:cs typeface="Calibri" pitchFamily="34" charset="-120"/>
               </a:rPr>
-              <a:t>Triggers on every pull request and every push to main</a:t>
-            </a:r>
-            <a:endParaRPr lang="en-US" sz="1600" dirty="0"/>
+              <a:t>Runs on every pull request and every push to main</a:t>
+            </a:r>
+            <a:endParaRPr lang="en-US" sz="1400" dirty="0"/>
           </a:p>
           <a:p>
             <a:pPr marL="342900" indent="-342900">
@@ -5973,7 +7523,7 @@
               <a:buChar char="•"/>
             </a:pPr>
             <a:r>
-              <a:rPr lang="en-US" sz="1600" dirty="0">
+              <a:rPr lang="en-US" sz="1400" dirty="0">
                 <a:solidFill>
                   <a:srgbClr val="F5F5F5"/>
                 </a:solidFill>
@@ -5981,9 +7531,9 @@
                 <a:ea typeface="Calibri" pitchFamily="34" charset="-122"/>
                 <a:cs typeface="Calibri" pitchFamily="34" charset="-120"/>
               </a:rPr>
-              <a:t>pytest runs against a real PostgreSQL service; a skipped test fails the build</a:t>
-            </a:r>
-            <a:endParaRPr lang="en-US" sz="1600" dirty="0"/>
+              <a:t>pytest on a real PostgreSQL service; a skipped test fails the build</a:t>
+            </a:r>
+            <a:endParaRPr lang="en-US" sz="1400" dirty="0"/>
           </a:p>
           <a:p>
             <a:pPr marL="342900" indent="-342900">
@@ -5994,7 +7544,7 @@
               <a:buChar char="•"/>
             </a:pPr>
             <a:r>
-              <a:rPr lang="en-US" sz="1600" dirty="0">
+              <a:rPr lang="en-US" sz="1400" dirty="0">
                 <a:solidFill>
                   <a:srgbClr val="F5F5F5"/>
                 </a:solidFill>
@@ -6002,9 +7552,9 @@
                 <a:ea typeface="Calibri" pitchFamily="34" charset="-122"/>
                 <a:cs typeface="Calibri" pitchFamily="34" charset="-120"/>
               </a:rPr>
-              <a:t>Images are tagged with the commit SHA only, never latest</a:t>
-            </a:r>
-            <a:endParaRPr lang="en-US" sz="1600" dirty="0"/>
+              <a:t>Images tagged with the commit SHA only, never latest</a:t>
+            </a:r>
+            <a:endParaRPr lang="en-US" sz="1400" dirty="0"/>
           </a:p>
           <a:p>
             <a:pPr marL="342900" indent="-342900">
@@ -6015,7 +7565,7 @@
               <a:buChar char="•"/>
             </a:pPr>
             <a:r>
-              <a:rPr lang="en-US" sz="1600" dirty="0">
+              <a:rPr lang="en-US" sz="1400" dirty="0">
                 <a:solidFill>
                   <a:srgbClr val="F5F5F5"/>
                 </a:solidFill>
@@ -6023,9 +7573,97 @@
                 <a:ea typeface="Calibri" pitchFamily="34" charset="-122"/>
                 <a:cs typeface="Calibri" pitchFamily="34" charset="-120"/>
               </a:rPr>
-              <a:t>Playwright + axe accessibility checks run on main</a:t>
-            </a:r>
-            <a:endParaRPr lang="en-US" sz="1600" dirty="0"/>
+              <a:t>Playwright + axe accessibility checks on main</a:t>
+            </a:r>
+            <a:endParaRPr lang="en-US" sz="1400" dirty="0"/>
+          </a:p>
+        </p:txBody>
+      </p:sp>
+      <p:sp>
+        <p:nvSpPr>
+          <p:cNvPr id="19" name="Shape 16"/>
+          <p:cNvSpPr/>
+          <p:nvPr/>
+        </p:nvSpPr>
+        <p:spPr>
+          <a:xfrm>
+            <a:off x="4224528" y="2167128"/>
+            <a:ext cx="4489704" cy="2186044"/>
+          </a:xfrm>
+          <a:prstGeom prst="rect">
+            <a:avLst/>
+          </a:prstGeom>
+          <a:solidFill>
+            <a:srgbClr val="17191C"/>
+          </a:solidFill>
+          <a:ln w="12700">
+            <a:solidFill>
+              <a:srgbClr val="292D32"/>
+            </a:solidFill>
+            <a:prstDash val="solid"/>
+          </a:ln>
+        </p:spPr>
+      </p:sp>
+      <p:pic>
+        <p:nvPicPr>
+          <p:cNvPr id="20" name="Image 0" descr="D:/Resume projects/StudAura/docs/screenshots/github-actions-run.png">    </p:cNvPr>
+          <p:cNvPicPr>
+            <a:picLocks noChangeAspect="1"/>
+          </p:cNvPicPr>
+          <p:nvPr/>
+        </p:nvPicPr>
+        <p:blipFill>
+          <a:blip r:embed="rId1"/>
+          <a:stretch>
+            <a:fillRect/>
+          </a:stretch>
+        </p:blipFill>
+        <p:spPr>
+          <a:xfrm>
+            <a:off x="4251960" y="2194560"/>
+            <a:ext cx="4434840" cy="2131180"/>
+          </a:xfrm>
+          <a:prstGeom prst="rect">
+            <a:avLst/>
+          </a:prstGeom>
+        </p:spPr>
+      </p:pic>
+      <p:sp>
+        <p:nvSpPr>
+          <p:cNvPr id="21" name="Text 17"/>
+          <p:cNvSpPr txBox="1"/>
+          <p:nvPr/>
+        </p:nvSpPr>
+        <p:spPr>
+          <a:xfrm>
+            <a:off x="4251960" y="4380604"/>
+            <a:ext cx="4434840" cy="219456"/>
+          </a:xfrm>
+          <a:prstGeom prst="rect">
+            <a:avLst/>
+          </a:prstGeom>
+          <a:noFill/>
+          <a:ln/>
+        </p:spPr>
+        <p:txBody>
+          <a:bodyPr wrap="square" lIns="0" tIns="0" rIns="0" bIns="0" rtlCol="0" anchor="t"/>
+          <a:lstStyle/>
+          <a:p>
+            <a:pPr algn="ctr" indent="0" marL="0">
+              <a:buNone/>
+            </a:pPr>
+            <a:r>
+              <a:rPr lang="en-US" sz="1100" dirty="0">
+                <a:solidFill>
+                  <a:srgbClr val="B8BEC7"/>
+                </a:solidFill>
+                <a:latin typeface="Calibri" pitchFamily="34" charset="0"/>
+                <a:ea typeface="Calibri" pitchFamily="34" charset="-122"/>
+                <a:cs typeface="Calibri" pitchFamily="34" charset="-120"/>
+              </a:rPr>
+              <a:t>Green run on main: all jobs passed</a:t>
+            </a:r>
+            <a:endParaRPr lang="en-US" sz="1100" dirty="0"/>
           </a:p>
         </p:txBody>
       </p:sp>
@@ -6094,7 +7732,7 @@
                 <a:ea typeface="Calibri" pitchFamily="34" charset="-122"/>
                 <a:cs typeface="Calibri" pitchFamily="34" charset="-120"/>
               </a:rPr>
-              <a:t>DevSecOps</a:t>
+              <a:t>Containers and registry</a:t>
             </a:r>
             <a:endParaRPr lang="en-US" sz="3400" dirty="0"/>
           </a:p>
@@ -6108,18 +7746,16 @@
         </p:nvSpPr>
         <p:spPr>
           <a:xfrm>
-            <a:off x="457200" y="1188720"/>
-            <a:ext cx="3931920" cy="1600200"/>
-          </a:xfrm>
-          <a:prstGeom prst="roundRect">
-            <a:avLst>
-              <a:gd name="adj" fmla="val 4571"/>
-            </a:avLst>
+            <a:off x="458283" y="1115568"/>
+            <a:ext cx="3106793" cy="2889504"/>
+          </a:xfrm>
+          <a:prstGeom prst="rect">
+            <a:avLst/>
           </a:prstGeom>
           <a:solidFill>
             <a:srgbClr val="17191C"/>
           </a:solidFill>
-          <a:ln w="9525">
+          <a:ln w="12700">
             <a:solidFill>
               <a:srgbClr val="292D32"/>
             </a:solidFill>
@@ -6127,16 +7763,40 @@
           </a:ln>
         </p:spPr>
       </p:sp>
-      <p:sp>
-        <p:nvSpPr>
-          <p:cNvPr id="5" name="Text 2"/>
+      <p:pic>
+        <p:nvPicPr>
+          <p:cNvPr id="5" name="Image 0" descr="D:/Resume projects/StudAura/docs/screenshots/terminal-compose-up.png">    </p:cNvPr>
+          <p:cNvPicPr>
+            <a:picLocks noChangeAspect="1"/>
+          </p:cNvPicPr>
+          <p:nvPr/>
+        </p:nvPicPr>
+        <p:blipFill>
+          <a:blip r:embed="rId1"/>
+          <a:stretch>
+            <a:fillRect/>
+          </a:stretch>
+        </p:blipFill>
+        <p:spPr>
+          <a:xfrm>
+            <a:off x="485715" y="1143000"/>
+            <a:ext cx="3051929" cy="2834640"/>
+          </a:xfrm>
+          <a:prstGeom prst="rect">
+            <a:avLst/>
+          </a:prstGeom>
+        </p:spPr>
+      </p:pic>
+      <p:sp>
+        <p:nvSpPr>
+          <p:cNvPr id="6" name="Text 2"/>
           <p:cNvSpPr txBox="1"/>
           <p:nvPr/>
         </p:nvSpPr>
         <p:spPr>
           <a:xfrm>
-            <a:off x="640080" y="1298448"/>
-            <a:ext cx="3566160" cy="365760"/>
+            <a:off x="457200" y="4032504"/>
+            <a:ext cx="3108960" cy="219456"/>
           </a:xfrm>
           <a:prstGeom prst="rect">
             <a:avLst/>
@@ -6145,53 +7805,14 @@
           <a:ln/>
         </p:spPr>
         <p:txBody>
-          <a:bodyPr wrap="square" lIns="0" tIns="0" rIns="0" bIns="0" rtlCol="0" anchor="ctr"/>
-          <a:lstStyle/>
-          <a:p>
-            <a:pPr indent="0" marL="0">
-              <a:buNone/>
-            </a:pPr>
-            <a:r>
-              <a:rPr lang="en-US" sz="1800" b="1" dirty="0">
-                <a:solidFill>
-                  <a:srgbClr val="F21D3D"/>
-                </a:solidFill>
-                <a:latin typeface="Calibri" pitchFamily="34" charset="0"/>
-                <a:ea typeface="Calibri" pitchFamily="34" charset="-122"/>
-                <a:cs typeface="Calibri" pitchFamily="34" charset="-120"/>
-              </a:rPr>
-              <a:t>Trivy on both images</a:t>
-            </a:r>
-            <a:endParaRPr lang="en-US" sz="1800" dirty="0"/>
-          </a:p>
-        </p:txBody>
-      </p:sp>
-      <p:sp>
-        <p:nvSpPr>
-          <p:cNvPr id="6" name="Text 3"/>
-          <p:cNvSpPr txBox="1"/>
-          <p:nvPr/>
-        </p:nvSpPr>
-        <p:spPr>
-          <a:xfrm>
-            <a:off x="640080" y="1691640"/>
-            <a:ext cx="3566160" cy="960120"/>
-          </a:xfrm>
-          <a:prstGeom prst="rect">
-            <a:avLst/>
-          </a:prstGeom>
-          <a:noFill/>
-          <a:ln/>
-        </p:spPr>
-        <p:txBody>
           <a:bodyPr wrap="square" lIns="0" tIns="0" rIns="0" bIns="0" rtlCol="0" anchor="t"/>
           <a:lstStyle/>
           <a:p>
-            <a:pPr indent="0" marL="0">
-              <a:buNone/>
-            </a:pPr>
-            <a:r>
-              <a:rPr lang="en-US" sz="1400" dirty="0">
+            <a:pPr algn="ctr" indent="0" marL="0">
+              <a:buNone/>
+            </a:pPr>
+            <a:r>
+              <a:rPr lang="en-US" sz="1100" dirty="0">
                 <a:solidFill>
                   <a:srgbClr val="B8BEC7"/>
                 </a:solidFill>
@@ -6199,32 +7820,30 @@
                 <a:ea typeface="Calibri" pitchFamily="34" charset="-122"/>
                 <a:cs typeface="Calibri" pitchFamily="34" charset="-120"/>
               </a:rPr>
-              <a:t>Backend and frontend are scanned before they are pushed. A fixable HIGH or CRITICAL blocks the push.</a:t>
-            </a:r>
-            <a:endParaRPr lang="en-US" sz="1400" dirty="0"/>
-          </a:p>
-        </p:txBody>
-      </p:sp>
-      <p:sp>
-        <p:nvSpPr>
-          <p:cNvPr id="7" name="Shape 4"/>
+              <a:t>docker compose up --build</a:t>
+            </a:r>
+            <a:endParaRPr lang="en-US" sz="1100" dirty="0"/>
+          </a:p>
+        </p:txBody>
+      </p:sp>
+      <p:sp>
+        <p:nvSpPr>
+          <p:cNvPr id="7" name="Shape 3"/>
           <p:cNvSpPr/>
           <p:nvPr/>
         </p:nvSpPr>
         <p:spPr>
           <a:xfrm>
-            <a:off x="4754880" y="1188720"/>
-            <a:ext cx="3931920" cy="1600200"/>
-          </a:xfrm>
-          <a:prstGeom prst="roundRect">
-            <a:avLst>
-              <a:gd name="adj" fmla="val 4571"/>
-            </a:avLst>
+            <a:off x="3767328" y="1115568"/>
+            <a:ext cx="4946904" cy="2364356"/>
+          </a:xfrm>
+          <a:prstGeom prst="rect">
+            <a:avLst/>
           </a:prstGeom>
           <a:solidFill>
             <a:srgbClr val="17191C"/>
           </a:solidFill>
-          <a:ln w="9525">
+          <a:ln w="12700">
             <a:solidFill>
               <a:srgbClr val="292D32"/>
             </a:solidFill>
@@ -6232,16 +7851,40 @@
           </a:ln>
         </p:spPr>
       </p:sp>
-      <p:sp>
-        <p:nvSpPr>
-          <p:cNvPr id="8" name="Text 5"/>
+      <p:pic>
+        <p:nvPicPr>
+          <p:cNvPr id="8" name="Image 1" descr="D:/Resume projects/StudAura/docs/screenshots/ghcr-backend.png">    </p:cNvPr>
+          <p:cNvPicPr>
+            <a:picLocks noChangeAspect="1"/>
+          </p:cNvPicPr>
+          <p:nvPr/>
+        </p:nvPicPr>
+        <p:blipFill>
+          <a:blip r:embed="rId2"/>
+          <a:stretch>
+            <a:fillRect/>
+          </a:stretch>
+        </p:blipFill>
+        <p:spPr>
+          <a:xfrm>
+            <a:off x="3794760" y="1143000"/>
+            <a:ext cx="4892040" cy="2309492"/>
+          </a:xfrm>
+          <a:prstGeom prst="rect">
+            <a:avLst/>
+          </a:prstGeom>
+        </p:spPr>
+      </p:pic>
+      <p:sp>
+        <p:nvSpPr>
+          <p:cNvPr id="9" name="Text 4"/>
           <p:cNvSpPr txBox="1"/>
           <p:nvPr/>
         </p:nvSpPr>
         <p:spPr>
           <a:xfrm>
-            <a:off x="4937760" y="1298448"/>
-            <a:ext cx="3566160" cy="365760"/>
+            <a:off x="3794760" y="3507356"/>
+            <a:ext cx="4892040" cy="219456"/>
           </a:xfrm>
           <a:prstGeom prst="rect">
             <a:avLst/>
@@ -6250,37 +7893,37 @@
           <a:ln/>
         </p:spPr>
         <p:txBody>
-          <a:bodyPr wrap="square" lIns="0" tIns="0" rIns="0" bIns="0" rtlCol="0" anchor="ctr"/>
-          <a:lstStyle/>
-          <a:p>
-            <a:pPr indent="0" marL="0">
-              <a:buNone/>
-            </a:pPr>
-            <a:r>
-              <a:rPr lang="en-US" sz="1800" b="1" dirty="0">
-                <a:solidFill>
-                  <a:srgbClr val="F21D3D"/>
-                </a:solidFill>
-                <a:latin typeface="Calibri" pitchFamily="34" charset="0"/>
-                <a:ea typeface="Calibri" pitchFamily="34" charset="-122"/>
-                <a:cs typeface="Calibri" pitchFamily="34" charset="-120"/>
-              </a:rPr>
-              <a:t>Infrastructure scanned too</a:t>
-            </a:r>
-            <a:endParaRPr lang="en-US" sz="1800" dirty="0"/>
-          </a:p>
-        </p:txBody>
-      </p:sp>
-      <p:sp>
-        <p:nvSpPr>
-          <p:cNvPr id="9" name="Text 6"/>
+          <a:bodyPr wrap="square" lIns="0" tIns="0" rIns="0" bIns="0" rtlCol="0" anchor="t"/>
+          <a:lstStyle/>
+          <a:p>
+            <a:pPr algn="ctr" indent="0" marL="0">
+              <a:buNone/>
+            </a:pPr>
+            <a:r>
+              <a:rPr lang="en-US" sz="1100" dirty="0">
+                <a:solidFill>
+                  <a:srgbClr val="B8BEC7"/>
+                </a:solidFill>
+                <a:latin typeface="Calibri" pitchFamily="34" charset="0"/>
+                <a:ea typeface="Calibri" pitchFamily="34" charset="-122"/>
+                <a:cs typeface="Calibri" pitchFamily="34" charset="-120"/>
+              </a:rPr>
+              <a:t>GHCR: studaura-backend, commit-SHA tags</a:t>
+            </a:r>
+            <a:endParaRPr lang="en-US" sz="1100" dirty="0"/>
+          </a:p>
+        </p:txBody>
+      </p:sp>
+      <p:sp>
+        <p:nvSpPr>
+          <p:cNvPr id="10" name="Text 5"/>
           <p:cNvSpPr txBox="1"/>
           <p:nvPr/>
         </p:nvSpPr>
         <p:spPr>
           <a:xfrm>
-            <a:off x="4937760" y="1691640"/>
-            <a:ext cx="3566160" cy="960120"/>
+            <a:off x="3794760" y="3931920"/>
+            <a:ext cx="4892040" cy="914400"/>
           </a:xfrm>
           <a:prstGeom prst="rect">
             <a:avLst/>
@@ -6292,229 +7935,44 @@
           <a:bodyPr wrap="square" lIns="0" tIns="0" rIns="0" bIns="0" rtlCol="0" anchor="t"/>
           <a:lstStyle/>
           <a:p>
-            <a:pPr indent="0" marL="0">
-              <a:buNone/>
+            <a:pPr marL="342900" indent="-342900">
+              <a:spcAft>
+                <a:spcPts val="600"/>
+              </a:spcAft>
+              <a:buSzPct val="100000"/>
+              <a:buChar char="•"/>
             </a:pPr>
             <a:r>
               <a:rPr lang="en-US" sz="1400" dirty="0">
                 <a:solidFill>
-                  <a:srgbClr val="B8BEC7"/>
-                </a:solidFill>
-                <a:latin typeface="Calibri" pitchFamily="34" charset="0"/>
-                <a:ea typeface="Calibri" pitchFamily="34" charset="-122"/>
-                <a:cs typeface="Calibri" pitchFamily="34" charset="-120"/>
-              </a:rPr>
-              <a:t>Terraform and the rendered Helm manifests get a misconfiguration scan on every PR.</a:t>
-            </a:r>
-            <a:endParaRPr lang="en-US" sz="1400" dirty="0"/>
-          </a:p>
-        </p:txBody>
-      </p:sp>
-      <p:sp>
-        <p:nvSpPr>
-          <p:cNvPr id="10" name="Shape 7"/>
-          <p:cNvSpPr/>
-          <p:nvPr/>
-        </p:nvSpPr>
-        <p:spPr>
-          <a:xfrm>
-            <a:off x="457200" y="3017520"/>
-            <a:ext cx="3931920" cy="1600200"/>
-          </a:xfrm>
-          <a:prstGeom prst="roundRect">
-            <a:avLst>
-              <a:gd name="adj" fmla="val 4571"/>
-            </a:avLst>
-          </a:prstGeom>
-          <a:solidFill>
-            <a:srgbClr val="17191C"/>
-          </a:solidFill>
-          <a:ln w="9525">
-            <a:solidFill>
-              <a:srgbClr val="292D32"/>
-            </a:solidFill>
-            <a:prstDash val="solid"/>
-          </a:ln>
-        </p:spPr>
-      </p:sp>
-      <p:sp>
-        <p:nvSpPr>
-          <p:cNvPr id="11" name="Text 8"/>
-          <p:cNvSpPr txBox="1"/>
-          <p:nvPr/>
-        </p:nvSpPr>
-        <p:spPr>
-          <a:xfrm>
-            <a:off x="640080" y="3127248"/>
-            <a:ext cx="3566160" cy="365760"/>
-          </a:xfrm>
-          <a:prstGeom prst="rect">
-            <a:avLst/>
-          </a:prstGeom>
-          <a:noFill/>
-          <a:ln/>
-        </p:spPr>
-        <p:txBody>
-          <a:bodyPr wrap="square" lIns="0" tIns="0" rIns="0" bIns="0" rtlCol="0" anchor="ctr"/>
-          <a:lstStyle/>
-          <a:p>
-            <a:pPr indent="0" marL="0">
-              <a:buNone/>
-            </a:pPr>
-            <a:r>
-              <a:rPr lang="en-US" sz="1800" b="1" dirty="0">
-                <a:solidFill>
-                  <a:srgbClr val="34D399"/>
-                </a:solidFill>
-                <a:latin typeface="Calibri" pitchFamily="34" charset="0"/>
-                <a:ea typeface="Calibri" pitchFamily="34" charset="-122"/>
-                <a:cs typeface="Calibri" pitchFamily="34" charset="-120"/>
-              </a:rPr>
-              <a:t>Least privilege</a:t>
-            </a:r>
-            <a:endParaRPr lang="en-US" sz="1800" dirty="0"/>
-          </a:p>
-        </p:txBody>
-      </p:sp>
-      <p:sp>
-        <p:nvSpPr>
-          <p:cNvPr id="12" name="Text 9"/>
-          <p:cNvSpPr txBox="1"/>
-          <p:nvPr/>
-        </p:nvSpPr>
-        <p:spPr>
-          <a:xfrm>
-            <a:off x="640080" y="3520440"/>
-            <a:ext cx="3566160" cy="960120"/>
-          </a:xfrm>
-          <a:prstGeom prst="rect">
-            <a:avLst/>
-          </a:prstGeom>
-          <a:noFill/>
-          <a:ln/>
-        </p:spPr>
-        <p:txBody>
-          <a:bodyPr wrap="square" lIns="0" tIns="0" rIns="0" bIns="0" rtlCol="0" anchor="t"/>
-          <a:lstStyle/>
-          <a:p>
-            <a:pPr indent="0" marL="0">
-              <a:buNone/>
+                  <a:srgbClr val="F5F5F5"/>
+                </a:solidFill>
+                <a:latin typeface="Calibri" pitchFamily="34" charset="0"/>
+                <a:ea typeface="Calibri" pitchFamily="34" charset="-122"/>
+                <a:cs typeface="Calibri" pitchFamily="34" charset="-120"/>
+              </a:rPr>
+              <a:t>Multi-stage Dockerfiles, both images run as non-root</a:t>
+            </a:r>
+            <a:endParaRPr lang="en-US" sz="1400" dirty="0"/>
+          </a:p>
+          <a:p>
+            <a:pPr marL="342900" indent="-342900">
+              <a:spcAft>
+                <a:spcPts val="600"/>
+              </a:spcAft>
+              <a:buSzPct val="100000"/>
+              <a:buChar char="•"/>
             </a:pPr>
             <a:r>
               <a:rPr lang="en-US" sz="1400" dirty="0">
                 <a:solidFill>
-                  <a:srgbClr val="B8BEC7"/>
-                </a:solidFill>
-                <a:latin typeface="Calibri" pitchFamily="34" charset="0"/>
-                <a:ea typeface="Calibri" pitchFamily="34" charset="-122"/>
-                <a:cs typeface="Calibri" pitchFamily="34" charset="-120"/>
-              </a:rPr>
-              <a:t>Non-root containers, read-only root filesystem, dropped capabilities, namespace-scoped RBAC.</a:t>
-            </a:r>
-            <a:endParaRPr lang="en-US" sz="1400" dirty="0"/>
-          </a:p>
-        </p:txBody>
-      </p:sp>
-      <p:sp>
-        <p:nvSpPr>
-          <p:cNvPr id="13" name="Shape 10"/>
-          <p:cNvSpPr/>
-          <p:nvPr/>
-        </p:nvSpPr>
-        <p:spPr>
-          <a:xfrm>
-            <a:off x="4754880" y="3017520"/>
-            <a:ext cx="3931920" cy="1600200"/>
-          </a:xfrm>
-          <a:prstGeom prst="roundRect">
-            <a:avLst>
-              <a:gd name="adj" fmla="val 4571"/>
-            </a:avLst>
-          </a:prstGeom>
-          <a:solidFill>
-            <a:srgbClr val="17191C"/>
-          </a:solidFill>
-          <a:ln w="9525">
-            <a:solidFill>
-              <a:srgbClr val="292D32"/>
-            </a:solidFill>
-            <a:prstDash val="solid"/>
-          </a:ln>
-        </p:spPr>
-      </p:sp>
-      <p:sp>
-        <p:nvSpPr>
-          <p:cNvPr id="14" name="Text 11"/>
-          <p:cNvSpPr txBox="1"/>
-          <p:nvPr/>
-        </p:nvSpPr>
-        <p:spPr>
-          <a:xfrm>
-            <a:off x="4937760" y="3127248"/>
-            <a:ext cx="3566160" cy="365760"/>
-          </a:xfrm>
-          <a:prstGeom prst="rect">
-            <a:avLst/>
-          </a:prstGeom>
-          <a:noFill/>
-          <a:ln/>
-        </p:spPr>
-        <p:txBody>
-          <a:bodyPr wrap="square" lIns="0" tIns="0" rIns="0" bIns="0" rtlCol="0" anchor="ctr"/>
-          <a:lstStyle/>
-          <a:p>
-            <a:pPr indent="0" marL="0">
-              <a:buNone/>
-            </a:pPr>
-            <a:r>
-              <a:rPr lang="en-US" sz="1800" b="1" dirty="0">
-                <a:solidFill>
-                  <a:srgbClr val="34D399"/>
-                </a:solidFill>
-                <a:latin typeface="Calibri" pitchFamily="34" charset="0"/>
-                <a:ea typeface="Calibri" pitchFamily="34" charset="-122"/>
-                <a:cs typeface="Calibri" pitchFamily="34" charset="-120"/>
-              </a:rPr>
-              <a:t>No secrets in Git</a:t>
-            </a:r>
-            <a:endParaRPr lang="en-US" sz="1800" dirty="0"/>
-          </a:p>
-        </p:txBody>
-      </p:sp>
-      <p:sp>
-        <p:nvSpPr>
-          <p:cNvPr id="15" name="Text 12"/>
-          <p:cNvSpPr txBox="1"/>
-          <p:nvPr/>
-        </p:nvSpPr>
-        <p:spPr>
-          <a:xfrm>
-            <a:off x="4937760" y="3520440"/>
-            <a:ext cx="3566160" cy="960120"/>
-          </a:xfrm>
-          <a:prstGeom prst="rect">
-            <a:avLst/>
-          </a:prstGeom>
-          <a:noFill/>
-          <a:ln/>
-        </p:spPr>
-        <p:txBody>
-          <a:bodyPr wrap="square" lIns="0" tIns="0" rIns="0" bIns="0" rtlCol="0" anchor="t"/>
-          <a:lstStyle/>
-          <a:p>
-            <a:pPr indent="0" marL="0">
-              <a:buNone/>
-            </a:pPr>
-            <a:r>
-              <a:rPr lang="en-US" sz="1400" dirty="0">
-                <a:solidFill>
-                  <a:srgbClr val="B8BEC7"/>
-                </a:solidFill>
-                <a:latin typeface="Calibri" pitchFamily="34" charset="0"/>
-                <a:ea typeface="Calibri" pitchFamily="34" charset="-122"/>
-                <a:cs typeface="Calibri" pitchFamily="34" charset="-120"/>
-              </a:rPr>
-              <a:t>Runtime secrets live in the cluster; actions are pinned to commit SHAs; history is scanned clean.</a:t>
+                  <a:srgbClr val="F5F5F5"/>
+                </a:solidFill>
+                <a:latin typeface="Calibri" pitchFamily="34" charset="0"/>
+                <a:ea typeface="Calibri" pitchFamily="34" charset="-122"/>
+                <a:cs typeface="Calibri" pitchFamily="34" charset="-120"/>
+              </a:rPr>
+              <a:t>Tags are commit SHAs; no latest tag is published</a:t>
             </a:r>
             <a:endParaRPr lang="en-US" sz="1400" dirty="0"/>
           </a:p>
@@ -6585,7 +8043,7 @@
                 <a:ea typeface="Calibri" pitchFamily="34" charset="-122"/>
                 <a:cs typeface="Calibri" pitchFamily="34" charset="-120"/>
               </a:rPr>
-              <a:t>Infrastructure as code: Terraform</a:t>
+              <a:t>DevSecOps with Trivy</a:t>
             </a:r>
             <a:endParaRPr lang="en-US" sz="3400" dirty="0"/>
           </a:p>
@@ -6600,7 +8058,7 @@
         <p:spPr>
           <a:xfrm>
             <a:off x="457200" y="1188720"/>
-            <a:ext cx="4937760" cy="3566160"/>
+            <a:ext cx="3383280" cy="3657600"/>
           </a:xfrm>
           <a:prstGeom prst="rect">
             <a:avLst/>
@@ -6620,7 +8078,7 @@
               <a:buChar char="•"/>
             </a:pPr>
             <a:r>
-              <a:rPr lang="en-US" sz="1600" dirty="0">
+              <a:rPr lang="en-US" sz="1400" dirty="0">
                 <a:solidFill>
                   <a:srgbClr val="F5F5F5"/>
                 </a:solidFill>
@@ -6628,9 +8086,9 @@
                 <a:ea typeface="Calibri" pitchFamily="34" charset="-122"/>
                 <a:cs typeface="Calibri" pitchFamily="34" charset="-120"/>
               </a:rPr>
-              <a:t>VPC with two public and two private subnets across two zones</a:t>
-            </a:r>
-            <a:endParaRPr lang="en-US" sz="1600" dirty="0"/>
+              <a:t>Both images are scanned before they are pushed</a:t>
+            </a:r>
+            <a:endParaRPr lang="en-US" sz="1400" dirty="0"/>
           </a:p>
           <a:p>
             <a:pPr marL="342900" indent="-342900">
@@ -6641,7 +8099,7 @@
               <a:buChar char="•"/>
             </a:pPr>
             <a:r>
-              <a:rPr lang="en-US" sz="1600" dirty="0">
+              <a:rPr lang="en-US" sz="1400" dirty="0">
                 <a:solidFill>
                   <a:srgbClr val="F5F5F5"/>
                 </a:solidFill>
@@ -6649,9 +8107,9 @@
                 <a:ea typeface="Calibri" pitchFamily="34" charset="-122"/>
                 <a:cs typeface="Calibri" pitchFamily="34" charset="-120"/>
               </a:rPr>
-              <a:t>Internet gateway and a NAT gateway for private nodes</a:t>
-            </a:r>
-            <a:endParaRPr lang="en-US" sz="1600" dirty="0"/>
+              <a:t>A fixable HIGH or CRITICAL blocks the publish</a:t>
+            </a:r>
+            <a:endParaRPr lang="en-US" sz="1400" dirty="0"/>
           </a:p>
           <a:p>
             <a:pPr marL="342900" indent="-342900">
@@ -6662,7 +8120,7 @@
               <a:buChar char="•"/>
             </a:pPr>
             <a:r>
-              <a:rPr lang="en-US" sz="1600" dirty="0">
+              <a:rPr lang="en-US" sz="1400" dirty="0">
                 <a:solidFill>
                   <a:srgbClr val="F5F5F5"/>
                 </a:solidFill>
@@ -6670,9 +8128,9 @@
                 <a:ea typeface="Calibri" pitchFamily="34" charset="-122"/>
                 <a:cs typeface="Calibri" pitchFamily="34" charset="-120"/>
               </a:rPr>
-              <a:t>EKS cluster with a managed node group (2 x c7i-flex.large)</a:t>
-            </a:r>
-            <a:endParaRPr lang="en-US" sz="1600" dirty="0"/>
+              <a:t>Terraform and rendered Helm manifests are scanned on every PR</a:t>
+            </a:r>
+            <a:endParaRPr lang="en-US" sz="1400" dirty="0"/>
           </a:p>
           <a:p>
             <a:pPr marL="342900" indent="-342900">
@@ -6683,7 +8141,7 @@
               <a:buChar char="•"/>
             </a:pPr>
             <a:r>
-              <a:rPr lang="en-US" sz="1600" dirty="0">
+              <a:rPr lang="en-US" sz="1400" dirty="0">
                 <a:solidFill>
                   <a:srgbClr val="F5F5F5"/>
                 </a:solidFill>
@@ -6691,9 +8149,9 @@
                 <a:ea typeface="Calibri" pitchFamily="34" charset="-122"/>
                 <a:cs typeface="Calibri" pitchFamily="34" charset="-120"/>
               </a:rPr>
-              <a:t>IAM roles for the cluster, the nodes and GitHub OIDC</a:t>
-            </a:r>
-            <a:endParaRPr lang="en-US" sz="1600" dirty="0"/>
+              <a:t>Non-root, read-only filesystem, dropped capabilities</a:t>
+            </a:r>
+            <a:endParaRPr lang="en-US" sz="1400" dirty="0"/>
           </a:p>
           <a:p>
             <a:pPr marL="342900" indent="-342900">
@@ -6704,7 +8162,7 @@
               <a:buChar char="•"/>
             </a:pPr>
             <a:r>
-              <a:rPr lang="en-US" sz="1600" dirty="0">
+              <a:rPr lang="en-US" sz="1400" dirty="0">
                 <a:solidFill>
                   <a:srgbClr val="F5F5F5"/>
                 </a:solidFill>
@@ -6712,30 +8170,9 @@
                 <a:ea typeface="Calibri" pitchFamily="34" charset="-122"/>
                 <a:cs typeface="Calibri" pitchFamily="34" charset="-120"/>
               </a:rPr>
-              <a:t>terraform.tfvars.example documents every setting; no credentials in Git</a:t>
-            </a:r>
-            <a:endParaRPr lang="en-US" sz="1600" dirty="0"/>
-          </a:p>
-          <a:p>
-            <a:pPr marL="342900" indent="-342900">
-              <a:spcAft>
-                <a:spcPts val="600"/>
-              </a:spcAft>
-              <a:buSzPct val="100000"/>
-              <a:buChar char="•"/>
-            </a:pPr>
-            <a:r>
-              <a:rPr lang="en-US" sz="1600" dirty="0">
-                <a:solidFill>
-                  <a:srgbClr val="F5F5F5"/>
-                </a:solidFill>
-                <a:latin typeface="Calibri" pitchFamily="34" charset="0"/>
-                <a:ea typeface="Calibri" pitchFamily="34" charset="-122"/>
-                <a:cs typeface="Calibri" pitchFamily="34" charset="-120"/>
-              </a:rPr>
-              <a:t>Plan tests run in CI with a mocked AWS provider</a:t>
-            </a:r>
-            <a:endParaRPr lang="en-US" sz="1600" dirty="0"/>
+              <a:t>No secrets in Git; actions pinned to commit SHAs</a:t>
+            </a:r>
+            <a:endParaRPr lang="en-US" sz="1400" dirty="0"/>
           </a:p>
         </p:txBody>
       </p:sp>
@@ -6747,18 +8184,16 @@
         </p:nvSpPr>
         <p:spPr>
           <a:xfrm>
-            <a:off x="5760720" y="1325880"/>
-            <a:ext cx="2926080" cy="3108960"/>
-          </a:xfrm>
-          <a:prstGeom prst="roundRect">
-            <a:avLst>
-              <a:gd name="adj" fmla="val 2500"/>
-            </a:avLst>
+            <a:off x="4021315" y="1115568"/>
+            <a:ext cx="4667531" cy="2706624"/>
+          </a:xfrm>
+          <a:prstGeom prst="rect">
+            <a:avLst/>
           </a:prstGeom>
           <a:solidFill>
             <a:srgbClr val="17191C"/>
           </a:solidFill>
-          <a:ln w="9525">
+          <a:ln w="12700">
             <a:solidFill>
               <a:srgbClr val="292D32"/>
             </a:solidFill>
@@ -6766,16 +8201,40 @@
           </a:ln>
         </p:spPr>
       </p:sp>
-      <p:sp>
-        <p:nvSpPr>
-          <p:cNvPr id="6" name="Text 3"/>
+      <p:pic>
+        <p:nvPicPr>
+          <p:cNvPr id="6" name="Image 0" descr="D:/Resume projects/StudAura/docs/screenshots/trivy-report-backend.png">    </p:cNvPr>
+          <p:cNvPicPr>
+            <a:picLocks noChangeAspect="1"/>
+          </p:cNvPicPr>
+          <p:nvPr/>
+        </p:nvPicPr>
+        <p:blipFill>
+          <a:blip r:embed="rId1"/>
+          <a:stretch>
+            <a:fillRect/>
+          </a:stretch>
+        </p:blipFill>
+        <p:spPr>
+          <a:xfrm>
+            <a:off x="4048747" y="1143000"/>
+            <a:ext cx="4612667" cy="2651760"/>
+          </a:xfrm>
+          <a:prstGeom prst="rect">
+            <a:avLst/>
+          </a:prstGeom>
+        </p:spPr>
+      </p:pic>
+      <p:sp>
+        <p:nvSpPr>
+          <p:cNvPr id="7" name="Text 3"/>
           <p:cNvSpPr txBox="1"/>
           <p:nvPr/>
         </p:nvSpPr>
         <p:spPr>
           <a:xfrm>
-            <a:off x="5760720" y="1554480"/>
-            <a:ext cx="2926080" cy="1097280"/>
+            <a:off x="4023360" y="3849624"/>
+            <a:ext cx="4663440" cy="219456"/>
           </a:xfrm>
           <a:prstGeom prst="rect">
             <a:avLst/>
@@ -6784,37 +8243,37 @@
           <a:ln/>
         </p:spPr>
         <p:txBody>
-          <a:bodyPr wrap="square" lIns="0" tIns="0" rIns="0" bIns="0" rtlCol="0" anchor="ctr"/>
+          <a:bodyPr wrap="square" lIns="0" tIns="0" rIns="0" bIns="0" rtlCol="0" anchor="t"/>
           <a:lstStyle/>
           <a:p>
             <a:pPr algn="ctr" indent="0" marL="0">
               <a:buNone/>
             </a:pPr>
             <a:r>
-              <a:rPr lang="en-US" sz="7200" b="1" dirty="0">
-                <a:solidFill>
-                  <a:srgbClr val="F21D3D"/>
-                </a:solidFill>
-                <a:latin typeface="Calibri" pitchFamily="34" charset="0"/>
-                <a:ea typeface="Calibri" pitchFamily="34" charset="-122"/>
-                <a:cs typeface="Calibri" pitchFamily="34" charset="-120"/>
-              </a:rPr>
-              <a:t>41</a:t>
-            </a:r>
-            <a:endParaRPr lang="en-US" sz="7200" dirty="0"/>
-          </a:p>
-        </p:txBody>
-      </p:sp>
-      <p:sp>
-        <p:nvSpPr>
-          <p:cNvPr id="7" name="Text 4"/>
+              <a:rPr lang="en-US" sz="1100" dirty="0">
+                <a:solidFill>
+                  <a:srgbClr val="B8BEC7"/>
+                </a:solidFill>
+                <a:latin typeface="Calibri" pitchFamily="34" charset="0"/>
+                <a:ea typeface="Calibri" pitchFamily="34" charset="-122"/>
+                <a:cs typeface="Calibri" pitchFamily="34" charset="-120"/>
+              </a:rPr>
+              <a:t>Backend image: 0 vulnerabilities</a:t>
+            </a:r>
+            <a:endParaRPr lang="en-US" sz="1100" dirty="0"/>
+          </a:p>
+        </p:txBody>
+      </p:sp>
+      <p:sp>
+        <p:nvSpPr>
+          <p:cNvPr id="8" name="Text 4"/>
           <p:cNvSpPr txBox="1"/>
           <p:nvPr/>
         </p:nvSpPr>
         <p:spPr>
           <a:xfrm>
-            <a:off x="5760720" y="2697480"/>
-            <a:ext cx="2926080" cy="365760"/>
+            <a:off x="4023360" y="4206240"/>
+            <a:ext cx="4663440" cy="640080"/>
           </a:xfrm>
           <a:prstGeom prst="rect">
             <a:avLst/>
@@ -6823,49 +8282,10 @@
           <a:ln/>
         </p:spPr>
         <p:txBody>
-          <a:bodyPr wrap="square" lIns="0" tIns="0" rIns="0" bIns="0" rtlCol="0" anchor="ctr"/>
-          <a:lstStyle/>
-          <a:p>
-            <a:pPr algn="ctr" indent="0" marL="0">
-              <a:buNone/>
-            </a:pPr>
-            <a:r>
-              <a:rPr lang="en-US" sz="1600" dirty="0">
-                <a:solidFill>
-                  <a:srgbClr val="F5F5F5"/>
-                </a:solidFill>
-                <a:latin typeface="Calibri" pitchFamily="34" charset="0"/>
-                <a:ea typeface="Calibri" pitchFamily="34" charset="-122"/>
-                <a:cs typeface="Calibri" pitchFamily="34" charset="-120"/>
-              </a:rPr>
-              <a:t>resources in one plan</a:t>
-            </a:r>
-            <a:endParaRPr lang="en-US" sz="1600" dirty="0"/>
-          </a:p>
-        </p:txBody>
-      </p:sp>
-      <p:sp>
-        <p:nvSpPr>
-          <p:cNvPr id="8" name="Text 5"/>
-          <p:cNvSpPr txBox="1"/>
-          <p:nvPr/>
-        </p:nvSpPr>
-        <p:spPr>
-          <a:xfrm>
-            <a:off x="5943600" y="3291840"/>
-            <a:ext cx="2560320" cy="822960"/>
-          </a:xfrm>
-          <a:prstGeom prst="rect">
-            <a:avLst/>
-          </a:prstGeom>
-          <a:noFill/>
-          <a:ln/>
-        </p:spPr>
-        <p:txBody>
-          <a:bodyPr wrap="square" lIns="0" tIns="0" rIns="0" bIns="0" rtlCol="0" anchor="ctr"/>
-          <a:lstStyle/>
-          <a:p>
-            <a:pPr algn="ctr" indent="0" marL="0">
+          <a:bodyPr wrap="square" lIns="0" tIns="0" rIns="0" bIns="0" rtlCol="0" anchor="t"/>
+          <a:lstStyle/>
+          <a:p>
+            <a:pPr indent="0" marL="0">
               <a:buNone/>
             </a:pPr>
             <a:r>
@@ -6877,7 +8297,7 @@
                 <a:ea typeface="Calibri" pitchFamily="34" charset="-122"/>
                 <a:cs typeface="Calibri" pitchFamily="34" charset="-120"/>
               </a:rPr>
-              <a:t>init, plan, apply and destroy are all run from the CLI</a:t>
+              <a:t>The first run of the HIGH gate caught two Starlette CVEs; upgrading cleared them.</a:t>
             </a:r>
             <a:endParaRPr lang="en-US" sz="1400" dirty="0"/>
           </a:p>
@@ -6948,7 +8368,7 @@
                 <a:ea typeface="Calibri" pitchFamily="34" charset="-122"/>
                 <a:cs typeface="Calibri" pitchFamily="34" charset="-120"/>
               </a:rPr>
-              <a:t>Kubernetes and Helm</a:t>
+              <a:t>Terraform: VPC and EKS as code</a:t>
             </a:r>
             <a:endParaRPr lang="en-US" sz="3400" dirty="0"/>
           </a:p>
@@ -6956,18 +8376,303 @@
       </p:sp>
       <p:sp>
         <p:nvSpPr>
-          <p:cNvPr id="4" name="Shape 1"/>
+          <p:cNvPr id="4" name="Text 1"/>
+          <p:cNvSpPr txBox="1"/>
+          <p:nvPr/>
+        </p:nvSpPr>
+        <p:spPr>
+          <a:xfrm>
+            <a:off x="457200" y="1188720"/>
+            <a:ext cx="3383280" cy="3657600"/>
+          </a:xfrm>
+          <a:prstGeom prst="rect">
+            <a:avLst/>
+          </a:prstGeom>
+          <a:noFill/>
+          <a:ln/>
+        </p:spPr>
+        <p:txBody>
+          <a:bodyPr wrap="square" lIns="0" tIns="0" rIns="0" bIns="0" rtlCol="0" anchor="t"/>
+          <a:lstStyle/>
+          <a:p>
+            <a:pPr marL="342900" indent="-342900">
+              <a:spcAft>
+                <a:spcPts val="600"/>
+              </a:spcAft>
+              <a:buSzPct val="100000"/>
+              <a:buChar char="•"/>
+            </a:pPr>
+            <a:r>
+              <a:rPr lang="en-US" sz="1400" dirty="0">
+                <a:solidFill>
+                  <a:srgbClr val="F5F5F5"/>
+                </a:solidFill>
+                <a:latin typeface="Calibri" pitchFamily="34" charset="0"/>
+                <a:ea typeface="Calibri" pitchFamily="34" charset="-122"/>
+                <a:cs typeface="Calibri" pitchFamily="34" charset="-120"/>
+              </a:rPr>
+              <a:t>VPC with 2 public and 2 private subnets in 2 zones</a:t>
+            </a:r>
+            <a:endParaRPr lang="en-US" sz="1400" dirty="0"/>
+          </a:p>
+          <a:p>
+            <a:pPr marL="342900" indent="-342900">
+              <a:spcAft>
+                <a:spcPts val="600"/>
+              </a:spcAft>
+              <a:buSzPct val="100000"/>
+              <a:buChar char="•"/>
+            </a:pPr>
+            <a:r>
+              <a:rPr lang="en-US" sz="1400" dirty="0">
+                <a:solidFill>
+                  <a:srgbClr val="F5F5F5"/>
+                </a:solidFill>
+                <a:latin typeface="Calibri" pitchFamily="34" charset="0"/>
+                <a:ea typeface="Calibri" pitchFamily="34" charset="-122"/>
+                <a:cs typeface="Calibri" pitchFamily="34" charset="-120"/>
+              </a:rPr>
+              <a:t>Internet gateway and a NAT gateway for the nodes</a:t>
+            </a:r>
+            <a:endParaRPr lang="en-US" sz="1400" dirty="0"/>
+          </a:p>
+          <a:p>
+            <a:pPr marL="342900" indent="-342900">
+              <a:spcAft>
+                <a:spcPts val="600"/>
+              </a:spcAft>
+              <a:buSzPct val="100000"/>
+              <a:buChar char="•"/>
+            </a:pPr>
+            <a:r>
+              <a:rPr lang="en-US" sz="1400" dirty="0">
+                <a:solidFill>
+                  <a:srgbClr val="F5F5F5"/>
+                </a:solidFill>
+                <a:latin typeface="Calibri" pitchFamily="34" charset="0"/>
+                <a:ea typeface="Calibri" pitchFamily="34" charset="-122"/>
+                <a:cs typeface="Calibri" pitchFamily="34" charset="-120"/>
+              </a:rPr>
+              <a:t>EKS cluster and a managed node group</a:t>
+            </a:r>
+            <a:endParaRPr lang="en-US" sz="1400" dirty="0"/>
+          </a:p>
+          <a:p>
+            <a:pPr marL="342900" indent="-342900">
+              <a:spcAft>
+                <a:spcPts val="600"/>
+              </a:spcAft>
+              <a:buSzPct val="100000"/>
+              <a:buChar char="•"/>
+            </a:pPr>
+            <a:r>
+              <a:rPr lang="en-US" sz="1400" dirty="0">
+                <a:solidFill>
+                  <a:srgbClr val="F5F5F5"/>
+                </a:solidFill>
+                <a:latin typeface="Calibri" pitchFamily="34" charset="0"/>
+                <a:ea typeface="Calibri" pitchFamily="34" charset="-122"/>
+                <a:cs typeface="Calibri" pitchFamily="34" charset="-120"/>
+              </a:rPr>
+              <a:t>IAM roles, KMS key, add-ons</a:t>
+            </a:r>
+            <a:endParaRPr lang="en-US" sz="1400" dirty="0"/>
+          </a:p>
+          <a:p>
+            <a:pPr marL="342900" indent="-342900">
+              <a:spcAft>
+                <a:spcPts val="600"/>
+              </a:spcAft>
+              <a:buSzPct val="100000"/>
+              <a:buChar char="•"/>
+            </a:pPr>
+            <a:r>
+              <a:rPr lang="en-US" sz="1400" dirty="0">
+                <a:solidFill>
+                  <a:srgbClr val="F5F5F5"/>
+                </a:solidFill>
+                <a:latin typeface="Calibri" pitchFamily="34" charset="0"/>
+                <a:ea typeface="Calibri" pitchFamily="34" charset="-122"/>
+                <a:cs typeface="Calibri" pitchFamily="34" charset="-120"/>
+              </a:rPr>
+              <a:t>terraform.tfvars.example, no credentials in Git</a:t>
+            </a:r>
+            <a:endParaRPr lang="en-US" sz="1400" dirty="0"/>
+          </a:p>
+          <a:p>
+            <a:pPr marL="342900" indent="-342900">
+              <a:spcAft>
+                <a:spcPts val="600"/>
+              </a:spcAft>
+              <a:buSzPct val="100000"/>
+              <a:buChar char="•"/>
+            </a:pPr>
+            <a:r>
+              <a:rPr lang="en-US" sz="1400" dirty="0">
+                <a:solidFill>
+                  <a:srgbClr val="F5F5F5"/>
+                </a:solidFill>
+                <a:latin typeface="Calibri" pitchFamily="34" charset="0"/>
+                <a:ea typeface="Calibri" pitchFamily="34" charset="-122"/>
+                <a:cs typeface="Calibri" pitchFamily="34" charset="-120"/>
+              </a:rPr>
+              <a:t>Plan tests run in CI</a:t>
+            </a:r>
+            <a:endParaRPr lang="en-US" sz="1400" dirty="0"/>
+          </a:p>
+        </p:txBody>
+      </p:sp>
+      <p:sp>
+        <p:nvSpPr>
+          <p:cNvPr id="5" name="Shape 2"/>
           <p:cNvSpPr/>
           <p:nvPr/>
         </p:nvSpPr>
         <p:spPr>
           <a:xfrm>
-            <a:off x="457200" y="1188720"/>
-            <a:ext cx="3931920" cy="1600200"/>
+            <a:off x="4034604" y="1115568"/>
+            <a:ext cx="4640952" cy="2112264"/>
+          </a:xfrm>
+          <a:prstGeom prst="rect">
+            <a:avLst/>
+          </a:prstGeom>
+          <a:solidFill>
+            <a:srgbClr val="17191C"/>
+          </a:solidFill>
+          <a:ln w="12700">
+            <a:solidFill>
+              <a:srgbClr val="292D32"/>
+            </a:solidFill>
+            <a:prstDash val="solid"/>
+          </a:ln>
+        </p:spPr>
+      </p:sp>
+      <p:pic>
+        <p:nvPicPr>
+          <p:cNvPr id="6" name="Image 0" descr="D:/Resume projects/StudAura/docs/screenshots/aws-vpc.png">    </p:cNvPr>
+          <p:cNvPicPr>
+            <a:picLocks noChangeAspect="1"/>
+          </p:cNvPicPr>
+          <p:nvPr/>
+        </p:nvPicPr>
+        <p:blipFill>
+          <a:blip r:embed="rId1"/>
+          <a:stretch>
+            <a:fillRect/>
+          </a:stretch>
+        </p:blipFill>
+        <p:spPr>
+          <a:xfrm>
+            <a:off x="4062036" y="1143000"/>
+            <a:ext cx="4586088" cy="2057400"/>
+          </a:xfrm>
+          <a:prstGeom prst="rect">
+            <a:avLst/>
+          </a:prstGeom>
+        </p:spPr>
+      </p:pic>
+      <p:sp>
+        <p:nvSpPr>
+          <p:cNvPr id="7" name="Text 3"/>
+          <p:cNvSpPr txBox="1"/>
+          <p:nvPr/>
+        </p:nvSpPr>
+        <p:spPr>
+          <a:xfrm>
+            <a:off x="4023360" y="3255264"/>
+            <a:ext cx="4663440" cy="219456"/>
+          </a:xfrm>
+          <a:prstGeom prst="rect">
+            <a:avLst/>
+          </a:prstGeom>
+          <a:noFill/>
+          <a:ln/>
+        </p:spPr>
+        <p:txBody>
+          <a:bodyPr wrap="square" lIns="0" tIns="0" rIns="0" bIns="0" rtlCol="0" anchor="t"/>
+          <a:lstStyle/>
+          <a:p>
+            <a:pPr algn="ctr" indent="0" marL="0">
+              <a:buNone/>
+            </a:pPr>
+            <a:r>
+              <a:rPr lang="en-US" sz="1100" dirty="0">
+                <a:solidFill>
+                  <a:srgbClr val="B8BEC7"/>
+                </a:solidFill>
+                <a:latin typeface="Calibri" pitchFamily="34" charset="0"/>
+                <a:ea typeface="Calibri" pitchFamily="34" charset="-122"/>
+                <a:cs typeface="Calibri" pitchFamily="34" charset="-120"/>
+              </a:rPr>
+              <a:t>AWS console: VPC resource map, Sydney</a:t>
+            </a:r>
+            <a:endParaRPr lang="en-US" sz="1100" dirty="0"/>
+          </a:p>
+        </p:txBody>
+      </p:sp>
+      <p:sp>
+        <p:nvSpPr>
+          <p:cNvPr id="8" name="Shape 4"/>
+          <p:cNvSpPr/>
+          <p:nvPr/>
+        </p:nvSpPr>
+        <p:spPr>
+          <a:xfrm>
+            <a:off x="3995928" y="3538728"/>
+            <a:ext cx="1883664" cy="1378452"/>
+          </a:xfrm>
+          <a:prstGeom prst="rect">
+            <a:avLst/>
+          </a:prstGeom>
+          <a:solidFill>
+            <a:srgbClr val="17191C"/>
+          </a:solidFill>
+          <a:ln w="12700">
+            <a:solidFill>
+              <a:srgbClr val="292D32"/>
+            </a:solidFill>
+            <a:prstDash val="solid"/>
+          </a:ln>
+        </p:spPr>
+      </p:sp>
+      <p:pic>
+        <p:nvPicPr>
+          <p:cNvPr id="9" name="Image 1" descr="D:/Resume projects/StudAura/docs/screenshots/terraform-plan.png">    </p:cNvPr>
+          <p:cNvPicPr>
+            <a:picLocks noChangeAspect="1"/>
+          </p:cNvPicPr>
+          <p:nvPr/>
+        </p:nvPicPr>
+        <p:blipFill>
+          <a:blip r:embed="rId2"/>
+          <a:stretch>
+            <a:fillRect/>
+          </a:stretch>
+        </p:blipFill>
+        <p:spPr>
+          <a:xfrm>
+            <a:off x="4023360" y="3566160"/>
+            <a:ext cx="1828800" cy="1323588"/>
+          </a:xfrm>
+          <a:prstGeom prst="rect">
+            <a:avLst/>
+          </a:prstGeom>
+        </p:spPr>
+      </p:pic>
+      <p:sp>
+        <p:nvSpPr>
+          <p:cNvPr id="10" name="Shape 5"/>
+          <p:cNvSpPr/>
+          <p:nvPr/>
+        </p:nvSpPr>
+        <p:spPr>
+          <a:xfrm>
+            <a:off x="6035040" y="3566160"/>
+            <a:ext cx="2651760" cy="1280160"/>
           </a:xfrm>
           <a:prstGeom prst="roundRect">
             <a:avLst>
-              <a:gd name="adj" fmla="val 4571"/>
+              <a:gd name="adj" fmla="val 5714"/>
             </a:avLst>
           </a:prstGeom>
           <a:solidFill>
@@ -6983,14 +8688,14 @@
       </p:sp>
       <p:sp>
         <p:nvSpPr>
-          <p:cNvPr id="5" name="Text 2"/>
+          <p:cNvPr id="11" name="Text 6"/>
           <p:cNvSpPr txBox="1"/>
           <p:nvPr/>
         </p:nvSpPr>
         <p:spPr>
           <a:xfrm>
-            <a:off x="640080" y="1298448"/>
-            <a:ext cx="3566160" cy="365760"/>
+            <a:off x="6035040" y="3639312"/>
+            <a:ext cx="2651760" cy="704088"/>
           </a:xfrm>
           <a:prstGeom prst="rect">
             <a:avLst/>
@@ -7002,34 +8707,34 @@
           <a:bodyPr wrap="square" lIns="0" tIns="0" rIns="0" bIns="0" rtlCol="0" anchor="ctr"/>
           <a:lstStyle/>
           <a:p>
-            <a:pPr indent="0" marL="0">
-              <a:buNone/>
-            </a:pPr>
-            <a:r>
-              <a:rPr lang="en-US" sz="1800" b="1" dirty="0">
-                <a:solidFill>
-                  <a:srgbClr val="60A5FA"/>
-                </a:solidFill>
-                <a:latin typeface="Calibri" pitchFamily="34" charset="0"/>
-                <a:ea typeface="Calibri" pitchFamily="34" charset="-122"/>
-                <a:cs typeface="Calibri" pitchFamily="34" charset="-120"/>
-              </a:rPr>
-              <a:t>Workloads</a:t>
-            </a:r>
-            <a:endParaRPr lang="en-US" sz="1800" dirty="0"/>
-          </a:p>
-        </p:txBody>
-      </p:sp>
-      <p:sp>
-        <p:nvSpPr>
-          <p:cNvPr id="6" name="Text 3"/>
+            <a:pPr algn="ctr" indent="0" marL="0">
+              <a:buNone/>
+            </a:pPr>
+            <a:r>
+              <a:rPr lang="en-US" sz="4000" b="1" dirty="0">
+                <a:solidFill>
+                  <a:srgbClr val="F21D3D"/>
+                </a:solidFill>
+                <a:latin typeface="Calibri" pitchFamily="34" charset="0"/>
+                <a:ea typeface="Calibri" pitchFamily="34" charset="-122"/>
+                <a:cs typeface="Calibri" pitchFamily="34" charset="-120"/>
+              </a:rPr>
+              <a:t>35</a:t>
+            </a:r>
+            <a:endParaRPr lang="en-US" sz="4000" dirty="0"/>
+          </a:p>
+        </p:txBody>
+      </p:sp>
+      <p:sp>
+        <p:nvSpPr>
+          <p:cNvPr id="12" name="Text 7"/>
           <p:cNvSpPr txBox="1"/>
           <p:nvPr/>
         </p:nvSpPr>
         <p:spPr>
           <a:xfrm>
-            <a:off x="640080" y="1691640"/>
-            <a:ext cx="3566160" cy="960120"/>
+            <a:off x="6126480" y="4359859"/>
+            <a:ext cx="2468880" cy="422453"/>
           </a:xfrm>
           <a:prstGeom prst="rect">
             <a:avLst/>
@@ -7041,11 +8746,11 @@
           <a:bodyPr wrap="square" lIns="0" tIns="0" rIns="0" bIns="0" rtlCol="0" anchor="t"/>
           <a:lstStyle/>
           <a:p>
-            <a:pPr indent="0" marL="0">
-              <a:buNone/>
-            </a:pPr>
-            <a:r>
-              <a:rPr lang="en-US" sz="1400" dirty="0">
+            <a:pPr algn="ctr" indent="0" marL="0">
+              <a:buNone/>
+            </a:pPr>
+            <a:r>
+              <a:rPr lang="en-US" sz="1200" dirty="0">
                 <a:solidFill>
                   <a:srgbClr val="B8BEC7"/>
                 </a:solidFill>
@@ -7053,324 +8758,9 @@
                 <a:ea typeface="Calibri" pitchFamily="34" charset="-122"/>
                 <a:cs typeface="Calibri" pitchFamily="34" charset="-120"/>
               </a:rPr>
-              <a:t>Backend and frontend: 2 replicas each, CPU autoscaling up to 4, spread across nodes.</a:t>
-            </a:r>
-            <a:endParaRPr lang="en-US" sz="1400" dirty="0"/>
-          </a:p>
-        </p:txBody>
-      </p:sp>
-      <p:sp>
-        <p:nvSpPr>
-          <p:cNvPr id="7" name="Shape 4"/>
-          <p:cNvSpPr/>
-          <p:nvPr/>
-        </p:nvSpPr>
-        <p:spPr>
-          <a:xfrm>
-            <a:off x="4754880" y="1188720"/>
-            <a:ext cx="3931920" cy="1600200"/>
-          </a:xfrm>
-          <a:prstGeom prst="roundRect">
-            <a:avLst>
-              <a:gd name="adj" fmla="val 4571"/>
-            </a:avLst>
-          </a:prstGeom>
-          <a:solidFill>
-            <a:srgbClr val="17191C"/>
-          </a:solidFill>
-          <a:ln w="9525">
-            <a:solidFill>
-              <a:srgbClr val="292D32"/>
-            </a:solidFill>
-            <a:prstDash val="solid"/>
-          </a:ln>
-        </p:spPr>
-      </p:sp>
-      <p:sp>
-        <p:nvSpPr>
-          <p:cNvPr id="8" name="Text 5"/>
-          <p:cNvSpPr txBox="1"/>
-          <p:nvPr/>
-        </p:nvSpPr>
-        <p:spPr>
-          <a:xfrm>
-            <a:off x="4937760" y="1298448"/>
-            <a:ext cx="3566160" cy="365760"/>
-          </a:xfrm>
-          <a:prstGeom prst="rect">
-            <a:avLst/>
-          </a:prstGeom>
-          <a:noFill/>
-          <a:ln/>
-        </p:spPr>
-        <p:txBody>
-          <a:bodyPr wrap="square" lIns="0" tIns="0" rIns="0" bIns="0" rtlCol="0" anchor="ctr"/>
-          <a:lstStyle/>
-          <a:p>
-            <a:pPr indent="0" marL="0">
-              <a:buNone/>
-            </a:pPr>
-            <a:r>
-              <a:rPr lang="en-US" sz="1800" b="1" dirty="0">
-                <a:solidFill>
-                  <a:srgbClr val="60A5FA"/>
-                </a:solidFill>
-                <a:latin typeface="Calibri" pitchFamily="34" charset="0"/>
-                <a:ea typeface="Calibri" pitchFamily="34" charset="-122"/>
-                <a:cs typeface="Calibri" pitchFamily="34" charset="-120"/>
-              </a:rPr>
-              <a:t>Networking</a:t>
-            </a:r>
-            <a:endParaRPr lang="en-US" sz="1800" dirty="0"/>
-          </a:p>
-        </p:txBody>
-      </p:sp>
-      <p:sp>
-        <p:nvSpPr>
-          <p:cNvPr id="9" name="Text 6"/>
-          <p:cNvSpPr txBox="1"/>
-          <p:nvPr/>
-        </p:nvSpPr>
-        <p:spPr>
-          <a:xfrm>
-            <a:off x="4937760" y="1691640"/>
-            <a:ext cx="3566160" cy="960120"/>
-          </a:xfrm>
-          <a:prstGeom prst="rect">
-            <a:avLst/>
-          </a:prstGeom>
-          <a:noFill/>
-          <a:ln/>
-        </p:spPr>
-        <p:txBody>
-          <a:bodyPr wrap="square" lIns="0" tIns="0" rIns="0" bIns="0" rtlCol="0" anchor="t"/>
-          <a:lstStyle/>
-          <a:p>
-            <a:pPr indent="0" marL="0">
-              <a:buNone/>
-            </a:pPr>
-            <a:r>
-              <a:rPr lang="en-US" sz="1400" dirty="0">
-                <a:solidFill>
-                  <a:srgbClr val="B8BEC7"/>
-                </a:solidFill>
-                <a:latin typeface="Calibri" pitchFamily="34" charset="0"/>
-                <a:ea typeface="Calibri" pitchFamily="34" charset="-122"/>
-                <a:cs typeface="Calibri" pitchFamily="34" charset="-120"/>
-              </a:rPr>
-              <a:t>ClusterIP Services. One Ingress: / goes to the frontend, /api to the backend. /metrics is not exposed.</a:t>
-            </a:r>
-            <a:endParaRPr lang="en-US" sz="1400" dirty="0"/>
-          </a:p>
-        </p:txBody>
-      </p:sp>
-      <p:sp>
-        <p:nvSpPr>
-          <p:cNvPr id="10" name="Shape 7"/>
-          <p:cNvSpPr/>
-          <p:nvPr/>
-        </p:nvSpPr>
-        <p:spPr>
-          <a:xfrm>
-            <a:off x="457200" y="3017520"/>
-            <a:ext cx="3931920" cy="1600200"/>
-          </a:xfrm>
-          <a:prstGeom prst="roundRect">
-            <a:avLst>
-              <a:gd name="adj" fmla="val 4571"/>
-            </a:avLst>
-          </a:prstGeom>
-          <a:solidFill>
-            <a:srgbClr val="17191C"/>
-          </a:solidFill>
-          <a:ln w="9525">
-            <a:solidFill>
-              <a:srgbClr val="292D32"/>
-            </a:solidFill>
-            <a:prstDash val="solid"/>
-          </a:ln>
-        </p:spPr>
-      </p:sp>
-      <p:sp>
-        <p:nvSpPr>
-          <p:cNvPr id="11" name="Text 8"/>
-          <p:cNvSpPr txBox="1"/>
-          <p:nvPr/>
-        </p:nvSpPr>
-        <p:spPr>
-          <a:xfrm>
-            <a:off x="640080" y="3127248"/>
-            <a:ext cx="3566160" cy="365760"/>
-          </a:xfrm>
-          <a:prstGeom prst="rect">
-            <a:avLst/>
-          </a:prstGeom>
-          <a:noFill/>
-          <a:ln/>
-        </p:spPr>
-        <p:txBody>
-          <a:bodyPr wrap="square" lIns="0" tIns="0" rIns="0" bIns="0" rtlCol="0" anchor="ctr"/>
-          <a:lstStyle/>
-          <a:p>
-            <a:pPr indent="0" marL="0">
-              <a:buNone/>
-            </a:pPr>
-            <a:r>
-              <a:rPr lang="en-US" sz="1800" b="1" dirty="0">
-                <a:solidFill>
-                  <a:srgbClr val="34D399"/>
-                </a:solidFill>
-                <a:latin typeface="Calibri" pitchFamily="34" charset="0"/>
-                <a:ea typeface="Calibri" pitchFamily="34" charset="-122"/>
-                <a:cs typeface="Calibri" pitchFamily="34" charset="-120"/>
-              </a:rPr>
-              <a:t>Safe releases</a:t>
-            </a:r>
-            <a:endParaRPr lang="en-US" sz="1800" dirty="0"/>
-          </a:p>
-        </p:txBody>
-      </p:sp>
-      <p:sp>
-        <p:nvSpPr>
-          <p:cNvPr id="12" name="Text 9"/>
-          <p:cNvSpPr txBox="1"/>
-          <p:nvPr/>
-        </p:nvSpPr>
-        <p:spPr>
-          <a:xfrm>
-            <a:off x="640080" y="3520440"/>
-            <a:ext cx="3566160" cy="960120"/>
-          </a:xfrm>
-          <a:prstGeom prst="rect">
-            <a:avLst/>
-          </a:prstGeom>
-          <a:noFill/>
-          <a:ln/>
-        </p:spPr>
-        <p:txBody>
-          <a:bodyPr wrap="square" lIns="0" tIns="0" rIns="0" bIns="0" rtlCol="0" anchor="t"/>
-          <a:lstStyle/>
-          <a:p>
-            <a:pPr indent="0" marL="0">
-              <a:buNone/>
-            </a:pPr>
-            <a:r>
-              <a:rPr lang="en-US" sz="1400" dirty="0">
-                <a:solidFill>
-                  <a:srgbClr val="B8BEC7"/>
-                </a:solidFill>
-                <a:latin typeface="Calibri" pitchFamily="34" charset="0"/>
-                <a:ea typeface="Calibri" pitchFamily="34" charset="-122"/>
-                <a:cs typeface="Calibri" pitchFamily="34" charset="-120"/>
-              </a:rPr>
-              <a:t>Alembic runs once per release as a hook Job. The chart refuses to render without an image tag.</a:t>
-            </a:r>
-            <a:endParaRPr lang="en-US" sz="1400" dirty="0"/>
-          </a:p>
-        </p:txBody>
-      </p:sp>
-      <p:sp>
-        <p:nvSpPr>
-          <p:cNvPr id="13" name="Shape 10"/>
-          <p:cNvSpPr/>
-          <p:nvPr/>
-        </p:nvSpPr>
-        <p:spPr>
-          <a:xfrm>
-            <a:off x="4754880" y="3017520"/>
-            <a:ext cx="3931920" cy="1600200"/>
-          </a:xfrm>
-          <a:prstGeom prst="roundRect">
-            <a:avLst>
-              <a:gd name="adj" fmla="val 4571"/>
-            </a:avLst>
-          </a:prstGeom>
-          <a:solidFill>
-            <a:srgbClr val="17191C"/>
-          </a:solidFill>
-          <a:ln w="9525">
-            <a:solidFill>
-              <a:srgbClr val="292D32"/>
-            </a:solidFill>
-            <a:prstDash val="solid"/>
-          </a:ln>
-        </p:spPr>
-      </p:sp>
-      <p:sp>
-        <p:nvSpPr>
-          <p:cNvPr id="14" name="Text 11"/>
-          <p:cNvSpPr txBox="1"/>
-          <p:nvPr/>
-        </p:nvSpPr>
-        <p:spPr>
-          <a:xfrm>
-            <a:off x="4937760" y="3127248"/>
-            <a:ext cx="3566160" cy="365760"/>
-          </a:xfrm>
-          <a:prstGeom prst="rect">
-            <a:avLst/>
-          </a:prstGeom>
-          <a:noFill/>
-          <a:ln/>
-        </p:spPr>
-        <p:txBody>
-          <a:bodyPr wrap="square" lIns="0" tIns="0" rIns="0" bIns="0" rtlCol="0" anchor="ctr"/>
-          <a:lstStyle/>
-          <a:p>
-            <a:pPr indent="0" marL="0">
-              <a:buNone/>
-            </a:pPr>
-            <a:r>
-              <a:rPr lang="en-US" sz="1800" b="1" dirty="0">
-                <a:solidFill>
-                  <a:srgbClr val="34D399"/>
-                </a:solidFill>
-                <a:latin typeface="Calibri" pitchFamily="34" charset="0"/>
-                <a:ea typeface="Calibri" pitchFamily="34" charset="-122"/>
-                <a:cs typeface="Calibri" pitchFamily="34" charset="-120"/>
-              </a:rPr>
-              <a:t>Probes</a:t>
-            </a:r>
-            <a:endParaRPr lang="en-US" sz="1800" dirty="0"/>
-          </a:p>
-        </p:txBody>
-      </p:sp>
-      <p:sp>
-        <p:nvSpPr>
-          <p:cNvPr id="15" name="Text 12"/>
-          <p:cNvSpPr txBox="1"/>
-          <p:nvPr/>
-        </p:nvSpPr>
-        <p:spPr>
-          <a:xfrm>
-            <a:off x="4937760" y="3520440"/>
-            <a:ext cx="3566160" cy="960120"/>
-          </a:xfrm>
-          <a:prstGeom prst="rect">
-            <a:avLst/>
-          </a:prstGeom>
-          <a:noFill/>
-          <a:ln/>
-        </p:spPr>
-        <p:txBody>
-          <a:bodyPr wrap="square" lIns="0" tIns="0" rIns="0" bIns="0" rtlCol="0" anchor="t"/>
-          <a:lstStyle/>
-          <a:p>
-            <a:pPr indent="0" marL="0">
-              <a:buNone/>
-            </a:pPr>
-            <a:r>
-              <a:rPr lang="en-US" sz="1400" dirty="0">
-                <a:solidFill>
-                  <a:srgbClr val="B8BEC7"/>
-                </a:solidFill>
-                <a:latin typeface="Calibri" pitchFamily="34" charset="0"/>
-                <a:ea typeface="Calibri" pitchFamily="34" charset="-122"/>
-                <a:cs typeface="Calibri" pitchFamily="34" charset="-120"/>
-              </a:rPr>
-              <a:t>/health for liveness, /ready (checks the database) for readiness, plus a startup probe.</a:t>
-            </a:r>
-            <a:endParaRPr lang="en-US" sz="1400" dirty="0"/>
+              <a:t>resources in one plan</a:t>
+            </a:r>
+            <a:endParaRPr lang="en-US" sz="1200" dirty="0"/>
           </a:p>
         </p:txBody>
       </p:sp>
@@ -7439,7 +8829,7 @@
                 <a:ea typeface="Calibri" pitchFamily="34" charset="-122"/>
                 <a:cs typeface="Calibri" pitchFamily="34" charset="-120"/>
               </a:rPr>
-              <a:t>GitOps with ArgoCD</a:t>
+              <a:t>Terraform: applied and destroyed</a:t>
             </a:r>
             <a:endParaRPr lang="en-US" sz="3400" dirty="0"/>
           </a:p>
@@ -7453,35 +8843,57 @@
         </p:nvSpPr>
         <p:spPr>
           <a:xfrm>
-            <a:off x="365760" y="1371600"/>
-            <a:ext cx="1737360" cy="914400"/>
-          </a:xfrm>
-          <a:prstGeom prst="roundRect">
-            <a:avLst>
-              <a:gd name="adj" fmla="val 8000"/>
-            </a:avLst>
+            <a:off x="429768" y="1115568"/>
+            <a:ext cx="4169664" cy="1922301"/>
+          </a:xfrm>
+          <a:prstGeom prst="rect">
+            <a:avLst/>
           </a:prstGeom>
           <a:solidFill>
-            <a:srgbClr val="202327"/>
+            <a:srgbClr val="17191C"/>
           </a:solidFill>
-          <a:ln w="15875">
+          <a:ln w="12700">
             <a:solidFill>
-              <a:srgbClr val="60A5FA"/>
+              <a:srgbClr val="292D32"/>
             </a:solidFill>
             <a:prstDash val="solid"/>
           </a:ln>
         </p:spPr>
       </p:sp>
-      <p:sp>
-        <p:nvSpPr>
-          <p:cNvPr id="5" name="Text 2"/>
+      <p:pic>
+        <p:nvPicPr>
+          <p:cNvPr id="5" name="Image 0" descr="D:/Resume projects/StudAura/docs/screenshots/aws-eks-cluster.png">    </p:cNvPr>
+          <p:cNvPicPr>
+            <a:picLocks noChangeAspect="1"/>
+          </p:cNvPicPr>
+          <p:nvPr/>
+        </p:nvPicPr>
+        <p:blipFill>
+          <a:blip r:embed="rId1"/>
+          <a:stretch>
+            <a:fillRect/>
+          </a:stretch>
+        </p:blipFill>
+        <p:spPr>
+          <a:xfrm>
+            <a:off x="457200" y="1143000"/>
+            <a:ext cx="4114800" cy="1867437"/>
+          </a:xfrm>
+          <a:prstGeom prst="rect">
+            <a:avLst/>
+          </a:prstGeom>
+        </p:spPr>
+      </p:pic>
+      <p:sp>
+        <p:nvSpPr>
+          <p:cNvPr id="6" name="Text 2"/>
           <p:cNvSpPr txBox="1"/>
           <p:nvPr/>
         </p:nvSpPr>
         <p:spPr>
           <a:xfrm>
-            <a:off x="365760" y="1371600"/>
-            <a:ext cx="1737360" cy="914400"/>
+            <a:off x="457200" y="3065301"/>
+            <a:ext cx="4114800" cy="219456"/>
           </a:xfrm>
           <a:prstGeom prst="rect">
             <a:avLst/>
@@ -7490,31 +8902,14 @@
           <a:ln/>
         </p:spPr>
         <p:txBody>
-          <a:bodyPr wrap="square" lIns="508" tIns="508" rIns="508" bIns="508" rtlCol="0" anchor="ctr"/>
+          <a:bodyPr wrap="square" lIns="0" tIns="0" rIns="0" bIns="0" rtlCol="0" anchor="t"/>
           <a:lstStyle/>
           <a:p>
             <a:pPr algn="ctr" indent="0" marL="0">
               <a:buNone/>
             </a:pPr>
             <a:r>
-              <a:rPr lang="en-US" sz="1400" b="1" dirty="0">
-                <a:solidFill>
-                  <a:srgbClr val="F5F5F5"/>
-                </a:solidFill>
-                <a:latin typeface="Calibri" pitchFamily="34" charset="0"/>
-                <a:ea typeface="Calibri" pitchFamily="34" charset="-122"/>
-                <a:cs typeface="Calibri" pitchFamily="34" charset="-120"/>
-              </a:rPr>
-              <a:t>main</a:t>
-            </a:r>
-            <a:endParaRPr lang="en-US" sz="1400" dirty="0"/>
-          </a:p>
-          <a:p>
-            <a:pPr algn="ctr" indent="0" marL="0">
-              <a:buNone/>
-            </a:pPr>
-            <a:r>
-              <a:rPr lang="en-US" sz="1200" dirty="0">
+              <a:rPr lang="en-US" sz="1100" dirty="0">
                 <a:solidFill>
                   <a:srgbClr val="B8BEC7"/>
                 </a:solidFill>
@@ -7522,49 +8917,71 @@
                 <a:ea typeface="Calibri" pitchFamily="34" charset="-122"/>
                 <a:cs typeface="Calibri" pitchFamily="34" charset="-120"/>
               </a:rPr>
-              <a:t>merge</a:t>
-            </a:r>
-            <a:endParaRPr lang="en-US" sz="1400" dirty="0"/>
-          </a:p>
-        </p:txBody>
-      </p:sp>
-      <p:sp>
-        <p:nvSpPr>
-          <p:cNvPr id="6" name="Shape 3"/>
+              <a:t>EKS cluster studaura-demo, Active</a:t>
+            </a:r>
+            <a:endParaRPr lang="en-US" sz="1100" dirty="0"/>
+          </a:p>
+        </p:txBody>
+      </p:sp>
+      <p:sp>
+        <p:nvSpPr>
+          <p:cNvPr id="7" name="Shape 3"/>
           <p:cNvSpPr/>
           <p:nvPr/>
         </p:nvSpPr>
         <p:spPr>
           <a:xfrm>
-            <a:off x="2514600" y="1371600"/>
-            <a:ext cx="1737360" cy="914400"/>
-          </a:xfrm>
-          <a:prstGeom prst="roundRect">
-            <a:avLst>
-              <a:gd name="adj" fmla="val 8000"/>
-            </a:avLst>
+            <a:off x="4636008" y="1115568"/>
+            <a:ext cx="4078224" cy="1798950"/>
+          </a:xfrm>
+          <a:prstGeom prst="rect">
+            <a:avLst/>
           </a:prstGeom>
           <a:solidFill>
-            <a:srgbClr val="202327"/>
+            <a:srgbClr val="17191C"/>
           </a:solidFill>
-          <a:ln w="15875">
+          <a:ln w="12700">
             <a:solidFill>
-              <a:srgbClr val="F21D3D"/>
+              <a:srgbClr val="292D32"/>
             </a:solidFill>
             <a:prstDash val="solid"/>
           </a:ln>
         </p:spPr>
       </p:sp>
-      <p:sp>
-        <p:nvSpPr>
-          <p:cNvPr id="7" name="Text 4"/>
+      <p:pic>
+        <p:nvPicPr>
+          <p:cNvPr id="8" name="Image 1" descr="D:/Resume projects/StudAura/docs/screenshots/aws-eks-nodegroup.png">    </p:cNvPr>
+          <p:cNvPicPr>
+            <a:picLocks noChangeAspect="1"/>
+          </p:cNvPicPr>
+          <p:nvPr/>
+        </p:nvPicPr>
+        <p:blipFill>
+          <a:blip r:embed="rId2"/>
+          <a:stretch>
+            <a:fillRect/>
+          </a:stretch>
+        </p:blipFill>
+        <p:spPr>
+          <a:xfrm>
+            <a:off x="4663440" y="1143000"/>
+            <a:ext cx="4023360" cy="1744086"/>
+          </a:xfrm>
+          <a:prstGeom prst="rect">
+            <a:avLst/>
+          </a:prstGeom>
+        </p:spPr>
+      </p:pic>
+      <p:sp>
+        <p:nvSpPr>
+          <p:cNvPr id="9" name="Text 4"/>
           <p:cNvSpPr txBox="1"/>
           <p:nvPr/>
         </p:nvSpPr>
         <p:spPr>
           <a:xfrm>
-            <a:off x="2514600" y="1371600"/>
-            <a:ext cx="1737360" cy="914400"/>
+            <a:off x="4663440" y="2941950"/>
+            <a:ext cx="4023360" cy="219456"/>
           </a:xfrm>
           <a:prstGeom prst="rect">
             <a:avLst/>
@@ -7573,31 +8990,14 @@
           <a:ln/>
         </p:spPr>
         <p:txBody>
-          <a:bodyPr wrap="square" lIns="508" tIns="508" rIns="508" bIns="508" rtlCol="0" anchor="ctr"/>
+          <a:bodyPr wrap="square" lIns="0" tIns="0" rIns="0" bIns="0" rtlCol="0" anchor="t"/>
           <a:lstStyle/>
           <a:p>
             <a:pPr algn="ctr" indent="0" marL="0">
               <a:buNone/>
             </a:pPr>
             <a:r>
-              <a:rPr lang="en-US" sz="1400" b="1" dirty="0">
-                <a:solidFill>
-                  <a:srgbClr val="F5F5F5"/>
-                </a:solidFill>
-                <a:latin typeface="Calibri" pitchFamily="34" charset="0"/>
-                <a:ea typeface="Calibri" pitchFamily="34" charset="-122"/>
-                <a:cs typeface="Calibri" pitchFamily="34" charset="-120"/>
-              </a:rPr>
-              <a:t>CI publish</a:t>
-            </a:r>
-            <a:endParaRPr lang="en-US" sz="1400" dirty="0"/>
-          </a:p>
-          <a:p>
-            <a:pPr algn="ctr" indent="0" marL="0">
-              <a:buNone/>
-            </a:pPr>
-            <a:r>
-              <a:rPr lang="en-US" sz="1200" dirty="0">
+              <a:rPr lang="en-US" sz="1100" dirty="0">
                 <a:solidFill>
                   <a:srgbClr val="B8BEC7"/>
                 </a:solidFill>
@@ -7605,49 +9005,71 @@
                 <a:ea typeface="Calibri" pitchFamily="34" charset="-122"/>
                 <a:cs typeface="Calibri" pitchFamily="34" charset="-120"/>
               </a:rPr>
-              <a:t>images in GHCR</a:t>
-            </a:r>
-            <a:endParaRPr lang="en-US" sz="1400" dirty="0"/>
-          </a:p>
-        </p:txBody>
-      </p:sp>
-      <p:sp>
-        <p:nvSpPr>
-          <p:cNvPr id="8" name="Shape 5"/>
+              <a:t>Node group: 2 x c7i-flex.large, Ready</a:t>
+            </a:r>
+            <a:endParaRPr lang="en-US" sz="1100" dirty="0"/>
+          </a:p>
+        </p:txBody>
+      </p:sp>
+      <p:sp>
+        <p:nvSpPr>
+          <p:cNvPr id="10" name="Shape 5"/>
           <p:cNvSpPr/>
           <p:nvPr/>
         </p:nvSpPr>
         <p:spPr>
           <a:xfrm>
-            <a:off x="4663440" y="1371600"/>
-            <a:ext cx="1737360" cy="914400"/>
-          </a:xfrm>
-          <a:prstGeom prst="roundRect">
-            <a:avLst>
-              <a:gd name="adj" fmla="val 8000"/>
-            </a:avLst>
+            <a:off x="905025" y="3493008"/>
+            <a:ext cx="2304749" cy="1152144"/>
+          </a:xfrm>
+          <a:prstGeom prst="rect">
+            <a:avLst/>
           </a:prstGeom>
           <a:solidFill>
-            <a:srgbClr val="202327"/>
+            <a:srgbClr val="17191C"/>
           </a:solidFill>
-          <a:ln w="15875">
+          <a:ln w="12700">
             <a:solidFill>
-              <a:srgbClr val="34D399"/>
+              <a:srgbClr val="292D32"/>
             </a:solidFill>
             <a:prstDash val="solid"/>
           </a:ln>
         </p:spPr>
       </p:sp>
-      <p:sp>
-        <p:nvSpPr>
-          <p:cNvPr id="9" name="Text 6"/>
+      <p:pic>
+        <p:nvPicPr>
+          <p:cNvPr id="11" name="Image 2" descr="D:/Resume projects/StudAura/docs/screenshots/terraform-destroy.png">    </p:cNvPr>
+          <p:cNvPicPr>
+            <a:picLocks noChangeAspect="1"/>
+          </p:cNvPicPr>
+          <p:nvPr/>
+        </p:nvPicPr>
+        <p:blipFill>
+          <a:blip r:embed="rId3"/>
+          <a:stretch>
+            <a:fillRect/>
+          </a:stretch>
+        </p:blipFill>
+        <p:spPr>
+          <a:xfrm>
+            <a:off x="932457" y="3520440"/>
+            <a:ext cx="2249885" cy="1097280"/>
+          </a:xfrm>
+          <a:prstGeom prst="rect">
+            <a:avLst/>
+          </a:prstGeom>
+        </p:spPr>
+      </p:pic>
+      <p:sp>
+        <p:nvSpPr>
+          <p:cNvPr id="12" name="Text 6"/>
           <p:cNvSpPr txBox="1"/>
           <p:nvPr/>
         </p:nvSpPr>
         <p:spPr>
           <a:xfrm>
-            <a:off x="4663440" y="1371600"/>
-            <a:ext cx="1737360" cy="914400"/>
+            <a:off x="457200" y="4672584"/>
+            <a:ext cx="3200400" cy="219456"/>
           </a:xfrm>
           <a:prstGeom prst="rect">
             <a:avLst/>
@@ -7656,31 +9078,14 @@
           <a:ln/>
         </p:spPr>
         <p:txBody>
-          <a:bodyPr wrap="square" lIns="508" tIns="508" rIns="508" bIns="508" rtlCol="0" anchor="ctr"/>
+          <a:bodyPr wrap="square" lIns="0" tIns="0" rIns="0" bIns="0" rtlCol="0" anchor="t"/>
           <a:lstStyle/>
           <a:p>
             <a:pPr algn="ctr" indent="0" marL="0">
               <a:buNone/>
             </a:pPr>
             <a:r>
-              <a:rPr lang="en-US" sz="1400" b="1" dirty="0">
-                <a:solidFill>
-                  <a:srgbClr val="F5F5F5"/>
-                </a:solidFill>
-                <a:latin typeface="Calibri" pitchFamily="34" charset="0"/>
-                <a:ea typeface="Calibri" pitchFamily="34" charset="-122"/>
-                <a:cs typeface="Calibri" pitchFamily="34" charset="-120"/>
-              </a:rPr>
-              <a:t>deploy branch</a:t>
-            </a:r>
-            <a:endParaRPr lang="en-US" sz="1400" dirty="0"/>
-          </a:p>
-          <a:p>
-            <a:pPr algn="ctr" indent="0" marL="0">
-              <a:buNone/>
-            </a:pPr>
-            <a:r>
-              <a:rPr lang="en-US" sz="1200" dirty="0">
+              <a:rPr lang="en-US" sz="1100" dirty="0">
                 <a:solidFill>
                   <a:srgbClr val="B8BEC7"/>
                 </a:solidFill>
@@ -7688,177 +9093,22 @@
                 <a:ea typeface="Calibri" pitchFamily="34" charset="-122"/>
                 <a:cs typeface="Calibri" pitchFamily="34" charset="-120"/>
               </a:rPr>
-              <a:t>image.yaml: SHA</a:t>
-            </a:r>
-            <a:endParaRPr lang="en-US" sz="1400" dirty="0"/>
-          </a:p>
-        </p:txBody>
-      </p:sp>
-      <p:sp>
-        <p:nvSpPr>
-          <p:cNvPr id="10" name="Shape 7"/>
-          <p:cNvSpPr/>
-          <p:nvPr/>
-        </p:nvSpPr>
-        <p:spPr>
-          <a:xfrm>
-            <a:off x="6812280" y="1371600"/>
-            <a:ext cx="1965960" cy="914400"/>
-          </a:xfrm>
-          <a:prstGeom prst="roundRect">
-            <a:avLst>
-              <a:gd name="adj" fmla="val 8000"/>
-            </a:avLst>
-          </a:prstGeom>
-          <a:solidFill>
-            <a:srgbClr val="202327"/>
-          </a:solidFill>
-          <a:ln w="15875">
-            <a:solidFill>
-              <a:srgbClr val="34D399"/>
-            </a:solidFill>
-            <a:prstDash val="solid"/>
-          </a:ln>
-        </p:spPr>
-      </p:sp>
-      <p:sp>
-        <p:nvSpPr>
-          <p:cNvPr id="11" name="Text 8"/>
+              <a:t>terraform destroy: 35 destroyed</a:t>
+            </a:r>
+            <a:endParaRPr lang="en-US" sz="1100" dirty="0"/>
+          </a:p>
+        </p:txBody>
+      </p:sp>
+      <p:sp>
+        <p:nvSpPr>
+          <p:cNvPr id="13" name="Text 7"/>
           <p:cNvSpPr txBox="1"/>
           <p:nvPr/>
         </p:nvSpPr>
         <p:spPr>
           <a:xfrm>
-            <a:off x="6812280" y="1371600"/>
-            <a:ext cx="1965960" cy="914400"/>
-          </a:xfrm>
-          <a:prstGeom prst="rect">
-            <a:avLst/>
-          </a:prstGeom>
-          <a:noFill/>
-          <a:ln/>
-        </p:spPr>
-        <p:txBody>
-          <a:bodyPr wrap="square" lIns="508" tIns="508" rIns="508" bIns="508" rtlCol="0" anchor="ctr"/>
-          <a:lstStyle/>
-          <a:p>
-            <a:pPr algn="ctr" indent="0" marL="0">
-              <a:buNone/>
-            </a:pPr>
-            <a:r>
-              <a:rPr lang="en-US" sz="1400" b="1" dirty="0">
-                <a:solidFill>
-                  <a:srgbClr val="F5F5F5"/>
-                </a:solidFill>
-                <a:latin typeface="Calibri" pitchFamily="34" charset="0"/>
-                <a:ea typeface="Calibri" pitchFamily="34" charset="-122"/>
-                <a:cs typeface="Calibri" pitchFamily="34" charset="-120"/>
-              </a:rPr>
-              <a:t>ArgoCD</a:t>
-            </a:r>
-            <a:endParaRPr lang="en-US" sz="1400" dirty="0"/>
-          </a:p>
-          <a:p>
-            <a:pPr algn="ctr" indent="0" marL="0">
-              <a:buNone/>
-            </a:pPr>
-            <a:r>
-              <a:rPr lang="en-US" sz="1200" dirty="0">
-                <a:solidFill>
-                  <a:srgbClr val="B8BEC7"/>
-                </a:solidFill>
-                <a:latin typeface="Calibri" pitchFamily="34" charset="0"/>
-                <a:ea typeface="Calibri" pitchFamily="34" charset="-122"/>
-                <a:cs typeface="Calibri" pitchFamily="34" charset="-120"/>
-              </a:rPr>
-              <a:t>sync + self-heal</a:t>
-            </a:r>
-            <a:endParaRPr lang="en-US" sz="1400" dirty="0"/>
-          </a:p>
-        </p:txBody>
-      </p:sp>
-      <p:sp>
-        <p:nvSpPr>
-          <p:cNvPr id="12" name="Shape 9"/>
-          <p:cNvSpPr/>
-          <p:nvPr/>
-        </p:nvSpPr>
-        <p:spPr>
-          <a:xfrm>
-            <a:off x="2103120" y="1828800"/>
-            <a:ext cx="411480" cy="0"/>
-          </a:xfrm>
-          <a:prstGeom prst="line">
-            <a:avLst/>
-          </a:prstGeom>
-          <a:noFill/>
-          <a:ln w="19050">
-            <a:solidFill>
-              <a:srgbClr val="B8BEC7"/>
-            </a:solidFill>
-            <a:prstDash val="solid"/>
-            <a:tailEnd type="triangle"/>
-          </a:ln>
-        </p:spPr>
-      </p:sp>
-      <p:sp>
-        <p:nvSpPr>
-          <p:cNvPr id="13" name="Shape 10"/>
-          <p:cNvSpPr/>
-          <p:nvPr/>
-        </p:nvSpPr>
-        <p:spPr>
-          <a:xfrm>
-            <a:off x="4251960" y="1828800"/>
-            <a:ext cx="411480" cy="0"/>
-          </a:xfrm>
-          <a:prstGeom prst="line">
-            <a:avLst/>
-          </a:prstGeom>
-          <a:noFill/>
-          <a:ln w="19050">
-            <a:solidFill>
-              <a:srgbClr val="B8BEC7"/>
-            </a:solidFill>
-            <a:prstDash val="solid"/>
-            <a:tailEnd type="triangle"/>
-          </a:ln>
-        </p:spPr>
-      </p:sp>
-      <p:sp>
-        <p:nvSpPr>
-          <p:cNvPr id="14" name="Shape 11"/>
-          <p:cNvSpPr/>
-          <p:nvPr/>
-        </p:nvSpPr>
-        <p:spPr>
-          <a:xfrm>
-            <a:off x="6400800" y="1828800"/>
-            <a:ext cx="411480" cy="0"/>
-          </a:xfrm>
-          <a:prstGeom prst="line">
-            <a:avLst/>
-          </a:prstGeom>
-          <a:noFill/>
-          <a:ln w="19050">
-            <a:solidFill>
-              <a:srgbClr val="B8BEC7"/>
-            </a:solidFill>
-            <a:prstDash val="solid"/>
-            <a:tailEnd type="triangle"/>
-          </a:ln>
-        </p:spPr>
-      </p:sp>
-      <p:sp>
-        <p:nvSpPr>
-          <p:cNvPr id="15" name="Text 12"/>
-          <p:cNvSpPr txBox="1"/>
-          <p:nvPr/>
-        </p:nvSpPr>
-        <p:spPr>
-          <a:xfrm>
-            <a:off x="457200" y="2743200"/>
-            <a:ext cx="8229600" cy="2103120"/>
+            <a:off x="4023360" y="3611880"/>
+            <a:ext cx="4663440" cy="1188720"/>
           </a:xfrm>
           <a:prstGeom prst="rect">
             <a:avLst/>
@@ -7878,7 +9128,7 @@
               <a:buChar char="•"/>
             </a:pPr>
             <a:r>
-              <a:rPr lang="en-US" sz="1600" dirty="0">
+              <a:rPr lang="en-US" sz="1400" dirty="0">
                 <a:solidFill>
                   <a:srgbClr val="F5F5F5"/>
                 </a:solidFill>
@@ -7886,9 +9136,9 @@
                 <a:ea typeface="Calibri" pitchFamily="34" charset="-122"/>
                 <a:cs typeface="Calibri" pitchFamily="34" charset="-120"/>
               </a:rPr>
-              <a:t>The cluster pulls its desired state from Git; CI holds no cluster credentials</a:t>
-            </a:r>
-            <a:endParaRPr lang="en-US" sz="1600" dirty="0"/>
+              <a:t>init, plan and apply all run from the CLI</a:t>
+            </a:r>
+            <a:endParaRPr lang="en-US" sz="1400" dirty="0"/>
           </a:p>
           <a:p>
             <a:pPr marL="342900" indent="-342900">
@@ -7899,7 +9149,7 @@
               <a:buChar char="•"/>
             </a:pPr>
             <a:r>
-              <a:rPr lang="en-US" sz="1600" dirty="0">
+              <a:rPr lang="en-US" sz="1400" dirty="0">
                 <a:solidFill>
                   <a:srgbClr val="F5F5F5"/>
                 </a:solidFill>
@@ -7907,51 +9157,9 @@
                 <a:ea typeface="Calibri" pitchFamily="34" charset="-122"/>
                 <a:cs typeface="Calibri" pitchFamily="34" charset="-120"/>
               </a:rPr>
-              <a:t>Automated sync with prune and self-heal reverts manual drift</a:t>
-            </a:r>
-            <a:endParaRPr lang="en-US" sz="1600" dirty="0"/>
-          </a:p>
-          <a:p>
-            <a:pPr marL="342900" indent="-342900">
-              <a:spcAft>
-                <a:spcPts val="600"/>
-              </a:spcAft>
-              <a:buSzPct val="100000"/>
-              <a:buChar char="•"/>
-            </a:pPr>
-            <a:r>
-              <a:rPr lang="en-US" sz="1600" dirty="0">
-                <a:solidFill>
-                  <a:srgbClr val="F5F5F5"/>
-                </a:solidFill>
-                <a:latin typeface="Calibri" pitchFamily="34" charset="0"/>
-                <a:ea typeface="Calibri" pitchFamily="34" charset="-122"/>
-                <a:cs typeface="Calibri" pitchFamily="34" charset="-120"/>
-              </a:rPr>
-              <a:t>The migration runs first, as a PreSync hook</a:t>
-            </a:r>
-            <a:endParaRPr lang="en-US" sz="1600" dirty="0"/>
-          </a:p>
-          <a:p>
-            <a:pPr marL="342900" indent="-342900">
-              <a:spcAft>
-                <a:spcPts val="600"/>
-              </a:spcAft>
-              <a:buSzPct val="100000"/>
-              <a:buChar char="•"/>
-            </a:pPr>
-            <a:r>
-              <a:rPr lang="en-US" sz="1600" dirty="0">
-                <a:solidFill>
-                  <a:srgbClr val="F5F5F5"/>
-                </a:solidFill>
-                <a:latin typeface="Calibri" pitchFamily="34" charset="0"/>
-                <a:ea typeface="Calibri" pitchFamily="34" charset="-122"/>
-                <a:cs typeface="Calibri" pitchFamily="34" charset="-120"/>
-              </a:rPr>
-              <a:t>Rolling back a release is a Git revert on the deploy branch</a:t>
-            </a:r>
-            <a:endParaRPr lang="en-US" sz="1600" dirty="0"/>
+              <a:t>Destroyed after the demo so nothing keeps billing</a:t>
+            </a:r>
+            <a:endParaRPr lang="en-US" sz="1400" dirty="0"/>
           </a:p>
         </p:txBody>
       </p:sp>
